--- a/docs/paper-figures/common_plane_alignment.pptx
+++ b/docs/paper-figures/common_plane_alignment.pptx
@@ -972,8 +972,8 @@
         </p:nvSpPr>
         <p:spPr>
           <a:xfrm>
-            <a:off x="2560819" y="1303705"/>
-            <a:ext cx="5760221" cy="3559316"/>
+            <a:off x="3862065" y="1686958"/>
+            <a:ext cx="4047495" cy="2995378"/>
           </a:xfrm>
           <a:custGeom>
             <a:avLst/>
@@ -982,18 +982,18 @@
             <a:cxnLst/>
             <a:rect l="l" t="t" r="r" b="b"/>
             <a:pathLst>
-              <a:path w="5760221" h="3559316">
+              <a:path w="4047495" h="2995378">
                 <a:moveTo>
-                  <a:pt x="0" y="92891"/>
+                  <a:pt x="0" y="0"/>
                 </a:moveTo>
                 <a:lnTo>
-                  <a:pt x="4786971" y="0"/>
+                  <a:pt x="3634833" y="157909"/>
                 </a:lnTo>
                 <a:lnTo>
-                  <a:pt x="5760221" y="3466425"/>
+                  <a:pt x="4047495" y="2995378"/>
                 </a:lnTo>
                 <a:lnTo>
-                  <a:pt x="973251" y="3559316"/>
+                  <a:pt x="647676" y="2481942"/>
                 </a:lnTo>
                 <a:close/>
               </a:path>
@@ -1018,8 +1018,8 @@
         </p:nvSpPr>
         <p:spPr>
           <a:xfrm>
-            <a:off x="3201355" y="1814445"/>
-            <a:ext cx="1756375" cy="1918968"/>
+            <a:off x="4253438" y="2077856"/>
+            <a:ext cx="1242437" cy="1440685"/>
           </a:xfrm>
           <a:custGeom>
             <a:avLst/>
@@ -1028,18 +1028,18 @@
             <a:cxnLst/>
             <a:rect l="l" t="t" r="r" b="b"/>
             <a:pathLst>
-              <a:path w="1756375" h="1918968">
+              <a:path w="1242437" h="1440685">
                 <a:moveTo>
-                  <a:pt x="0" y="94848"/>
+                  <a:pt x="0" y="9969"/>
                 </a:moveTo>
                 <a:lnTo>
-                  <a:pt x="1105665" y="0"/>
+                  <a:pt x="819136" y="0"/>
                 </a:lnTo>
                 <a:lnTo>
-                  <a:pt x="1756375" y="1824120"/>
+                  <a:pt x="1242437" y="1440685"/>
                 </a:lnTo>
                 <a:lnTo>
-                  <a:pt x="650710" y="1918968"/>
+                  <a:pt x="441384" y="1398433"/>
                 </a:lnTo>
                 <a:close/>
               </a:path>
@@ -1064,7 +1064,7 @@
         </p:nvSpPr>
         <p:spPr>
           <a:xfrm>
-            <a:off x="3169351" y="1877290"/>
+            <a:off x="4221434" y="2055820"/>
             <a:ext cx="64008" cy="64008"/>
           </a:xfrm>
           <a:prstGeom prst="ellipse">
@@ -1089,7 +1089,7 @@
         </p:nvSpPr>
         <p:spPr>
           <a:xfrm>
-            <a:off x="4275016" y="1782441"/>
+            <a:off x="5040570" y="2045852"/>
             <a:ext cx="64008" cy="64008"/>
           </a:xfrm>
           <a:prstGeom prst="ellipse">
@@ -1114,7 +1114,7 @@
         </p:nvSpPr>
         <p:spPr>
           <a:xfrm>
-            <a:off x="4925727" y="3606561"/>
+            <a:off x="5463870" y="3486537"/>
             <a:ext cx="64008" cy="64008"/>
           </a:xfrm>
           <a:prstGeom prst="ellipse">
@@ -1139,7 +1139,7 @@
         </p:nvSpPr>
         <p:spPr>
           <a:xfrm>
-            <a:off x="3820061" y="3701410"/>
+            <a:off x="4662818" y="3444285"/>
             <a:ext cx="64008" cy="64008"/>
           </a:xfrm>
           <a:prstGeom prst="ellipse">
@@ -1164,8 +1164,8 @@
         </p:nvSpPr>
         <p:spPr>
           <a:xfrm>
-            <a:off x="5202563" y="1739882"/>
-            <a:ext cx="2012523" cy="1064842"/>
+            <a:off x="5674171" y="2062869"/>
+            <a:ext cx="1586148" cy="1034298"/>
           </a:xfrm>
           <a:custGeom>
             <a:avLst/>
@@ -1174,18 +1174,18 @@
             <a:cxnLst/>
             <a:rect l="l" t="t" r="r" b="b"/>
             <a:pathLst>
-              <a:path w="2012523" h="1064842">
+              <a:path w="1586148" h="1034298">
                 <a:moveTo>
                   <a:pt x="0" y="0"/>
                 </a:moveTo>
                 <a:lnTo>
-                  <a:pt x="1785530" y="51390"/>
+                  <a:pt x="1497943" y="158517"/>
                 </a:lnTo>
                 <a:lnTo>
-                  <a:pt x="2012523" y="1064842"/>
+                  <a:pt x="1586148" y="1034298"/>
                 </a:lnTo>
                 <a:lnTo>
-                  <a:pt x="226994" y="1013452"/>
+                  <a:pt x="126711" y="832694"/>
                 </a:lnTo>
                 <a:close/>
               </a:path>
@@ -1210,7 +1210,7 @@
         </p:nvSpPr>
         <p:spPr>
           <a:xfrm>
-            <a:off x="5170559" y="1707878"/>
+            <a:off x="5642167" y="2030865"/>
             <a:ext cx="64008" cy="64008"/>
           </a:xfrm>
           <a:prstGeom prst="ellipse">
@@ -1235,7 +1235,7 @@
         </p:nvSpPr>
         <p:spPr>
           <a:xfrm>
-            <a:off x="6956088" y="1759268"/>
+            <a:off x="7140110" y="2189382"/>
             <a:ext cx="64008" cy="64008"/>
           </a:xfrm>
           <a:prstGeom prst="ellipse">
@@ -1260,7 +1260,7 @@
         </p:nvSpPr>
         <p:spPr>
           <a:xfrm>
-            <a:off x="7183082" y="2772720"/>
+            <a:off x="7228315" y="3065163"/>
             <a:ext cx="64008" cy="64008"/>
           </a:xfrm>
           <a:prstGeom prst="ellipse">
@@ -1285,7 +1285,7 @@
         </p:nvSpPr>
         <p:spPr>
           <a:xfrm>
-            <a:off x="5397552" y="2721330"/>
+            <a:off x="5768877" y="2863559"/>
             <a:ext cx="64008" cy="64008"/>
           </a:xfrm>
           <a:prstGeom prst="ellipse">
@@ -1310,8 +1310,8 @@
         </p:nvSpPr>
         <p:spPr>
           <a:xfrm>
-            <a:off x="6254230" y="3138976"/>
-            <a:ext cx="1177209" cy="1266929"/>
+            <a:off x="6356100" y="3298557"/>
+            <a:ext cx="887027" cy="954287"/>
           </a:xfrm>
           <a:custGeom>
             <a:avLst/>
@@ -1320,18 +1320,18 @@
             <a:cxnLst/>
             <a:rect l="l" t="t" r="r" b="b"/>
             <a:pathLst>
-              <a:path w="1177209" h="1266929">
+              <a:path w="887027" h="954287">
                 <a:moveTo>
-                  <a:pt x="0" y="104580"/>
+                  <a:pt x="0" y="13545"/>
                 </a:moveTo>
                 <a:lnTo>
-                  <a:pt x="673146" y="0"/>
+                  <a:pt x="577481" y="0"/>
                 </a:lnTo>
                 <a:lnTo>
-                  <a:pt x="1177209" y="1162349"/>
+                  <a:pt x="887027" y="954287"/>
                 </a:lnTo>
                 <a:lnTo>
-                  <a:pt x="504063" y="1266929"/>
+                  <a:pt x="316255" y="943421"/>
                 </a:lnTo>
                 <a:close/>
               </a:path>
@@ -1356,7 +1356,7 @@
         </p:nvSpPr>
         <p:spPr>
           <a:xfrm>
-            <a:off x="6222226" y="3211552"/>
+            <a:off x="6324096" y="3280098"/>
             <a:ext cx="64008" cy="64008"/>
           </a:xfrm>
           <a:prstGeom prst="ellipse">
@@ -1381,7 +1381,7 @@
         </p:nvSpPr>
         <p:spPr>
           <a:xfrm>
-            <a:off x="6895372" y="3106972"/>
+            <a:off x="6901577" y="3266553"/>
             <a:ext cx="64008" cy="64008"/>
           </a:xfrm>
           <a:prstGeom prst="ellipse">
@@ -1406,7 +1406,7 @@
         </p:nvSpPr>
         <p:spPr>
           <a:xfrm>
-            <a:off x="7399435" y="4269321"/>
+            <a:off x="7211123" y="4220839"/>
             <a:ext cx="64008" cy="64008"/>
           </a:xfrm>
           <a:prstGeom prst="ellipse">
@@ -1431,7 +1431,7 @@
         </p:nvSpPr>
         <p:spPr>
           <a:xfrm>
-            <a:off x="6726288" y="4373901"/>
+            <a:off x="6640351" y="4209974"/>
             <a:ext cx="64008" cy="64008"/>
           </a:xfrm>
           <a:prstGeom prst="ellipse">
@@ -1456,7 +1456,7 @@
         </p:nvSpPr>
         <p:spPr>
           <a:xfrm>
-            <a:off x="3671229" y="4954460"/>
+            <a:off x="4983480" y="4773776"/>
             <a:ext cx="2926080" cy="292608"/>
           </a:xfrm>
           <a:prstGeom prst="rect">
@@ -1469,7 +1469,7 @@
           <a:bodyPr wrap="square" lIns="0" tIns="0" rIns="0" bIns="0" rtlCol="0" anchor="ctr"/>
           <a:lstStyle/>
           <a:p>
-            <a:pPr algn="l" indent="0" marL="0">
+            <a:pPr algn="r" indent="0" marL="0">
               <a:buNone/>
             </a:pPr>
             <a:r>
@@ -1483,7 +1483,7 @@
               </a:rPr>
               <a:t>공통</a:t>
             </a:r>
-            <a:pPr algn="l" indent="0" marL="0">
+            <a:pPr algn="r" indent="0" marL="0">
               <a:buNone/>
             </a:pPr>
             <a:r>
@@ -1497,7 +1497,7 @@
               </a:rPr>
               <a:t> </a:t>
             </a:r>
-            <a:pPr algn="l" indent="0" marL="0">
+            <a:pPr algn="r" indent="0" marL="0">
               <a:buNone/>
             </a:pPr>
             <a:r>
@@ -1511,7 +1511,7 @@
               </a:rPr>
               <a:t>평면</a:t>
             </a:r>
-            <a:pPr algn="l" indent="0" marL="0">
+            <a:pPr algn="r" indent="0" marL="0">
               <a:buNone/>
             </a:pPr>
             <a:r>
@@ -1525,7 +1525,7 @@
               </a:rPr>
               <a:t>   </a:t>
             </a:r>
-            <a:pPr algn="l" indent="0" marL="0">
+            <a:pPr algn="r" indent="0" marL="0">
               <a:buNone/>
             </a:pPr>
             <a:r>
@@ -1539,7 +1539,7 @@
               </a:rPr>
               <a:t>z</a:t>
             </a:r>
-            <a:pPr algn="l" indent="0" marL="0">
+            <a:pPr algn="r" indent="0" marL="0">
               <a:buNone/>
             </a:pPr>
             <a:r>
@@ -1553,7 +1553,7 @@
               </a:rPr>
               <a:t> = </a:t>
             </a:r>
-            <a:pPr algn="l" indent="0" marL="0">
+            <a:pPr algn="r" indent="0" marL="0">
               <a:buNone/>
             </a:pPr>
             <a:r>
@@ -1567,7 +1567,7 @@
               </a:rPr>
               <a:t>ax</a:t>
             </a:r>
-            <a:pPr algn="l" indent="0" marL="0">
+            <a:pPr algn="r" indent="0" marL="0">
               <a:buNone/>
             </a:pPr>
             <a:r>
@@ -1581,7 +1581,7 @@
               </a:rPr>
               <a:t> + </a:t>
             </a:r>
-            <a:pPr algn="l" indent="0" marL="0">
+            <a:pPr algn="r" indent="0" marL="0">
               <a:buNone/>
             </a:pPr>
             <a:r>
@@ -1595,7 +1595,7 @@
               </a:rPr>
               <a:t>by</a:t>
             </a:r>
-            <a:pPr algn="l" indent="0" marL="0">
+            <a:pPr algn="r" indent="0" marL="0">
               <a:buNone/>
             </a:pPr>
             <a:r>
@@ -1609,7 +1609,7 @@
               </a:rPr>
               <a:t> + </a:t>
             </a:r>
-            <a:pPr algn="l" indent="0" marL="0">
+            <a:pPr algn="r" indent="0" marL="0">
               <a:buNone/>
             </a:pPr>
             <a:r>
@@ -1635,8 +1635,8 @@
         </p:nvSpPr>
         <p:spPr>
           <a:xfrm>
-            <a:off x="1526408" y="4106149"/>
-            <a:ext cx="262770" cy="485560"/>
+            <a:off x="1409357" y="3725039"/>
+            <a:ext cx="223709" cy="415328"/>
           </a:xfrm>
           <a:custGeom>
             <a:avLst/>
@@ -1645,15 +1645,15 @@
             <a:cxnLst/>
             <a:rect l="l" t="t" r="r" b="b"/>
             <a:pathLst>
-              <a:path w="262770" h="485560">
+              <a:path w="223709" h="415328">
                 <a:moveTo>
-                  <a:pt x="0" y="388789"/>
+                  <a:pt x="2726" y="337020"/>
                 </a:moveTo>
                 <a:lnTo>
-                  <a:pt x="262770" y="485560"/>
+                  <a:pt x="223709" y="415328"/>
                 </a:lnTo>
                 <a:lnTo>
-                  <a:pt x="262770" y="96771"/>
+                  <a:pt x="222208" y="73598"/>
                 </a:lnTo>
                 <a:lnTo>
                   <a:pt x="0" y="0"/>
@@ -1663,7 +1663,7 @@
             </a:pathLst>
           </a:custGeom>
           <a:solidFill>
-            <a:srgbClr val="676767"/>
+            <a:srgbClr val="686868"/>
           </a:solidFill>
           <a:ln w="12700">
             <a:solidFill>
@@ -1681,8 +1681,8 @@
         </p:nvSpPr>
         <p:spPr>
           <a:xfrm>
-            <a:off x="1789178" y="3961840"/>
-            <a:ext cx="548821" cy="731839"/>
+            <a:off x="1631565" y="3595027"/>
+            <a:ext cx="477817" cy="636872"/>
           </a:xfrm>
           <a:custGeom>
             <a:avLst/>
@@ -1691,25 +1691,25 @@
             <a:cxnLst/>
             <a:rect l="l" t="t" r="r" b="b"/>
             <a:pathLst>
-              <a:path w="548821" h="731839">
+              <a:path w="477817" h="636872">
                 <a:moveTo>
-                  <a:pt x="0" y="629869"/>
+                  <a:pt x="1501" y="545340"/>
                 </a:moveTo>
                 <a:lnTo>
-                  <a:pt x="0" y="241079"/>
+                  <a:pt x="0" y="203610"/>
                 </a:lnTo>
                 <a:lnTo>
-                  <a:pt x="548821" y="0"/>
+                  <a:pt x="477817" y="0"/>
                 </a:lnTo>
                 <a:lnTo>
-                  <a:pt x="548821" y="731839"/>
+                  <a:pt x="475549" y="636872"/>
                 </a:lnTo>
                 <a:close/>
               </a:path>
             </a:pathLst>
           </a:custGeom>
           <a:solidFill>
-            <a:srgbClr val="606060"/>
+            <a:srgbClr val="616161"/>
           </a:solidFill>
           <a:ln w="12700">
             <a:solidFill>
@@ -1727,8 +1727,8 @@
         </p:nvSpPr>
         <p:spPr>
           <a:xfrm>
-            <a:off x="1526408" y="3779683"/>
-            <a:ext cx="811591" cy="423236"/>
+            <a:off x="1409357" y="3465082"/>
+            <a:ext cx="700025" cy="333555"/>
           </a:xfrm>
           <a:custGeom>
             <a:avLst/>
@@ -1737,18 +1737,18 @@
             <a:cxnLst/>
             <a:rect l="l" t="t" r="r" b="b"/>
             <a:pathLst>
-              <a:path w="811591" h="423236">
+              <a:path w="700025" h="333555">
                 <a:moveTo>
-                  <a:pt x="262770" y="423236"/>
+                  <a:pt x="222208" y="333555"/>
                 </a:moveTo>
                 <a:lnTo>
-                  <a:pt x="0" y="326465"/>
+                  <a:pt x="0" y="259957"/>
                 </a:lnTo>
                 <a:lnTo>
-                  <a:pt x="316965" y="0"/>
+                  <a:pt x="277341" y="0"/>
                 </a:lnTo>
                 <a:lnTo>
-                  <a:pt x="811591" y="182157"/>
+                  <a:pt x="700025" y="129945"/>
                 </a:lnTo>
                 <a:close/>
               </a:path>
@@ -1773,8 +1773,8 @@
         </p:nvSpPr>
         <p:spPr>
           <a:xfrm>
-            <a:off x="969236" y="4102550"/>
-            <a:ext cx="1013155" cy="994546"/>
+            <a:off x="857575" y="3700603"/>
+            <a:ext cx="942561" cy="886270"/>
           </a:xfrm>
           <a:custGeom>
             <a:avLst/>
@@ -1783,18 +1783,18 @@
             <a:cxnLst/>
             <a:rect l="l" t="t" r="r" b="b"/>
             <a:pathLst>
-              <a:path w="1013155" h="994546">
+              <a:path w="942561" h="886270">
                 <a:moveTo>
-                  <a:pt x="0" y="994546"/>
+                  <a:pt x="11712" y="886270"/>
                 </a:moveTo>
                 <a:lnTo>
-                  <a:pt x="0" y="262707"/>
+                  <a:pt x="0" y="210428"/>
                 </a:lnTo>
                 <a:lnTo>
-                  <a:pt x="1013155" y="0"/>
+                  <a:pt x="941523" y="0"/>
                 </a:lnTo>
                 <a:lnTo>
-                  <a:pt x="1013155" y="731839"/>
+                  <a:pt x="942561" y="649948"/>
                 </a:lnTo>
                 <a:close/>
               </a:path>
@@ -1819,8 +1819,8 @@
         </p:nvSpPr>
         <p:spPr>
           <a:xfrm>
-            <a:off x="320040" y="3863469"/>
-            <a:ext cx="1662351" cy="501788"/>
+            <a:off x="320040" y="3523944"/>
+            <a:ext cx="1479057" cy="387087"/>
           </a:xfrm>
           <a:custGeom>
             <a:avLst/>
@@ -1829,18 +1829,18 @@
             <a:cxnLst/>
             <a:rect l="l" t="t" r="r" b="b"/>
             <a:pathLst>
-              <a:path w="1662351" h="501788">
+              <a:path w="1479057" h="387087">
                 <a:moveTo>
-                  <a:pt x="0" y="262707"/>
+                  <a:pt x="0" y="194855"/>
                 </a:moveTo>
                 <a:lnTo>
-                  <a:pt x="1013155" y="0"/>
+                  <a:pt x="928564" y="0"/>
                 </a:lnTo>
                 <a:lnTo>
-                  <a:pt x="1662351" y="239081"/>
+                  <a:pt x="1479057" y="176659"/>
                 </a:lnTo>
                 <a:lnTo>
-                  <a:pt x="649196" y="501788"/>
+                  <a:pt x="537535" y="387087"/>
                 </a:lnTo>
                 <a:close/>
               </a:path>
@@ -1865,8 +1865,8 @@
         </p:nvSpPr>
         <p:spPr>
           <a:xfrm>
-            <a:off x="320040" y="4126176"/>
-            <a:ext cx="649196" cy="970919"/>
+            <a:off x="320040" y="3718799"/>
+            <a:ext cx="549247" cy="868074"/>
           </a:xfrm>
           <a:custGeom>
             <a:avLst/>
@@ -1875,25 +1875,25 @@
             <a:cxnLst/>
             <a:rect l="l" t="t" r="r" b="b"/>
             <a:pathLst>
-              <a:path w="649196" h="970919">
+              <a:path w="549247" h="868074">
                 <a:moveTo>
-                  <a:pt x="0" y="731839"/>
+                  <a:pt x="17104" y="652196"/>
                 </a:moveTo>
                 <a:lnTo>
                   <a:pt x="0" y="0"/>
                 </a:lnTo>
                 <a:lnTo>
-                  <a:pt x="649196" y="239081"/>
+                  <a:pt x="537535" y="192232"/>
                 </a:lnTo>
                 <a:lnTo>
-                  <a:pt x="649196" y="970919"/>
+                  <a:pt x="549247" y="868074"/>
                 </a:lnTo>
                 <a:close/>
               </a:path>
             </a:pathLst>
           </a:custGeom>
           <a:solidFill>
-            <a:srgbClr val="A1A1A1"/>
+            <a:srgbClr val="A3A3A3"/>
           </a:solidFill>
           <a:ln w="12700">
             <a:solidFill>
@@ -1911,8 +1911,8 @@
         </p:nvSpPr>
         <p:spPr>
           <a:xfrm>
-            <a:off x="2090686" y="4236681"/>
-            <a:ext cx="847645" cy="312164"/>
+            <a:off x="1895063" y="3845129"/>
+            <a:ext cx="930098" cy="305530"/>
           </a:xfrm>
           <a:prstGeom prst="line">
             <a:avLst/>
@@ -1935,7 +1935,7 @@
         </p:nvSpPr>
         <p:spPr>
           <a:xfrm>
-            <a:off x="2824031" y="4658573"/>
+            <a:off x="2729149" y="4260387"/>
             <a:ext cx="411480" cy="292608"/>
           </a:xfrm>
           <a:prstGeom prst="rect">
@@ -1988,8 +1988,8 @@
         </p:nvSpPr>
         <p:spPr>
           <a:xfrm flipV="1">
-            <a:off x="2090686" y="3166957"/>
-            <a:ext cx="0" cy="1069724"/>
+            <a:off x="1895063" y="2733452"/>
+            <a:ext cx="0" cy="1111677"/>
           </a:xfrm>
           <a:prstGeom prst="line">
             <a:avLst/>
@@ -2012,7 +2012,7 @@
         </p:nvSpPr>
         <p:spPr>
           <a:xfrm>
-            <a:off x="1610626" y="3020653"/>
+            <a:off x="1415003" y="2587148"/>
             <a:ext cx="411480" cy="292608"/>
           </a:xfrm>
           <a:prstGeom prst="rect">
@@ -2065,8 +2065,8 @@
         </p:nvSpPr>
         <p:spPr>
           <a:xfrm flipV="1">
-            <a:off x="2090686" y="3943929"/>
-            <a:ext cx="1129029" cy="292753"/>
+            <a:off x="1895063" y="3590750"/>
+            <a:ext cx="1099842" cy="254379"/>
           </a:xfrm>
           <a:prstGeom prst="line">
             <a:avLst/>
@@ -2089,7 +2089,7 @@
         </p:nvSpPr>
         <p:spPr>
           <a:xfrm>
-            <a:off x="2968255" y="4071945"/>
+            <a:off x="2743444" y="3737054"/>
             <a:ext cx="411480" cy="292608"/>
           </a:xfrm>
           <a:prstGeom prst="rect">
@@ -2142,7 +2142,7 @@
         </p:nvSpPr>
         <p:spPr>
           <a:xfrm>
-            <a:off x="2044966" y="4190961"/>
+            <a:off x="1849343" y="3799409"/>
             <a:ext cx="91440" cy="91440"/>
           </a:xfrm>
           <a:prstGeom prst="ellipse">
@@ -2167,7 +2167,7 @@
         </p:nvSpPr>
         <p:spPr>
           <a:xfrm>
-            <a:off x="353326" y="5288241"/>
+            <a:off x="340583" y="4805249"/>
             <a:ext cx="1645920" cy="292608"/>
           </a:xfrm>
           <a:prstGeom prst="rect">
@@ -2234,8 +2234,8 @@
         </p:nvSpPr>
         <p:spPr>
           <a:xfrm>
-            <a:off x="5710400" y="2939558"/>
-            <a:ext cx="997229" cy="367252"/>
+            <a:off x="6021084" y="3055108"/>
+            <a:ext cx="1087817" cy="235327"/>
           </a:xfrm>
           <a:prstGeom prst="line">
             <a:avLst/>
@@ -2258,7 +2258,7 @@
         </p:nvSpPr>
         <p:spPr>
           <a:xfrm>
-            <a:off x="6730489" y="3206225"/>
+            <a:off x="7159193" y="3217283"/>
             <a:ext cx="411480" cy="292608"/>
           </a:xfrm>
           <a:prstGeom prst="rect">
@@ -2311,8 +2311,8 @@
         </p:nvSpPr>
         <p:spPr>
           <a:xfrm flipV="1">
-            <a:off x="5710400" y="1464076"/>
-            <a:ext cx="0" cy="1475481"/>
+            <a:off x="6021084" y="1806839"/>
+            <a:ext cx="84818" cy="1248269"/>
           </a:xfrm>
           <a:prstGeom prst="line">
             <a:avLst/>
@@ -2335,7 +2335,7 @@
         </p:nvSpPr>
         <p:spPr>
           <a:xfrm>
-            <a:off x="5248628" y="1317772"/>
+            <a:off x="5625841" y="1660535"/>
             <a:ext cx="411480" cy="292608"/>
           </a:xfrm>
           <a:prstGeom prst="rect">
@@ -2388,8 +2388,8 @@
         </p:nvSpPr>
         <p:spPr>
           <a:xfrm flipV="1">
-            <a:off x="5710400" y="2631397"/>
-            <a:ext cx="1188451" cy="308161"/>
+            <a:off x="6021084" y="2876343"/>
+            <a:ext cx="742229" cy="178765"/>
           </a:xfrm>
           <a:prstGeom prst="line">
             <a:avLst/>
@@ -2412,7 +2412,7 @@
         </p:nvSpPr>
         <p:spPr>
           <a:xfrm>
-            <a:off x="6784552" y="2256493"/>
+            <a:off x="6740452" y="2528871"/>
             <a:ext cx="411480" cy="292608"/>
           </a:xfrm>
           <a:prstGeom prst="rect">
@@ -2465,8 +2465,8 @@
         </p:nvSpPr>
         <p:spPr>
           <a:xfrm flipV="1">
-            <a:off x="6707629" y="2915380"/>
-            <a:ext cx="248731" cy="391429"/>
+            <a:off x="7108901" y="3168321"/>
+            <a:ext cx="93467" cy="122113"/>
           </a:xfrm>
           <a:prstGeom prst="line">
             <a:avLst/>
@@ -2488,7 +2488,7 @@
         </p:nvSpPr>
         <p:spPr>
           <a:xfrm>
-            <a:off x="6919785" y="2878804"/>
+            <a:off x="7165792" y="3131745"/>
             <a:ext cx="73152" cy="73152"/>
           </a:xfrm>
           <a:prstGeom prst="ellipse">
@@ -2513,8 +2513,8 @@
         </p:nvSpPr>
         <p:spPr>
           <a:xfrm flipV="1">
-            <a:off x="5710400" y="2022415"/>
-            <a:ext cx="582792" cy="917142"/>
+            <a:off x="6021084" y="2358313"/>
+            <a:ext cx="591047" cy="696795"/>
           </a:xfrm>
           <a:prstGeom prst="line">
             <a:avLst/>
@@ -2537,7 +2537,7 @@
         </p:nvSpPr>
         <p:spPr>
           <a:xfrm>
-            <a:off x="6178893" y="1647511"/>
+            <a:off x="6653279" y="2120569"/>
             <a:ext cx="320040" cy="292608"/>
           </a:xfrm>
           <a:prstGeom prst="rect">
@@ -2576,8 +2576,8 @@
         </p:nvSpPr>
         <p:spPr>
           <a:xfrm>
-            <a:off x="6054778" y="2397610"/>
-            <a:ext cx="30292" cy="16394"/>
+            <a:off x="6365544" y="2649018"/>
+            <a:ext cx="8022" cy="13002"/>
           </a:xfrm>
           <a:prstGeom prst="line">
             <a:avLst/>
@@ -2599,8 +2599,8 @@
         </p:nvSpPr>
         <p:spPr>
           <a:xfrm>
-            <a:off x="6085070" y="2414004"/>
-            <a:ext cx="30386" cy="17323"/>
+            <a:off x="6373566" y="2662020"/>
+            <a:ext cx="7937" cy="13263"/>
           </a:xfrm>
           <a:prstGeom prst="line">
             <a:avLst/>
@@ -2622,8 +2622,8 @@
         </p:nvSpPr>
         <p:spPr>
           <a:xfrm>
-            <a:off x="6115456" y="2431327"/>
-            <a:ext cx="30358" cy="18228"/>
+            <a:off x="6381503" y="2675283"/>
+            <a:ext cx="7840" cy="13512"/>
           </a:xfrm>
           <a:prstGeom prst="line">
             <a:avLst/>
@@ -2645,8 +2645,8 @@
         </p:nvSpPr>
         <p:spPr>
           <a:xfrm>
-            <a:off x="6145813" y="2449555"/>
-            <a:ext cx="30202" cy="19096"/>
+            <a:off x="6389343" y="2688795"/>
+            <a:ext cx="7730" cy="13748"/>
           </a:xfrm>
           <a:prstGeom prst="line">
             <a:avLst/>
@@ -2668,8 +2668,8 @@
         </p:nvSpPr>
         <p:spPr>
           <a:xfrm>
-            <a:off x="6176015" y="2468651"/>
-            <a:ext cx="29915" cy="19917"/>
+            <a:off x="6397073" y="2702543"/>
+            <a:ext cx="7609" cy="13969"/>
           </a:xfrm>
           <a:prstGeom prst="line">
             <a:avLst/>
@@ -2691,8 +2691,8 @@
         </p:nvSpPr>
         <p:spPr>
           <a:xfrm>
-            <a:off x="6205930" y="2488568"/>
-            <a:ext cx="29497" cy="20679"/>
+            <a:off x="6404682" y="2716512"/>
+            <a:ext cx="7475" cy="14175"/>
           </a:xfrm>
           <a:prstGeom prst="line">
             <a:avLst/>
@@ -2714,8 +2714,8 @@
         </p:nvSpPr>
         <p:spPr>
           <a:xfrm>
-            <a:off x="6235428" y="2509247"/>
-            <a:ext cx="28949" cy="21372"/>
+            <a:off x="6412157" y="2730686"/>
+            <a:ext cx="7330" cy="14364"/>
           </a:xfrm>
           <a:prstGeom prst="line">
             <a:avLst/>
@@ -2737,8 +2737,8 @@
         </p:nvSpPr>
         <p:spPr>
           <a:xfrm>
-            <a:off x="6264376" y="2530619"/>
-            <a:ext cx="28275" cy="21985"/>
+            <a:off x="6419487" y="2745051"/>
+            <a:ext cx="7173" cy="14536"/>
           </a:xfrm>
           <a:prstGeom prst="line">
             <a:avLst/>
@@ -2760,8 +2760,8 @@
         </p:nvSpPr>
         <p:spPr>
           <a:xfrm>
-            <a:off x="6292652" y="2552604"/>
-            <a:ext cx="27484" cy="22511"/>
+            <a:off x="6426660" y="2759587"/>
+            <a:ext cx="7007" cy="14690"/>
           </a:xfrm>
           <a:prstGeom prst="line">
             <a:avLst/>
@@ -2783,8 +2783,8 @@
         </p:nvSpPr>
         <p:spPr>
           <a:xfrm>
-            <a:off x="6320135" y="2575115"/>
-            <a:ext cx="26583" cy="22944"/>
+            <a:off x="6433667" y="2774277"/>
+            <a:ext cx="6830" cy="14825"/>
           </a:xfrm>
           <a:prstGeom prst="line">
             <a:avLst/>
@@ -2806,8 +2806,8 @@
         </p:nvSpPr>
         <p:spPr>
           <a:xfrm>
-            <a:off x="6346718" y="2598059"/>
-            <a:ext cx="25586" cy="23278"/>
+            <a:off x="6440497" y="2789103"/>
+            <a:ext cx="6644" cy="14941"/>
           </a:xfrm>
           <a:prstGeom prst="line">
             <a:avLst/>
@@ -2829,8 +2829,8 @@
         </p:nvSpPr>
         <p:spPr>
           <a:xfrm>
-            <a:off x="6372305" y="2621337"/>
-            <a:ext cx="24506" cy="23512"/>
+            <a:off x="6447141" y="2804044"/>
+            <a:ext cx="6449" cy="15037"/>
           </a:xfrm>
           <a:prstGeom prst="line">
             <a:avLst/>
@@ -2852,8 +2852,8 @@
         </p:nvSpPr>
         <p:spPr>
           <a:xfrm>
-            <a:off x="6396811" y="2644849"/>
-            <a:ext cx="23357" cy="23645"/>
+            <a:off x="6453590" y="2819080"/>
+            <a:ext cx="6247" cy="15112"/>
           </a:xfrm>
           <a:prstGeom prst="line">
             <a:avLst/>
@@ -2875,8 +2875,8 @@
         </p:nvSpPr>
         <p:spPr>
           <a:xfrm>
-            <a:off x="6420168" y="2668494"/>
-            <a:ext cx="22155" cy="23679"/>
+            <a:off x="6459837" y="2834192"/>
+            <a:ext cx="6038" cy="15167"/>
           </a:xfrm>
           <a:prstGeom prst="line">
             <a:avLst/>
@@ -2898,8 +2898,8 @@
         </p:nvSpPr>
         <p:spPr>
           <a:xfrm>
-            <a:off x="6442324" y="2692173"/>
-            <a:ext cx="20916" cy="23617"/>
+            <a:off x="6465875" y="2849359"/>
+            <a:ext cx="5823" cy="15201"/>
           </a:xfrm>
           <a:prstGeom prst="line">
             <a:avLst/>
@@ -2921,8 +2921,8 @@
         </p:nvSpPr>
         <p:spPr>
           <a:xfrm>
-            <a:off x="6463240" y="2715789"/>
-            <a:ext cx="19654" cy="23464"/>
+            <a:off x="6471698" y="2864560"/>
+            <a:ext cx="5603" cy="15215"/>
           </a:xfrm>
           <a:prstGeom prst="line">
             <a:avLst/>
@@ -2938,13 +2938,105 @@
       </p:sp>
       <p:sp>
         <p:nvSpPr>
-          <p:cNvPr id="59" name="Text 57"/>
+          <p:cNvPr id="59" name="Shape 57"/>
+          <p:cNvSpPr/>
+          <p:nvPr/>
+        </p:nvSpPr>
+        <p:spPr>
+          <a:xfrm>
+            <a:off x="6477301" y="2879775"/>
+            <a:ext cx="5379" cy="15209"/>
+          </a:xfrm>
+          <a:prstGeom prst="line">
+            <a:avLst/>
+          </a:prstGeom>
+          <a:noFill/>
+          <a:ln w="12700">
+            <a:solidFill>
+              <a:srgbClr val="000000"/>
+            </a:solidFill>
+            <a:prstDash val="solid"/>
+          </a:ln>
+        </p:spPr>
+      </p:sp>
+      <p:sp>
+        <p:nvSpPr>
+          <p:cNvPr id="60" name="Shape 58"/>
+          <p:cNvSpPr/>
+          <p:nvPr/>
+        </p:nvSpPr>
+        <p:spPr>
+          <a:xfrm>
+            <a:off x="6482679" y="2894984"/>
+            <a:ext cx="5151" cy="15183"/>
+          </a:xfrm>
+          <a:prstGeom prst="line">
+            <a:avLst/>
+          </a:prstGeom>
+          <a:noFill/>
+          <a:ln w="12700">
+            <a:solidFill>
+              <a:srgbClr val="000000"/>
+            </a:solidFill>
+            <a:prstDash val="solid"/>
+          </a:ln>
+        </p:spPr>
+      </p:sp>
+      <p:sp>
+        <p:nvSpPr>
+          <p:cNvPr id="61" name="Shape 59"/>
+          <p:cNvSpPr/>
+          <p:nvPr/>
+        </p:nvSpPr>
+        <p:spPr>
+          <a:xfrm>
+            <a:off x="6487830" y="2910167"/>
+            <a:ext cx="4921" cy="15137"/>
+          </a:xfrm>
+          <a:prstGeom prst="line">
+            <a:avLst/>
+          </a:prstGeom>
+          <a:noFill/>
+          <a:ln w="12700">
+            <a:solidFill>
+              <a:srgbClr val="000000"/>
+            </a:solidFill>
+            <a:prstDash val="solid"/>
+          </a:ln>
+        </p:spPr>
+      </p:sp>
+      <p:sp>
+        <p:nvSpPr>
+          <p:cNvPr id="62" name="Shape 60"/>
+          <p:cNvSpPr/>
+          <p:nvPr/>
+        </p:nvSpPr>
+        <p:spPr>
+          <a:xfrm>
+            <a:off x="6492751" y="2925304"/>
+            <a:ext cx="4690" cy="15073"/>
+          </a:xfrm>
+          <a:prstGeom prst="line">
+            <a:avLst/>
+          </a:prstGeom>
+          <a:noFill/>
+          <a:ln w="12700">
+            <a:solidFill>
+              <a:srgbClr val="000000"/>
+            </a:solidFill>
+            <a:prstDash val="solid"/>
+          </a:ln>
+        </p:spPr>
+      </p:sp>
+      <p:sp>
+        <p:nvSpPr>
+          <p:cNvPr id="63" name="Text 61"/>
           <p:cNvSpPr txBox="1"/>
           <p:nvPr/>
         </p:nvSpPr>
         <p:spPr>
           <a:xfrm>
-            <a:off x="6320084" y="2342292"/>
+            <a:off x="6486217" y="2560503"/>
             <a:ext cx="274320" cy="274320"/>
           </a:xfrm>
           <a:prstGeom prst="rect">
@@ -2977,13 +3069,13 @@
       </p:sp>
       <p:sp>
         <p:nvSpPr>
-          <p:cNvPr id="60" name="Shape 58"/>
-          <p:cNvSpPr/>
-          <p:nvPr/>
-        </p:nvSpPr>
-        <p:spPr>
-          <a:xfrm>
-            <a:off x="5646392" y="2875550"/>
+          <p:cNvPr id="64" name="Shape 62"/>
+          <p:cNvSpPr/>
+          <p:nvPr/>
+        </p:nvSpPr>
+        <p:spPr>
+          <a:xfrm>
+            <a:off x="5957076" y="2991100"/>
             <a:ext cx="128016" cy="128016"/>
           </a:xfrm>
           <a:prstGeom prst="ellipse">
@@ -3002,13 +3094,13 @@
       </p:sp>
       <p:sp>
         <p:nvSpPr>
-          <p:cNvPr id="61" name="Text 59"/>
+          <p:cNvPr id="65" name="Text 63"/>
           <p:cNvSpPr txBox="1"/>
           <p:nvPr/>
         </p:nvSpPr>
         <p:spPr>
           <a:xfrm>
-            <a:off x="5390360" y="3030998"/>
+            <a:off x="5701044" y="3155692"/>
             <a:ext cx="274320" cy="274320"/>
           </a:xfrm>
           <a:prstGeom prst="rect">
@@ -3041,14 +3133,14 @@
       </p:sp>
       <p:sp>
         <p:nvSpPr>
-          <p:cNvPr id="62" name="Shape 60"/>
-          <p:cNvSpPr/>
-          <p:nvPr/>
-        </p:nvSpPr>
-        <p:spPr>
-          <a:xfrm>
-            <a:off x="8503920" y="1828800"/>
-            <a:ext cx="3429000" cy="2514600"/>
+          <p:cNvPr id="66" name="Shape 64"/>
+          <p:cNvSpPr/>
+          <p:nvPr/>
+        </p:nvSpPr>
+        <p:spPr>
+          <a:xfrm>
+            <a:off x="8503920" y="1737360"/>
+            <a:ext cx="3429000" cy="2651760"/>
           </a:xfrm>
           <a:prstGeom prst="rect">
             <a:avLst/>
@@ -3066,13 +3158,13 @@
       </p:sp>
       <p:sp>
         <p:nvSpPr>
-          <p:cNvPr id="63" name="Text 61"/>
+          <p:cNvPr id="67" name="Text 65"/>
           <p:cNvSpPr txBox="1"/>
           <p:nvPr/>
         </p:nvSpPr>
         <p:spPr>
           <a:xfrm>
-            <a:off x="8686800" y="1938528"/>
+            <a:off x="8686800" y="1847088"/>
             <a:ext cx="3063240" cy="329184"/>
           </a:xfrm>
           <a:prstGeom prst="rect">
@@ -3217,14 +3309,14 @@
       </p:sp>
       <p:sp>
         <p:nvSpPr>
-          <p:cNvPr id="64" name="Text 62"/>
+          <p:cNvPr id="68" name="Text 66"/>
           <p:cNvSpPr txBox="1"/>
           <p:nvPr/>
         </p:nvSpPr>
         <p:spPr>
           <a:xfrm>
-            <a:off x="8686800" y="2331720"/>
-            <a:ext cx="3063240" cy="1920240"/>
+            <a:off x="8686800" y="2240280"/>
+            <a:ext cx="3063240" cy="2057400"/>
           </a:xfrm>
           <a:prstGeom prst="rect">
             <a:avLst/>
@@ -4232,7 +4324,7 @@
                 <a:ea typeface="Malgun Gothic" pitchFamily="34" charset="-122"/>
                 <a:cs typeface="Malgun Gothic" pitchFamily="34" charset="-120"/>
               </a:rPr>
-              <a:t>카메라</a:t>
+              <a:t>평면이</a:t>
             </a:r>
             <a:pPr algn="l" indent="0" marL="0">
               <a:spcAft>
@@ -4250,57 +4342,6 @@
                 <a:cs typeface="Times New Roman" pitchFamily="34" charset="-120"/>
               </a:rPr>
               <a:t> </a:t>
-            </a:r>
-            <a:pPr algn="l" indent="0" marL="0">
-              <a:spcAft>
-                <a:spcPts val="500"/>
-              </a:spcAft>
-              <a:buNone/>
-            </a:pPr>
-            <a:r>
-              <a:rPr lang="en-US" sz="1300" i="1" dirty="0">
-                <a:solidFill>
-                  <a:srgbClr val="000000"/>
-                </a:solidFill>
-                <a:latin typeface="Times New Roman" pitchFamily="34" charset="0"/>
-                <a:ea typeface="Times New Roman" pitchFamily="34" charset="-122"/>
-                <a:cs typeface="Times New Roman" pitchFamily="34" charset="-120"/>
-              </a:rPr>
-              <a:t>x</a:t>
-            </a:r>
-            <a:pPr algn="l" indent="0" marL="0">
-              <a:spcAft>
-                <a:spcPts val="500"/>
-              </a:spcAft>
-              <a:buNone/>
-            </a:pPr>
-            <a:r>
-              <a:rPr lang="en-US" sz="1300" dirty="0">
-                <a:solidFill>
-                  <a:srgbClr val="000000"/>
-                </a:solidFill>
-                <a:latin typeface="Times New Roman" pitchFamily="34" charset="0"/>
-                <a:ea typeface="Times New Roman" pitchFamily="34" charset="-122"/>
-                <a:cs typeface="Times New Roman" pitchFamily="34" charset="-120"/>
-              </a:rPr>
-              <a:t>, </a:t>
-            </a:r>
-            <a:pPr algn="l" indent="0" marL="0">
-              <a:spcAft>
-                <a:spcPts val="500"/>
-              </a:spcAft>
-              <a:buNone/>
-            </a:pPr>
-            <a:r>
-              <a:rPr lang="en-US" sz="1300" i="1" dirty="0">
-                <a:solidFill>
-                  <a:srgbClr val="000000"/>
-                </a:solidFill>
-                <a:latin typeface="Times New Roman" pitchFamily="34" charset="0"/>
-                <a:ea typeface="Times New Roman" pitchFamily="34" charset="-122"/>
-                <a:cs typeface="Times New Roman" pitchFamily="34" charset="-120"/>
-              </a:rPr>
-              <a:t>y</a:t>
             </a:r>
             <a:pPr algn="l" indent="0" marL="0">
               <a:spcAft>
@@ -4317,7 +4358,7 @@
                 <a:ea typeface="Malgun Gothic" pitchFamily="34" charset="-122"/>
                 <a:cs typeface="Malgun Gothic" pitchFamily="34" charset="-120"/>
               </a:rPr>
-              <a:t>축은</a:t>
+              <a:t>광축에</a:t>
             </a:r>
             <a:pPr algn="l" indent="0" marL="0">
               <a:spcAft>
@@ -4351,7 +4392,7 @@
                 <a:ea typeface="Malgun Gothic" pitchFamily="34" charset="-122"/>
                 <a:cs typeface="Malgun Gothic" pitchFamily="34" charset="-120"/>
               </a:rPr>
-              <a:t>평면</a:t>
+              <a:t>대해</a:t>
             </a:r>
             <a:pPr algn="l" indent="0" marL="0">
               <a:spcAft>
@@ -4368,7 +4409,7 @@
                 <a:ea typeface="Times New Roman" pitchFamily="34" charset="-122"/>
                 <a:cs typeface="Times New Roman" pitchFamily="34" charset="-120"/>
               </a:rPr>
-              <a:t> </a:t>
+              <a:t> θ</a:t>
             </a:r>
             <a:pPr algn="l" indent="0" marL="0">
               <a:spcAft>
@@ -4385,7 +4426,41 @@
                 <a:ea typeface="Malgun Gothic" pitchFamily="34" charset="-122"/>
                 <a:cs typeface="Malgun Gothic" pitchFamily="34" charset="-120"/>
               </a:rPr>
-              <a:t>위의</a:t>
+              <a:t>만큼</a:t>
+            </a:r>
+            <a:pPr algn="l" indent="0" marL="0">
+              <a:spcAft>
+                <a:spcPts val="500"/>
+              </a:spcAft>
+              <a:buNone/>
+            </a:pPr>
+            <a:r>
+              <a:rPr lang="en-US" sz="1300" dirty="0">
+                <a:solidFill>
+                  <a:srgbClr val="000000"/>
+                </a:solidFill>
+                <a:latin typeface="Times New Roman" pitchFamily="34" charset="0"/>
+                <a:ea typeface="Times New Roman" pitchFamily="34" charset="-122"/>
+                <a:cs typeface="Times New Roman" pitchFamily="34" charset="-120"/>
+              </a:rPr>
+              <a:t> </a:t>
+            </a:r>
+            <a:pPr algn="l" indent="0" marL="0">
+              <a:spcAft>
+                <a:spcPts val="500"/>
+              </a:spcAft>
+              <a:buNone/>
+            </a:pPr>
+            <a:r>
+              <a:rPr lang="en-US" sz="1300" dirty="0">
+                <a:solidFill>
+                  <a:srgbClr val="000000"/>
+                </a:solidFill>
+                <a:latin typeface="Malgun Gothic" pitchFamily="34" charset="0"/>
+                <a:ea typeface="Malgun Gothic" pitchFamily="34" charset="-122"/>
+                <a:cs typeface="Malgun Gothic" pitchFamily="34" charset="-120"/>
+              </a:rPr>
+              <a:t>기울어</a:t>
             </a:r>
             <a:endParaRPr lang="en-US" sz="1400" dirty="0"/>
           </a:p>
@@ -4422,7 +4497,7 @@
                 <a:ea typeface="Malgun Gothic" pitchFamily="34" charset="-122"/>
                 <a:cs typeface="Malgun Gothic" pitchFamily="34" charset="-120"/>
               </a:rPr>
-              <a:t>수평</a:t>
+              <a:t>카메라</a:t>
             </a:r>
             <a:pPr algn="l" indent="0" marL="0">
               <a:spcAft>
@@ -4439,7 +4514,58 @@
                 <a:ea typeface="Times New Roman" pitchFamily="34" charset="-122"/>
                 <a:cs typeface="Times New Roman" pitchFamily="34" charset="-120"/>
               </a:rPr>
-              <a:t>·</a:t>
+              <a:t> </a:t>
+            </a:r>
+            <a:pPr algn="l" indent="0" marL="0">
+              <a:spcAft>
+                <a:spcPts val="500"/>
+              </a:spcAft>
+              <a:buNone/>
+            </a:pPr>
+            <a:r>
+              <a:rPr lang="en-US" sz="1300" i="1" dirty="0">
+                <a:solidFill>
+                  <a:srgbClr val="000000"/>
+                </a:solidFill>
+                <a:latin typeface="Times New Roman" pitchFamily="34" charset="0"/>
+                <a:ea typeface="Times New Roman" pitchFamily="34" charset="-122"/>
+                <a:cs typeface="Times New Roman" pitchFamily="34" charset="-120"/>
+              </a:rPr>
+              <a:t>x</a:t>
+            </a:r>
+            <a:pPr algn="l" indent="0" marL="0">
+              <a:spcAft>
+                <a:spcPts val="500"/>
+              </a:spcAft>
+              <a:buNone/>
+            </a:pPr>
+            <a:r>
+              <a:rPr lang="en-US" sz="1300" dirty="0">
+                <a:solidFill>
+                  <a:srgbClr val="000000"/>
+                </a:solidFill>
+                <a:latin typeface="Times New Roman" pitchFamily="34" charset="0"/>
+                <a:ea typeface="Times New Roman" pitchFamily="34" charset="-122"/>
+                <a:cs typeface="Times New Roman" pitchFamily="34" charset="-120"/>
+              </a:rPr>
+              <a:t>, </a:t>
+            </a:r>
+            <a:pPr algn="l" indent="0" marL="0">
+              <a:spcAft>
+                <a:spcPts val="500"/>
+              </a:spcAft>
+              <a:buNone/>
+            </a:pPr>
+            <a:r>
+              <a:rPr lang="en-US" sz="1300" i="1" dirty="0">
+                <a:solidFill>
+                  <a:srgbClr val="000000"/>
+                </a:solidFill>
+                <a:latin typeface="Times New Roman" pitchFamily="34" charset="0"/>
+                <a:ea typeface="Times New Roman" pitchFamily="34" charset="-122"/>
+                <a:cs typeface="Times New Roman" pitchFamily="34" charset="-120"/>
+              </a:rPr>
+              <a:t>y</a:t>
             </a:r>
             <a:pPr algn="l" indent="0" marL="0">
               <a:spcAft>
@@ -4456,7 +4582,7 @@
                 <a:ea typeface="Malgun Gothic" pitchFamily="34" charset="-122"/>
                 <a:cs typeface="Malgun Gothic" pitchFamily="34" charset="-120"/>
               </a:rPr>
-              <a:t>수직</a:t>
+              <a:t>축이</a:t>
             </a:r>
             <a:pPr algn="l" indent="0" marL="0">
               <a:spcAft>
@@ -4490,7 +4616,7 @@
                 <a:ea typeface="Malgun Gothic" pitchFamily="34" charset="-122"/>
                 <a:cs typeface="Malgun Gothic" pitchFamily="34" charset="-120"/>
               </a:rPr>
-              <a:t>방향이</a:t>
+              <a:t>평면</a:t>
             </a:r>
             <a:pPr algn="l" indent="0" marL="0">
               <a:spcAft>
@@ -4524,7 +4650,75 @@
                 <a:ea typeface="Malgun Gothic" pitchFamily="34" charset="-122"/>
                 <a:cs typeface="Malgun Gothic" pitchFamily="34" charset="-120"/>
               </a:rPr>
-              <a:t>아님</a:t>
+              <a:t>위에</a:t>
+            </a:r>
+            <a:pPr algn="l" indent="0" marL="0">
+              <a:spcAft>
+                <a:spcPts val="500"/>
+              </a:spcAft>
+              <a:buNone/>
+            </a:pPr>
+            <a:r>
+              <a:rPr lang="en-US" sz="1300" dirty="0">
+                <a:solidFill>
+                  <a:srgbClr val="000000"/>
+                </a:solidFill>
+                <a:latin typeface="Times New Roman" pitchFamily="34" charset="0"/>
+                <a:ea typeface="Times New Roman" pitchFamily="34" charset="-122"/>
+                <a:cs typeface="Times New Roman" pitchFamily="34" charset="-120"/>
+              </a:rPr>
+              <a:t> </a:t>
+            </a:r>
+            <a:pPr algn="l" indent="0" marL="0">
+              <a:spcAft>
+                <a:spcPts val="500"/>
+              </a:spcAft>
+              <a:buNone/>
+            </a:pPr>
+            <a:r>
+              <a:rPr lang="en-US" sz="1300" dirty="0">
+                <a:solidFill>
+                  <a:srgbClr val="000000"/>
+                </a:solidFill>
+                <a:latin typeface="Malgun Gothic" pitchFamily="34" charset="0"/>
+                <a:ea typeface="Malgun Gothic" pitchFamily="34" charset="-122"/>
+                <a:cs typeface="Malgun Gothic" pitchFamily="34" charset="-120"/>
+              </a:rPr>
+              <a:t>있지</a:t>
+            </a:r>
+            <a:pPr algn="l" indent="0" marL="0">
+              <a:spcAft>
+                <a:spcPts val="500"/>
+              </a:spcAft>
+              <a:buNone/>
+            </a:pPr>
+            <a:r>
+              <a:rPr lang="en-US" sz="1300" dirty="0">
+                <a:solidFill>
+                  <a:srgbClr val="000000"/>
+                </a:solidFill>
+                <a:latin typeface="Times New Roman" pitchFamily="34" charset="0"/>
+                <a:ea typeface="Times New Roman" pitchFamily="34" charset="-122"/>
+                <a:cs typeface="Times New Roman" pitchFamily="34" charset="-120"/>
+              </a:rPr>
+              <a:t> </a:t>
+            </a:r>
+            <a:pPr algn="l" indent="0" marL="0">
+              <a:spcAft>
+                <a:spcPts val="500"/>
+              </a:spcAft>
+              <a:buNone/>
+            </a:pPr>
+            <a:r>
+              <a:rPr lang="en-US" sz="1300" dirty="0">
+                <a:solidFill>
+                  <a:srgbClr val="000000"/>
+                </a:solidFill>
+                <a:latin typeface="Malgun Gothic" pitchFamily="34" charset="0"/>
+                <a:ea typeface="Malgun Gothic" pitchFamily="34" charset="-122"/>
+                <a:cs typeface="Malgun Gothic" pitchFamily="34" charset="-120"/>
+              </a:rPr>
+              <a:t>않음</a:t>
             </a:r>
             <a:endParaRPr lang="en-US" sz="1400" dirty="0"/>
           </a:p>
@@ -4532,7 +4726,7 @@
       </p:sp>
       <p:sp>
         <p:nvSpPr>
-          <p:cNvPr id="65" name="Text 63"/>
+          <p:cNvPr id="69" name="Text 67"/>
           <p:cNvSpPr txBox="1"/>
           <p:nvPr/>
         </p:nvSpPr>
@@ -4791,8 +4985,8 @@
         </p:nvSpPr>
         <p:spPr>
           <a:xfrm>
-            <a:off x="2560819" y="1303705"/>
-            <a:ext cx="5760221" cy="3559316"/>
+            <a:off x="4315371" y="1368326"/>
+            <a:ext cx="3374034" cy="3755587"/>
           </a:xfrm>
           <a:custGeom>
             <a:avLst/>
@@ -4801,18 +4995,18 @@
             <a:cxnLst/>
             <a:rect l="l" t="t" r="r" b="b"/>
             <a:pathLst>
-              <a:path w="5760221" h="3559316">
+              <a:path w="3374034" h="3755587">
                 <a:moveTo>
-                  <a:pt x="0" y="92891"/>
+                  <a:pt x="114832" y="0"/>
                 </a:moveTo>
                 <a:lnTo>
-                  <a:pt x="4786971" y="0"/>
+                  <a:pt x="3374034" y="455532"/>
                 </a:lnTo>
                 <a:lnTo>
-                  <a:pt x="5760221" y="3466425"/>
+                  <a:pt x="3065392" y="3755587"/>
                 </a:lnTo>
                 <a:lnTo>
-                  <a:pt x="973251" y="3559316"/>
+                  <a:pt x="0" y="2826918"/>
                 </a:lnTo>
                 <a:close/>
               </a:path>
@@ -4837,8 +5031,8 @@
         </p:nvSpPr>
         <p:spPr>
           <a:xfrm>
-            <a:off x="3201355" y="1814445"/>
-            <a:ext cx="1756375" cy="1918968"/>
+            <a:off x="4669859" y="1833734"/>
+            <a:ext cx="742317" cy="1702691"/>
           </a:xfrm>
           <a:custGeom>
             <a:avLst/>
@@ -4847,18 +5041,18 @@
             <a:cxnLst/>
             <a:rect l="l" t="t" r="r" b="b"/>
             <a:pathLst>
-              <a:path w="1756375" h="1918968">
+              <a:path w="742317" h="1702691">
                 <a:moveTo>
-                  <a:pt x="0" y="94848"/>
+                  <a:pt x="0" y="0"/>
                 </a:moveTo>
                 <a:lnTo>
-                  <a:pt x="1105665" y="0"/>
+                  <a:pt x="742317" y="53861"/>
                 </a:lnTo>
                 <a:lnTo>
-                  <a:pt x="1756375" y="1824120"/>
+                  <a:pt x="740795" y="1702691"/>
                 </a:lnTo>
                 <a:lnTo>
-                  <a:pt x="650710" y="1918968"/>
+                  <a:pt x="13839" y="1583844"/>
                 </a:lnTo>
                 <a:close/>
               </a:path>
@@ -4883,7 +5077,7 @@
         </p:nvSpPr>
         <p:spPr>
           <a:xfrm>
-            <a:off x="3169351" y="1877290"/>
+            <a:off x="4637855" y="1801730"/>
             <a:ext cx="64008" cy="64008"/>
           </a:xfrm>
           <a:prstGeom prst="ellipse">
@@ -4908,7 +5102,7 @@
         </p:nvSpPr>
         <p:spPr>
           <a:xfrm>
-            <a:off x="4275016" y="1782441"/>
+            <a:off x="5380172" y="1855591"/>
             <a:ext cx="64008" cy="64008"/>
           </a:xfrm>
           <a:prstGeom prst="ellipse">
@@ -4933,7 +5127,7 @@
         </p:nvSpPr>
         <p:spPr>
           <a:xfrm>
-            <a:off x="4925727" y="3606561"/>
+            <a:off x="5378650" y="3504422"/>
             <a:ext cx="64008" cy="64008"/>
           </a:xfrm>
           <a:prstGeom prst="ellipse">
@@ -4958,7 +5152,7 @@
         </p:nvSpPr>
         <p:spPr>
           <a:xfrm>
-            <a:off x="3820061" y="3701410"/>
+            <a:off x="4651694" y="3385574"/>
             <a:ext cx="64008" cy="64008"/>
           </a:xfrm>
           <a:prstGeom prst="ellipse">
@@ -4983,8 +5177,8 @@
         </p:nvSpPr>
         <p:spPr>
           <a:xfrm>
-            <a:off x="5202563" y="1739882"/>
-            <a:ext cx="2012523" cy="1064842"/>
+            <a:off x="5859980" y="1918965"/>
+            <a:ext cx="1438066" cy="1291483"/>
           </a:xfrm>
           <a:custGeom>
             <a:avLst/>
@@ -4993,18 +5187,18 @@
             <a:cxnLst/>
             <a:rect l="l" t="t" r="r" b="b"/>
             <a:pathLst>
-              <a:path w="2012523" h="1064842">
+              <a:path w="1438066" h="1291483">
                 <a:moveTo>
-                  <a:pt x="0" y="0"/>
+                  <a:pt x="102773" y="0"/>
                 </a:moveTo>
                 <a:lnTo>
-                  <a:pt x="1785530" y="51390"/>
+                  <a:pt x="1438066" y="296404"/>
                 </a:lnTo>
                 <a:lnTo>
-                  <a:pt x="2012523" y="1064842"/>
+                  <a:pt x="1303549" y="1291483"/>
                 </a:lnTo>
                 <a:lnTo>
-                  <a:pt x="226994" y="1013452"/>
+                  <a:pt x="0" y="937174"/>
                 </a:lnTo>
                 <a:close/>
               </a:path>
@@ -5029,7 +5223,7 @@
         </p:nvSpPr>
         <p:spPr>
           <a:xfrm>
-            <a:off x="5170559" y="1707878"/>
+            <a:off x="5930749" y="1886961"/>
             <a:ext cx="64008" cy="64008"/>
           </a:xfrm>
           <a:prstGeom prst="ellipse">
@@ -5054,7 +5248,7 @@
         </p:nvSpPr>
         <p:spPr>
           <a:xfrm>
-            <a:off x="6956088" y="1759268"/>
+            <a:off x="7266042" y="2183366"/>
             <a:ext cx="64008" cy="64008"/>
           </a:xfrm>
           <a:prstGeom prst="ellipse">
@@ -5079,7 +5273,7 @@
         </p:nvSpPr>
         <p:spPr>
           <a:xfrm>
-            <a:off x="7183082" y="2772720"/>
+            <a:off x="7131524" y="3178445"/>
             <a:ext cx="64008" cy="64008"/>
           </a:xfrm>
           <a:prstGeom prst="ellipse">
@@ -5104,7 +5298,7 @@
         </p:nvSpPr>
         <p:spPr>
           <a:xfrm>
-            <a:off x="5397552" y="2721330"/>
+            <a:off x="5827976" y="2824136"/>
             <a:ext cx="64008" cy="64008"/>
           </a:xfrm>
           <a:prstGeom prst="ellipse">
@@ -5129,8 +5323,8 @@
         </p:nvSpPr>
         <p:spPr>
           <a:xfrm>
-            <a:off x="6254230" y="3138976"/>
-            <a:ext cx="1177209" cy="1266929"/>
+            <a:off x="6264433" y="3376552"/>
+            <a:ext cx="589453" cy="1172642"/>
           </a:xfrm>
           <a:custGeom>
             <a:avLst/>
@@ -5139,18 +5333,18 @@
             <a:cxnLst/>
             <a:rect l="l" t="t" r="r" b="b"/>
             <a:pathLst>
-              <a:path w="1177209" h="1266929">
+              <a:path w="589453" h="1172642">
                 <a:moveTo>
-                  <a:pt x="0" y="104580"/>
+                  <a:pt x="0" y="0"/>
                 </a:moveTo>
                 <a:lnTo>
-                  <a:pt x="673146" y="0"/>
+                  <a:pt x="542452" y="35472"/>
                 </a:lnTo>
                 <a:lnTo>
-                  <a:pt x="1177209" y="1162349"/>
+                  <a:pt x="589453" y="1172642"/>
                 </a:lnTo>
                 <a:lnTo>
-                  <a:pt x="504063" y="1266929"/>
+                  <a:pt x="51720" y="1105734"/>
                 </a:lnTo>
                 <a:close/>
               </a:path>
@@ -5175,7 +5369,7 @@
         </p:nvSpPr>
         <p:spPr>
           <a:xfrm>
-            <a:off x="6222226" y="3211552"/>
+            <a:off x="6232429" y="3344548"/>
             <a:ext cx="64008" cy="64008"/>
           </a:xfrm>
           <a:prstGeom prst="ellipse">
@@ -5200,7 +5394,7 @@
         </p:nvSpPr>
         <p:spPr>
           <a:xfrm>
-            <a:off x="6895372" y="3106972"/>
+            <a:off x="6774881" y="3380020"/>
             <a:ext cx="64008" cy="64008"/>
           </a:xfrm>
           <a:prstGeom prst="ellipse">
@@ -5225,7 +5419,7 @@
         </p:nvSpPr>
         <p:spPr>
           <a:xfrm>
-            <a:off x="7399435" y="4269321"/>
+            <a:off x="6821882" y="4517190"/>
             <a:ext cx="64008" cy="64008"/>
           </a:xfrm>
           <a:prstGeom prst="ellipse">
@@ -5250,7 +5444,7 @@
         </p:nvSpPr>
         <p:spPr>
           <a:xfrm>
-            <a:off x="6726288" y="4373901"/>
+            <a:off x="6284149" y="4450281"/>
             <a:ext cx="64008" cy="64008"/>
           </a:xfrm>
           <a:prstGeom prst="ellipse">
@@ -5275,8 +5469,8 @@
         </p:nvSpPr>
         <p:spPr>
           <a:xfrm>
-            <a:off x="3671229" y="4954460"/>
-            <a:ext cx="2926080" cy="292608"/>
+            <a:off x="4271803" y="5215354"/>
+            <a:ext cx="3108960" cy="292608"/>
           </a:xfrm>
           <a:prstGeom prst="rect">
             <a:avLst/>
@@ -5288,7 +5482,7 @@
           <a:bodyPr wrap="square" lIns="0" tIns="0" rIns="0" bIns="0" rtlCol="0" anchor="ctr"/>
           <a:lstStyle/>
           <a:p>
-            <a:pPr algn="l" indent="0" marL="0">
+            <a:pPr algn="r" indent="0" marL="0">
               <a:buNone/>
             </a:pPr>
             <a:r>
@@ -5300,9 +5494,9 @@
                 <a:ea typeface="Malgun Gothic" pitchFamily="34" charset="-122"/>
                 <a:cs typeface="Malgun Gothic" pitchFamily="34" charset="-120"/>
               </a:rPr>
-              <a:t>공통</a:t>
-            </a:r>
-            <a:pPr algn="l" indent="0" marL="0">
+              <a:t>정렬된</a:t>
+            </a:r>
+            <a:pPr algn="r" indent="0" marL="0">
               <a:buNone/>
             </a:pPr>
             <a:r>
@@ -5316,7 +5510,7 @@
               </a:rPr>
               <a:t> </a:t>
             </a:r>
-            <a:pPr algn="l" indent="0" marL="0">
+            <a:pPr algn="r" indent="0" marL="0">
               <a:buNone/>
             </a:pPr>
             <a:r>
@@ -5328,9 +5522,37 @@
                 <a:ea typeface="Malgun Gothic" pitchFamily="34" charset="-122"/>
                 <a:cs typeface="Malgun Gothic" pitchFamily="34" charset="-120"/>
               </a:rPr>
+              <a:t>공통</a:t>
+            </a:r>
+            <a:pPr algn="r" indent="0" marL="0">
+              <a:buNone/>
+            </a:pPr>
+            <a:r>
+              <a:rPr lang="en-US" sz="1300" dirty="0">
+                <a:solidFill>
+                  <a:srgbClr val="404040"/>
+                </a:solidFill>
+                <a:latin typeface="Times New Roman" pitchFamily="34" charset="0"/>
+                <a:ea typeface="Times New Roman" pitchFamily="34" charset="-122"/>
+                <a:cs typeface="Times New Roman" pitchFamily="34" charset="-120"/>
+              </a:rPr>
+              <a:t> </a:t>
+            </a:r>
+            <a:pPr algn="r" indent="0" marL="0">
+              <a:buNone/>
+            </a:pPr>
+            <a:r>
+              <a:rPr lang="en-US" sz="1300" dirty="0">
+                <a:solidFill>
+                  <a:srgbClr val="404040"/>
+                </a:solidFill>
+                <a:latin typeface="Malgun Gothic" pitchFamily="34" charset="0"/>
+                <a:ea typeface="Malgun Gothic" pitchFamily="34" charset="-122"/>
+                <a:cs typeface="Malgun Gothic" pitchFamily="34" charset="-120"/>
+              </a:rPr>
               <a:t>평면</a:t>
             </a:r>
-            <a:pPr algn="l" indent="0" marL="0">
+            <a:pPr algn="r" indent="0" marL="0">
               <a:buNone/>
             </a:pPr>
             <a:r>
@@ -5342,9 +5564,37 @@
                 <a:ea typeface="Times New Roman" pitchFamily="34" charset="-122"/>
                 <a:cs typeface="Times New Roman" pitchFamily="34" charset="-120"/>
               </a:rPr>
-              <a:t>   </a:t>
-            </a:r>
-            <a:pPr algn="l" indent="0" marL="0">
+              <a:t>  (</a:t>
+            </a:r>
+            <a:pPr algn="r" indent="0" marL="0">
+              <a:buNone/>
+            </a:pPr>
+            <a:r>
+              <a:rPr lang="en-US" sz="1300" b="1" i="1" dirty="0">
+                <a:solidFill>
+                  <a:srgbClr val="404040"/>
+                </a:solidFill>
+                <a:latin typeface="Times New Roman" pitchFamily="34" charset="0"/>
+                <a:ea typeface="Times New Roman" pitchFamily="34" charset="-122"/>
+                <a:cs typeface="Times New Roman" pitchFamily="34" charset="-120"/>
+              </a:rPr>
+              <a:t>g</a:t>
+            </a:r>
+            <a:pPr algn="r" indent="0" marL="0">
+              <a:buNone/>
+            </a:pPr>
+            <a:r>
+              <a:rPr lang="en-US" sz="1300" dirty="0">
+                <a:solidFill>
+                  <a:srgbClr val="404040"/>
+                </a:solidFill>
+                <a:latin typeface="Times New Roman" pitchFamily="34" charset="0"/>
+                <a:ea typeface="Times New Roman" pitchFamily="34" charset="-122"/>
+                <a:cs typeface="Times New Roman" pitchFamily="34" charset="-120"/>
+              </a:rPr>
+              <a:t> ∥ </a:t>
+            </a:r>
+            <a:pPr algn="r" indent="0" marL="0">
               <a:buNone/>
             </a:pPr>
             <a:r>
@@ -5358,7 +5608,21 @@
               </a:rPr>
               <a:t>z</a:t>
             </a:r>
-            <a:pPr algn="l" indent="0" marL="0">
+            <a:pPr algn="r" indent="0" marL="0">
+              <a:buNone/>
+            </a:pPr>
+            <a:r>
+              <a:rPr lang="en-US" sz="1300" baseline="-40000" dirty="0">
+                <a:solidFill>
+                  <a:srgbClr val="404040"/>
+                </a:solidFill>
+                <a:latin typeface="Times New Roman" pitchFamily="34" charset="0"/>
+                <a:ea typeface="Times New Roman" pitchFamily="34" charset="-122"/>
+                <a:cs typeface="Times New Roman" pitchFamily="34" charset="-120"/>
+              </a:rPr>
+              <a:t>c</a:t>
+            </a:r>
+            <a:pPr algn="r" indent="0" marL="0">
               <a:buNone/>
             </a:pPr>
             <a:r>
@@ -5370,77 +5634,7 @@
                 <a:ea typeface="Times New Roman" pitchFamily="34" charset="-122"/>
                 <a:cs typeface="Times New Roman" pitchFamily="34" charset="-120"/>
               </a:rPr>
-              <a:t> = </a:t>
-            </a:r>
-            <a:pPr algn="l" indent="0" marL="0">
-              <a:buNone/>
-            </a:pPr>
-            <a:r>
-              <a:rPr lang="en-US" sz="1300" i="1" dirty="0">
-                <a:solidFill>
-                  <a:srgbClr val="404040"/>
-                </a:solidFill>
-                <a:latin typeface="Times New Roman" pitchFamily="34" charset="0"/>
-                <a:ea typeface="Times New Roman" pitchFamily="34" charset="-122"/>
-                <a:cs typeface="Times New Roman" pitchFamily="34" charset="-120"/>
-              </a:rPr>
-              <a:t>ax</a:t>
-            </a:r>
-            <a:pPr algn="l" indent="0" marL="0">
-              <a:buNone/>
-            </a:pPr>
-            <a:r>
-              <a:rPr lang="en-US" sz="1300" dirty="0">
-                <a:solidFill>
-                  <a:srgbClr val="404040"/>
-                </a:solidFill>
-                <a:latin typeface="Times New Roman" pitchFamily="34" charset="0"/>
-                <a:ea typeface="Times New Roman" pitchFamily="34" charset="-122"/>
-                <a:cs typeface="Times New Roman" pitchFamily="34" charset="-120"/>
-              </a:rPr>
-              <a:t> + </a:t>
-            </a:r>
-            <a:pPr algn="l" indent="0" marL="0">
-              <a:buNone/>
-            </a:pPr>
-            <a:r>
-              <a:rPr lang="en-US" sz="1300" i="1" dirty="0">
-                <a:solidFill>
-                  <a:srgbClr val="404040"/>
-                </a:solidFill>
-                <a:latin typeface="Times New Roman" pitchFamily="34" charset="0"/>
-                <a:ea typeface="Times New Roman" pitchFamily="34" charset="-122"/>
-                <a:cs typeface="Times New Roman" pitchFamily="34" charset="-120"/>
-              </a:rPr>
-              <a:t>by</a:t>
-            </a:r>
-            <a:pPr algn="l" indent="0" marL="0">
-              <a:buNone/>
-            </a:pPr>
-            <a:r>
-              <a:rPr lang="en-US" sz="1300" dirty="0">
-                <a:solidFill>
-                  <a:srgbClr val="404040"/>
-                </a:solidFill>
-                <a:latin typeface="Times New Roman" pitchFamily="34" charset="0"/>
-                <a:ea typeface="Times New Roman" pitchFamily="34" charset="-122"/>
-                <a:cs typeface="Times New Roman" pitchFamily="34" charset="-120"/>
-              </a:rPr>
-              <a:t> + </a:t>
-            </a:r>
-            <a:pPr algn="l" indent="0" marL="0">
-              <a:buNone/>
-            </a:pPr>
-            <a:r>
-              <a:rPr lang="en-US" sz="1300" i="1" dirty="0">
-                <a:solidFill>
-                  <a:srgbClr val="404040"/>
-                </a:solidFill>
-                <a:latin typeface="Times New Roman" pitchFamily="34" charset="0"/>
-                <a:ea typeface="Times New Roman" pitchFamily="34" charset="-122"/>
-                <a:cs typeface="Times New Roman" pitchFamily="34" charset="-120"/>
-              </a:rPr>
-              <a:t>d</a:t>
+              <a:t>)</a:t>
             </a:r>
             <a:endParaRPr lang="en-US" sz="1400" dirty="0"/>
           </a:p>
@@ -5454,8 +5648,8 @@
         </p:nvSpPr>
         <p:spPr>
           <a:xfrm>
-            <a:off x="1526408" y="4106149"/>
-            <a:ext cx="262770" cy="485560"/>
+            <a:off x="3862065" y="1686958"/>
+            <a:ext cx="4047495" cy="2995378"/>
           </a:xfrm>
           <a:custGeom>
             <a:avLst/>
@@ -5464,15 +5658,599 @@
             <a:cxnLst/>
             <a:rect l="l" t="t" r="r" b="b"/>
             <a:pathLst>
-              <a:path w="262770" h="485560">
+              <a:path w="4047495" h="2995378">
                 <a:moveTo>
-                  <a:pt x="0" y="388789"/>
+                  <a:pt x="0" y="0"/>
                 </a:moveTo>
                 <a:lnTo>
-                  <a:pt x="262770" y="485560"/>
+                  <a:pt x="3634833" y="157909"/>
                 </a:lnTo>
                 <a:lnTo>
-                  <a:pt x="262770" y="96771"/>
+                  <a:pt x="4047495" y="2995378"/>
+                </a:lnTo>
+                <a:lnTo>
+                  <a:pt x="647676" y="2481942"/>
+                </a:lnTo>
+                <a:close/>
+              </a:path>
+            </a:pathLst>
+          </a:custGeom>
+          <a:ln w="12700">
+            <a:solidFill>
+              <a:srgbClr val="808080"/>
+            </a:solidFill>
+            <a:prstDash val="dash"/>
+          </a:ln>
+        </p:spPr>
+      </p:sp>
+      <p:sp>
+        <p:nvSpPr>
+          <p:cNvPr id="20" name="Shape 18"/>
+          <p:cNvSpPr/>
+          <p:nvPr/>
+        </p:nvSpPr>
+        <p:spPr>
+          <a:xfrm flipH="1">
+            <a:off x="7882503" y="4682336"/>
+            <a:ext cx="27057" cy="39258"/>
+          </a:xfrm>
+          <a:prstGeom prst="line">
+            <a:avLst/>
+          </a:prstGeom>
+          <a:noFill/>
+          <a:ln w="22225">
+            <a:solidFill>
+              <a:srgbClr val="000000"/>
+            </a:solidFill>
+            <a:prstDash val="solid"/>
+          </a:ln>
+        </p:spPr>
+      </p:sp>
+      <p:sp>
+        <p:nvSpPr>
+          <p:cNvPr id="21" name="Shape 19"/>
+          <p:cNvSpPr/>
+          <p:nvPr/>
+        </p:nvSpPr>
+        <p:spPr>
+          <a:xfrm flipH="1">
+            <a:off x="7853603" y="4721593"/>
+            <a:ext cx="28900" cy="38506"/>
+          </a:xfrm>
+          <a:prstGeom prst="line">
+            <a:avLst/>
+          </a:prstGeom>
+          <a:noFill/>
+          <a:ln w="22225">
+            <a:solidFill>
+              <a:srgbClr val="000000"/>
+            </a:solidFill>
+            <a:prstDash val="solid"/>
+          </a:ln>
+        </p:spPr>
+      </p:sp>
+      <p:sp>
+        <p:nvSpPr>
+          <p:cNvPr id="22" name="Shape 20"/>
+          <p:cNvSpPr/>
+          <p:nvPr/>
+        </p:nvSpPr>
+        <p:spPr>
+          <a:xfrm flipH="1">
+            <a:off x="7822872" y="4760099"/>
+            <a:ext cx="30731" cy="37630"/>
+          </a:xfrm>
+          <a:prstGeom prst="line">
+            <a:avLst/>
+          </a:prstGeom>
+          <a:noFill/>
+          <a:ln w="22225">
+            <a:solidFill>
+              <a:srgbClr val="000000"/>
+            </a:solidFill>
+            <a:prstDash val="solid"/>
+          </a:ln>
+        </p:spPr>
+      </p:sp>
+      <p:sp>
+        <p:nvSpPr>
+          <p:cNvPr id="23" name="Shape 21"/>
+          <p:cNvSpPr/>
+          <p:nvPr/>
+        </p:nvSpPr>
+        <p:spPr>
+          <a:xfrm flipH="1">
+            <a:off x="7790337" y="4797729"/>
+            <a:ext cx="32535" cy="36632"/>
+          </a:xfrm>
+          <a:prstGeom prst="line">
+            <a:avLst/>
+          </a:prstGeom>
+          <a:noFill/>
+          <a:ln w="22225">
+            <a:solidFill>
+              <a:srgbClr val="000000"/>
+            </a:solidFill>
+            <a:prstDash val="solid"/>
+          </a:ln>
+        </p:spPr>
+      </p:sp>
+      <p:sp>
+        <p:nvSpPr>
+          <p:cNvPr id="24" name="Shape 22"/>
+          <p:cNvSpPr/>
+          <p:nvPr/>
+        </p:nvSpPr>
+        <p:spPr>
+          <a:xfrm flipH="1">
+            <a:off x="7756037" y="4834361"/>
+            <a:ext cx="34300" cy="35517"/>
+          </a:xfrm>
+          <a:prstGeom prst="line">
+            <a:avLst/>
+          </a:prstGeom>
+          <a:noFill/>
+          <a:ln w="22225">
+            <a:solidFill>
+              <a:srgbClr val="000000"/>
+            </a:solidFill>
+            <a:prstDash val="solid"/>
+          </a:ln>
+        </p:spPr>
+      </p:sp>
+      <p:sp>
+        <p:nvSpPr>
+          <p:cNvPr id="25" name="Shape 23"/>
+          <p:cNvSpPr/>
+          <p:nvPr/>
+        </p:nvSpPr>
+        <p:spPr>
+          <a:xfrm flipH="1">
+            <a:off x="7720025" y="4869878"/>
+            <a:ext cx="36012" cy="34290"/>
+          </a:xfrm>
+          <a:prstGeom prst="line">
+            <a:avLst/>
+          </a:prstGeom>
+          <a:noFill/>
+          <a:ln w="22225">
+            <a:solidFill>
+              <a:srgbClr val="000000"/>
+            </a:solidFill>
+            <a:prstDash val="solid"/>
+          </a:ln>
+        </p:spPr>
+      </p:sp>
+      <p:sp>
+        <p:nvSpPr>
+          <p:cNvPr id="26" name="Shape 24"/>
+          <p:cNvSpPr/>
+          <p:nvPr/>
+        </p:nvSpPr>
+        <p:spPr>
+          <a:xfrm flipH="1">
+            <a:off x="7682368" y="4904168"/>
+            <a:ext cx="37656" cy="32958"/>
+          </a:xfrm>
+          <a:prstGeom prst="line">
+            <a:avLst/>
+          </a:prstGeom>
+          <a:noFill/>
+          <a:ln w="22225">
+            <a:solidFill>
+              <a:srgbClr val="000000"/>
+            </a:solidFill>
+            <a:prstDash val="solid"/>
+          </a:ln>
+        </p:spPr>
+      </p:sp>
+      <p:sp>
+        <p:nvSpPr>
+          <p:cNvPr id="27" name="Shape 25"/>
+          <p:cNvSpPr/>
+          <p:nvPr/>
+        </p:nvSpPr>
+        <p:spPr>
+          <a:xfrm flipH="1">
+            <a:off x="7643147" y="4937126"/>
+            <a:ext cx="39222" cy="31531"/>
+          </a:xfrm>
+          <a:prstGeom prst="line">
+            <a:avLst/>
+          </a:prstGeom>
+          <a:noFill/>
+          <a:ln w="22225">
+            <a:solidFill>
+              <a:srgbClr val="000000"/>
+            </a:solidFill>
+            <a:prstDash val="solid"/>
+          </a:ln>
+        </p:spPr>
+      </p:sp>
+      <p:sp>
+        <p:nvSpPr>
+          <p:cNvPr id="28" name="Shape 26"/>
+          <p:cNvSpPr/>
+          <p:nvPr/>
+        </p:nvSpPr>
+        <p:spPr>
+          <a:xfrm flipH="1">
+            <a:off x="7602452" y="4968656"/>
+            <a:ext cx="40695" cy="30018"/>
+          </a:xfrm>
+          <a:prstGeom prst="line">
+            <a:avLst/>
+          </a:prstGeom>
+          <a:noFill/>
+          <a:ln w="22225">
+            <a:solidFill>
+              <a:srgbClr val="000000"/>
+            </a:solidFill>
+            <a:prstDash val="solid"/>
+          </a:ln>
+        </p:spPr>
+      </p:sp>
+      <p:sp>
+        <p:nvSpPr>
+          <p:cNvPr id="29" name="Shape 27"/>
+          <p:cNvSpPr/>
+          <p:nvPr/>
+        </p:nvSpPr>
+        <p:spPr>
+          <a:xfrm flipH="1">
+            <a:off x="7560385" y="4998675"/>
+            <a:ext cx="42066" cy="28431"/>
+          </a:xfrm>
+          <a:prstGeom prst="line">
+            <a:avLst/>
+          </a:prstGeom>
+          <a:noFill/>
+          <a:ln w="22225">
+            <a:solidFill>
+              <a:srgbClr val="000000"/>
+            </a:solidFill>
+            <a:prstDash val="solid"/>
+          </a:ln>
+        </p:spPr>
+      </p:sp>
+      <p:sp>
+        <p:nvSpPr>
+          <p:cNvPr id="30" name="Shape 28"/>
+          <p:cNvSpPr/>
+          <p:nvPr/>
+        </p:nvSpPr>
+        <p:spPr>
+          <a:xfrm flipH="1">
+            <a:off x="7517060" y="5027106"/>
+            <a:ext cx="43325" cy="26782"/>
+          </a:xfrm>
+          <a:prstGeom prst="line">
+            <a:avLst/>
+          </a:prstGeom>
+          <a:noFill/>
+          <a:ln w="22225">
+            <a:solidFill>
+              <a:srgbClr val="000000"/>
+            </a:solidFill>
+            <a:prstDash val="solid"/>
+          </a:ln>
+        </p:spPr>
+      </p:sp>
+      <p:sp>
+        <p:nvSpPr>
+          <p:cNvPr id="31" name="Shape 29"/>
+          <p:cNvSpPr/>
+          <p:nvPr/>
+        </p:nvSpPr>
+        <p:spPr>
+          <a:xfrm flipH="1">
+            <a:off x="7472596" y="5053888"/>
+            <a:ext cx="44464" cy="25084"/>
+          </a:xfrm>
+          <a:prstGeom prst="line">
+            <a:avLst/>
+          </a:prstGeom>
+          <a:noFill/>
+          <a:ln w="22225">
+            <a:solidFill>
+              <a:srgbClr val="000000"/>
+            </a:solidFill>
+            <a:prstDash val="solid"/>
+          </a:ln>
+        </p:spPr>
+      </p:sp>
+      <p:sp>
+        <p:nvSpPr>
+          <p:cNvPr id="32" name="Shape 30"/>
+          <p:cNvSpPr/>
+          <p:nvPr/>
+        </p:nvSpPr>
+        <p:spPr>
+          <a:xfrm flipH="1">
+            <a:off x="7427120" y="5078972"/>
+            <a:ext cx="45476" cy="23350"/>
+          </a:xfrm>
+          <a:prstGeom prst="line">
+            <a:avLst/>
+          </a:prstGeom>
+          <a:noFill/>
+          <a:ln w="22225">
+            <a:solidFill>
+              <a:srgbClr val="000000"/>
+            </a:solidFill>
+            <a:prstDash val="solid"/>
+          </a:ln>
+        </p:spPr>
+      </p:sp>
+      <p:sp>
+        <p:nvSpPr>
+          <p:cNvPr id="33" name="Shape 31"/>
+          <p:cNvSpPr/>
+          <p:nvPr/>
+        </p:nvSpPr>
+        <p:spPr>
+          <a:xfrm flipH="1">
+            <a:off x="7380763" y="5102322"/>
+            <a:ext cx="46357" cy="21592"/>
+          </a:xfrm>
+          <a:prstGeom prst="line">
+            <a:avLst/>
+          </a:prstGeom>
+          <a:noFill/>
+          <a:ln w="22225">
+            <a:solidFill>
+              <a:srgbClr val="000000"/>
+            </a:solidFill>
+            <a:prstDash val="solid"/>
+            <a:tailEnd type="triangle"/>
+          </a:ln>
+        </p:spPr>
+      </p:sp>
+      <p:sp>
+        <p:nvSpPr>
+          <p:cNvPr id="34" name="Text 32"/>
+          <p:cNvSpPr txBox="1"/>
+          <p:nvPr/>
+        </p:nvSpPr>
+        <p:spPr>
+          <a:xfrm>
+            <a:off x="7746376" y="4790822"/>
+            <a:ext cx="457200" cy="292608"/>
+          </a:xfrm>
+          <a:prstGeom prst="rect">
+            <a:avLst/>
+          </a:prstGeom>
+          <a:noFill/>
+          <a:ln/>
+        </p:spPr>
+        <p:txBody>
+          <a:bodyPr wrap="square" lIns="0" tIns="0" rIns="0" bIns="0" rtlCol="0" anchor="ctr"/>
+          <a:lstStyle/>
+          <a:p>
+            <a:pPr algn="ctr" indent="0" marL="0">
+              <a:buNone/>
+            </a:pPr>
+            <a:r>
+              <a:rPr lang="en-US" sz="1700" b="1" i="1" dirty="0">
+                <a:solidFill>
+                  <a:srgbClr val="000000"/>
+                </a:solidFill>
+                <a:latin typeface="Times New Roman" pitchFamily="34" charset="0"/>
+                <a:ea typeface="Times New Roman" pitchFamily="34" charset="-122"/>
+                <a:cs typeface="Times New Roman" pitchFamily="34" charset="-120"/>
+              </a:rPr>
+              <a:t>R</a:t>
+            </a:r>
+            <a:pPr algn="ctr" indent="0" marL="0">
+              <a:buNone/>
+            </a:pPr>
+            <a:r>
+              <a:rPr lang="en-US" sz="1700" i="1" baseline="-40000" dirty="0">
+                <a:solidFill>
+                  <a:srgbClr val="000000"/>
+                </a:solidFill>
+                <a:latin typeface="Times New Roman" pitchFamily="34" charset="0"/>
+                <a:ea typeface="Times New Roman" pitchFamily="34" charset="-122"/>
+                <a:cs typeface="Times New Roman" pitchFamily="34" charset="-120"/>
+              </a:rPr>
+              <a:t>p</a:t>
+            </a:r>
+            <a:endParaRPr lang="en-US" sz="1700" dirty="0"/>
+          </a:p>
+        </p:txBody>
+      </p:sp>
+      <p:sp>
+        <p:nvSpPr>
+          <p:cNvPr id="35" name="Text 33"/>
+          <p:cNvSpPr txBox="1"/>
+          <p:nvPr/>
+        </p:nvSpPr>
+        <p:spPr>
+          <a:xfrm>
+            <a:off x="1667505" y="1549798"/>
+            <a:ext cx="2103120" cy="274320"/>
+          </a:xfrm>
+          <a:prstGeom prst="rect">
+            <a:avLst/>
+          </a:prstGeom>
+          <a:noFill/>
+          <a:ln/>
+        </p:spPr>
+        <p:txBody>
+          <a:bodyPr wrap="square" lIns="0" tIns="0" rIns="0" bIns="0" rtlCol="0" anchor="ctr"/>
+          <a:lstStyle/>
+          <a:p>
+            <a:pPr algn="r" indent="0" marL="0">
+              <a:buNone/>
+            </a:pPr>
+            <a:r>
+              <a:rPr lang="en-US" sz="1200" dirty="0">
+                <a:solidFill>
+                  <a:srgbClr val="808080"/>
+                </a:solidFill>
+                <a:latin typeface="Malgun Gothic" pitchFamily="34" charset="0"/>
+                <a:ea typeface="Malgun Gothic" pitchFamily="34" charset="-122"/>
+                <a:cs typeface="Malgun Gothic" pitchFamily="34" charset="-120"/>
+              </a:rPr>
+              <a:t>회전</a:t>
+            </a:r>
+            <a:pPr algn="r" indent="0" marL="0">
+              <a:buNone/>
+            </a:pPr>
+            <a:r>
+              <a:rPr lang="en-US" sz="1200" dirty="0">
+                <a:solidFill>
+                  <a:srgbClr val="808080"/>
+                </a:solidFill>
+                <a:latin typeface="Times New Roman" pitchFamily="34" charset="0"/>
+                <a:ea typeface="Times New Roman" pitchFamily="34" charset="-122"/>
+                <a:cs typeface="Times New Roman" pitchFamily="34" charset="-120"/>
+              </a:rPr>
+              <a:t> </a:t>
+            </a:r>
+            <a:pPr algn="r" indent="0" marL="0">
+              <a:buNone/>
+            </a:pPr>
+            <a:r>
+              <a:rPr lang="en-US" sz="1200" dirty="0">
+                <a:solidFill>
+                  <a:srgbClr val="808080"/>
+                </a:solidFill>
+                <a:latin typeface="Malgun Gothic" pitchFamily="34" charset="0"/>
+                <a:ea typeface="Malgun Gothic" pitchFamily="34" charset="-122"/>
+                <a:cs typeface="Malgun Gothic" pitchFamily="34" charset="-120"/>
+              </a:rPr>
+              <a:t>전</a:t>
+            </a:r>
+            <a:pPr algn="r" indent="0" marL="0">
+              <a:buNone/>
+            </a:pPr>
+            <a:r>
+              <a:rPr lang="en-US" sz="1200" dirty="0">
+                <a:solidFill>
+                  <a:srgbClr val="808080"/>
+                </a:solidFill>
+                <a:latin typeface="Times New Roman" pitchFamily="34" charset="0"/>
+                <a:ea typeface="Times New Roman" pitchFamily="34" charset="-122"/>
+                <a:cs typeface="Times New Roman" pitchFamily="34" charset="-120"/>
+              </a:rPr>
+              <a:t> </a:t>
+            </a:r>
+            <a:pPr algn="r" indent="0" marL="0">
+              <a:buNone/>
+            </a:pPr>
+            <a:r>
+              <a:rPr lang="en-US" sz="1200" dirty="0">
+                <a:solidFill>
+                  <a:srgbClr val="808080"/>
+                </a:solidFill>
+                <a:latin typeface="Malgun Gothic" pitchFamily="34" charset="0"/>
+                <a:ea typeface="Malgun Gothic" pitchFamily="34" charset="-122"/>
+                <a:cs typeface="Malgun Gothic" pitchFamily="34" charset="-120"/>
+              </a:rPr>
+              <a:t>공통</a:t>
+            </a:r>
+            <a:pPr algn="r" indent="0" marL="0">
+              <a:buNone/>
+            </a:pPr>
+            <a:r>
+              <a:rPr lang="en-US" sz="1200" dirty="0">
+                <a:solidFill>
+                  <a:srgbClr val="808080"/>
+                </a:solidFill>
+                <a:latin typeface="Times New Roman" pitchFamily="34" charset="0"/>
+                <a:ea typeface="Times New Roman" pitchFamily="34" charset="-122"/>
+                <a:cs typeface="Times New Roman" pitchFamily="34" charset="-120"/>
+              </a:rPr>
+              <a:t> </a:t>
+            </a:r>
+            <a:pPr algn="r" indent="0" marL="0">
+              <a:buNone/>
+            </a:pPr>
+            <a:r>
+              <a:rPr lang="en-US" sz="1200" dirty="0">
+                <a:solidFill>
+                  <a:srgbClr val="808080"/>
+                </a:solidFill>
+                <a:latin typeface="Malgun Gothic" pitchFamily="34" charset="0"/>
+                <a:ea typeface="Malgun Gothic" pitchFamily="34" charset="-122"/>
+                <a:cs typeface="Malgun Gothic" pitchFamily="34" charset="-120"/>
+              </a:rPr>
+              <a:t>평면</a:t>
+            </a:r>
+            <a:pPr algn="r" indent="0" marL="0">
+              <a:buNone/>
+            </a:pPr>
+            <a:r>
+              <a:rPr lang="en-US" sz="1200" dirty="0">
+                <a:solidFill>
+                  <a:srgbClr val="808080"/>
+                </a:solidFill>
+                <a:latin typeface="Times New Roman" pitchFamily="34" charset="0"/>
+                <a:ea typeface="Times New Roman" pitchFamily="34" charset="-122"/>
+                <a:cs typeface="Times New Roman" pitchFamily="34" charset="-120"/>
+              </a:rPr>
+              <a:t> (</a:t>
+            </a:r>
+            <a:pPr algn="r" indent="0" marL="0">
+              <a:buNone/>
+            </a:pPr>
+            <a:r>
+              <a:rPr lang="en-US" sz="1200" dirty="0">
+                <a:solidFill>
+                  <a:srgbClr val="808080"/>
+                </a:solidFill>
+                <a:latin typeface="Malgun Gothic" pitchFamily="34" charset="0"/>
+                <a:ea typeface="Malgun Gothic" pitchFamily="34" charset="-122"/>
+                <a:cs typeface="Malgun Gothic" pitchFamily="34" charset="-120"/>
+              </a:rPr>
+              <a:t>점선</a:t>
+            </a:r>
+            <a:pPr algn="r" indent="0" marL="0">
+              <a:buNone/>
+            </a:pPr>
+            <a:r>
+              <a:rPr lang="en-US" sz="1200" dirty="0">
+                <a:solidFill>
+                  <a:srgbClr val="808080"/>
+                </a:solidFill>
+                <a:latin typeface="Times New Roman" pitchFamily="34" charset="0"/>
+                <a:ea typeface="Times New Roman" pitchFamily="34" charset="-122"/>
+                <a:cs typeface="Times New Roman" pitchFamily="34" charset="-120"/>
+              </a:rPr>
+              <a:t>)</a:t>
+            </a:r>
+            <a:endParaRPr lang="en-US" sz="1400" dirty="0"/>
+          </a:p>
+        </p:txBody>
+      </p:sp>
+      <p:sp>
+        <p:nvSpPr>
+          <p:cNvPr id="36" name="Shape 34"/>
+          <p:cNvSpPr/>
+          <p:nvPr/>
+        </p:nvSpPr>
+        <p:spPr>
+          <a:xfrm>
+            <a:off x="1409357" y="3725039"/>
+            <a:ext cx="223709" cy="415328"/>
+          </a:xfrm>
+          <a:custGeom>
+            <a:avLst/>
+            <a:gdLst/>
+            <a:ahLst/>
+            <a:cxnLst/>
+            <a:rect l="l" t="t" r="r" b="b"/>
+            <a:pathLst>
+              <a:path w="223709" h="415328">
+                <a:moveTo>
+                  <a:pt x="2726" y="337020"/>
+                </a:moveTo>
+                <a:lnTo>
+                  <a:pt x="223709" y="415328"/>
+                </a:lnTo>
+                <a:lnTo>
+                  <a:pt x="222208" y="73598"/>
                 </a:lnTo>
                 <a:lnTo>
                   <a:pt x="0" y="0"/>
@@ -5482,7 +6260,7 @@
             </a:pathLst>
           </a:custGeom>
           <a:solidFill>
-            <a:srgbClr val="676767"/>
+            <a:srgbClr val="686868"/>
           </a:solidFill>
           <a:ln w="12700">
             <a:solidFill>
@@ -5494,14 +6272,14 @@
       </p:sp>
       <p:sp>
         <p:nvSpPr>
-          <p:cNvPr id="20" name="Shape 18"/>
-          <p:cNvSpPr/>
-          <p:nvPr/>
-        </p:nvSpPr>
-        <p:spPr>
-          <a:xfrm>
-            <a:off x="1789178" y="3961840"/>
-            <a:ext cx="548821" cy="731839"/>
+          <p:cNvPr id="37" name="Shape 35"/>
+          <p:cNvSpPr/>
+          <p:nvPr/>
+        </p:nvSpPr>
+        <p:spPr>
+          <a:xfrm>
+            <a:off x="1631565" y="3595027"/>
+            <a:ext cx="477817" cy="636872"/>
           </a:xfrm>
           <a:custGeom>
             <a:avLst/>
@@ -5510,25 +6288,25 @@
             <a:cxnLst/>
             <a:rect l="l" t="t" r="r" b="b"/>
             <a:pathLst>
-              <a:path w="548821" h="731839">
+              <a:path w="477817" h="636872">
                 <a:moveTo>
-                  <a:pt x="0" y="629869"/>
+                  <a:pt x="1501" y="545340"/>
                 </a:moveTo>
                 <a:lnTo>
-                  <a:pt x="0" y="241079"/>
+                  <a:pt x="0" y="203610"/>
                 </a:lnTo>
                 <a:lnTo>
-                  <a:pt x="548821" y="0"/>
+                  <a:pt x="477817" y="0"/>
                 </a:lnTo>
                 <a:lnTo>
-                  <a:pt x="548821" y="731839"/>
+                  <a:pt x="475549" y="636872"/>
                 </a:lnTo>
                 <a:close/>
               </a:path>
             </a:pathLst>
           </a:custGeom>
           <a:solidFill>
-            <a:srgbClr val="606060"/>
+            <a:srgbClr val="616161"/>
           </a:solidFill>
           <a:ln w="12700">
             <a:solidFill>
@@ -5540,14 +6318,14 @@
       </p:sp>
       <p:sp>
         <p:nvSpPr>
-          <p:cNvPr id="21" name="Shape 19"/>
-          <p:cNvSpPr/>
-          <p:nvPr/>
-        </p:nvSpPr>
-        <p:spPr>
-          <a:xfrm>
-            <a:off x="1526408" y="3779683"/>
-            <a:ext cx="811591" cy="423236"/>
+          <p:cNvPr id="38" name="Shape 36"/>
+          <p:cNvSpPr/>
+          <p:nvPr/>
+        </p:nvSpPr>
+        <p:spPr>
+          <a:xfrm>
+            <a:off x="1409357" y="3465082"/>
+            <a:ext cx="700025" cy="333555"/>
           </a:xfrm>
           <a:custGeom>
             <a:avLst/>
@@ -5556,18 +6334,18 @@
             <a:cxnLst/>
             <a:rect l="l" t="t" r="r" b="b"/>
             <a:pathLst>
-              <a:path w="811591" h="423236">
+              <a:path w="700025" h="333555">
                 <a:moveTo>
-                  <a:pt x="262770" y="423236"/>
+                  <a:pt x="222208" y="333555"/>
                 </a:moveTo>
                 <a:lnTo>
-                  <a:pt x="0" y="326465"/>
+                  <a:pt x="0" y="259957"/>
                 </a:lnTo>
                 <a:lnTo>
-                  <a:pt x="316965" y="0"/>
+                  <a:pt x="277341" y="0"/>
                 </a:lnTo>
                 <a:lnTo>
-                  <a:pt x="811591" y="182157"/>
+                  <a:pt x="700025" y="129945"/>
                 </a:lnTo>
                 <a:close/>
               </a:path>
@@ -5586,14 +6364,14 @@
       </p:sp>
       <p:sp>
         <p:nvSpPr>
-          <p:cNvPr id="22" name="Shape 20"/>
-          <p:cNvSpPr/>
-          <p:nvPr/>
-        </p:nvSpPr>
-        <p:spPr>
-          <a:xfrm>
-            <a:off x="969236" y="4102550"/>
-            <a:ext cx="1013155" cy="994546"/>
+          <p:cNvPr id="39" name="Shape 37"/>
+          <p:cNvSpPr/>
+          <p:nvPr/>
+        </p:nvSpPr>
+        <p:spPr>
+          <a:xfrm>
+            <a:off x="857575" y="3700603"/>
+            <a:ext cx="942561" cy="886270"/>
           </a:xfrm>
           <a:custGeom>
             <a:avLst/>
@@ -5602,18 +6380,18 @@
             <a:cxnLst/>
             <a:rect l="l" t="t" r="r" b="b"/>
             <a:pathLst>
-              <a:path w="1013155" h="994546">
+              <a:path w="942561" h="886270">
                 <a:moveTo>
-                  <a:pt x="0" y="994546"/>
+                  <a:pt x="11712" y="886270"/>
                 </a:moveTo>
                 <a:lnTo>
-                  <a:pt x="0" y="262707"/>
+                  <a:pt x="0" y="210428"/>
                 </a:lnTo>
                 <a:lnTo>
-                  <a:pt x="1013155" y="0"/>
+                  <a:pt x="941523" y="0"/>
                 </a:lnTo>
                 <a:lnTo>
-                  <a:pt x="1013155" y="731839"/>
+                  <a:pt x="942561" y="649948"/>
                 </a:lnTo>
                 <a:close/>
               </a:path>
@@ -5632,14 +6410,14 @@
       </p:sp>
       <p:sp>
         <p:nvSpPr>
-          <p:cNvPr id="23" name="Shape 21"/>
-          <p:cNvSpPr/>
-          <p:nvPr/>
-        </p:nvSpPr>
-        <p:spPr>
-          <a:xfrm>
-            <a:off x="320040" y="3863469"/>
-            <a:ext cx="1662351" cy="501788"/>
+          <p:cNvPr id="40" name="Shape 38"/>
+          <p:cNvSpPr/>
+          <p:nvPr/>
+        </p:nvSpPr>
+        <p:spPr>
+          <a:xfrm>
+            <a:off x="320040" y="3523944"/>
+            <a:ext cx="1479057" cy="387087"/>
           </a:xfrm>
           <a:custGeom>
             <a:avLst/>
@@ -5648,18 +6426,18 @@
             <a:cxnLst/>
             <a:rect l="l" t="t" r="r" b="b"/>
             <a:pathLst>
-              <a:path w="1662351" h="501788">
+              <a:path w="1479057" h="387087">
                 <a:moveTo>
-                  <a:pt x="0" y="262707"/>
+                  <a:pt x="0" y="194855"/>
                 </a:moveTo>
                 <a:lnTo>
-                  <a:pt x="1013155" y="0"/>
+                  <a:pt x="928564" y="0"/>
                 </a:lnTo>
                 <a:lnTo>
-                  <a:pt x="1662351" y="239081"/>
+                  <a:pt x="1479057" y="176659"/>
                 </a:lnTo>
                 <a:lnTo>
-                  <a:pt x="649196" y="501788"/>
+                  <a:pt x="537535" y="387087"/>
                 </a:lnTo>
                 <a:close/>
               </a:path>
@@ -5678,14 +6456,14 @@
       </p:sp>
       <p:sp>
         <p:nvSpPr>
-          <p:cNvPr id="24" name="Shape 22"/>
-          <p:cNvSpPr/>
-          <p:nvPr/>
-        </p:nvSpPr>
-        <p:spPr>
-          <a:xfrm>
-            <a:off x="320040" y="4126176"/>
-            <a:ext cx="649196" cy="970919"/>
+          <p:cNvPr id="41" name="Shape 39"/>
+          <p:cNvSpPr/>
+          <p:nvPr/>
+        </p:nvSpPr>
+        <p:spPr>
+          <a:xfrm>
+            <a:off x="320040" y="3718799"/>
+            <a:ext cx="549247" cy="868074"/>
           </a:xfrm>
           <a:custGeom>
             <a:avLst/>
@@ -5694,25 +6472,25 @@
             <a:cxnLst/>
             <a:rect l="l" t="t" r="r" b="b"/>
             <a:pathLst>
-              <a:path w="649196" h="970919">
+              <a:path w="549247" h="868074">
                 <a:moveTo>
-                  <a:pt x="0" y="731839"/>
+                  <a:pt x="17104" y="652196"/>
                 </a:moveTo>
                 <a:lnTo>
                   <a:pt x="0" y="0"/>
                 </a:lnTo>
                 <a:lnTo>
-                  <a:pt x="649196" y="239081"/>
+                  <a:pt x="537535" y="192232"/>
                 </a:lnTo>
                 <a:lnTo>
-                  <a:pt x="649196" y="970919"/>
+                  <a:pt x="549247" y="868074"/>
                 </a:lnTo>
                 <a:close/>
               </a:path>
             </a:pathLst>
           </a:custGeom>
           <a:solidFill>
-            <a:srgbClr val="A1A1A1"/>
+            <a:srgbClr val="A3A3A3"/>
           </a:solidFill>
           <a:ln w="12700">
             <a:solidFill>
@@ -5724,14 +6502,14 @@
       </p:sp>
       <p:sp>
         <p:nvSpPr>
-          <p:cNvPr id="25" name="Shape 23"/>
-          <p:cNvSpPr/>
-          <p:nvPr/>
-        </p:nvSpPr>
-        <p:spPr>
-          <a:xfrm>
-            <a:off x="2090686" y="4236681"/>
-            <a:ext cx="847645" cy="312164"/>
+          <p:cNvPr id="42" name="Shape 40"/>
+          <p:cNvSpPr/>
+          <p:nvPr/>
+        </p:nvSpPr>
+        <p:spPr>
+          <a:xfrm>
+            <a:off x="1895063" y="3845129"/>
+            <a:ext cx="930098" cy="305530"/>
           </a:xfrm>
           <a:prstGeom prst="line">
             <a:avLst/>
@@ -5748,13 +6526,13 @@
       </p:sp>
       <p:sp>
         <p:nvSpPr>
-          <p:cNvPr id="26" name="Text 24"/>
+          <p:cNvPr id="43" name="Text 41"/>
           <p:cNvSpPr txBox="1"/>
           <p:nvPr/>
         </p:nvSpPr>
         <p:spPr>
           <a:xfrm>
-            <a:off x="2824031" y="4658573"/>
+            <a:off x="2729149" y="4260387"/>
             <a:ext cx="411480" cy="292608"/>
           </a:xfrm>
           <a:prstGeom prst="rect">
@@ -5801,14 +6579,14 @@
       </p:sp>
       <p:sp>
         <p:nvSpPr>
-          <p:cNvPr id="27" name="Shape 25"/>
+          <p:cNvPr id="44" name="Shape 42"/>
           <p:cNvSpPr/>
           <p:nvPr/>
         </p:nvSpPr>
         <p:spPr>
           <a:xfrm flipV="1">
-            <a:off x="2090686" y="3166957"/>
-            <a:ext cx="0" cy="1069724"/>
+            <a:off x="1895063" y="2733452"/>
+            <a:ext cx="0" cy="1111677"/>
           </a:xfrm>
           <a:prstGeom prst="line">
             <a:avLst/>
@@ -5825,13 +6603,13 @@
       </p:sp>
       <p:sp>
         <p:nvSpPr>
-          <p:cNvPr id="28" name="Text 26"/>
+          <p:cNvPr id="45" name="Text 43"/>
           <p:cNvSpPr txBox="1"/>
           <p:nvPr/>
         </p:nvSpPr>
         <p:spPr>
           <a:xfrm>
-            <a:off x="1610626" y="3020653"/>
+            <a:off x="1415003" y="2587148"/>
             <a:ext cx="411480" cy="292608"/>
           </a:xfrm>
           <a:prstGeom prst="rect">
@@ -5878,14 +6656,14 @@
       </p:sp>
       <p:sp>
         <p:nvSpPr>
-          <p:cNvPr id="29" name="Shape 27"/>
+          <p:cNvPr id="46" name="Shape 44"/>
           <p:cNvSpPr/>
           <p:nvPr/>
         </p:nvSpPr>
         <p:spPr>
           <a:xfrm flipV="1">
-            <a:off x="2090686" y="3943929"/>
-            <a:ext cx="1129029" cy="292753"/>
+            <a:off x="1895063" y="3590750"/>
+            <a:ext cx="1099842" cy="254379"/>
           </a:xfrm>
           <a:prstGeom prst="line">
             <a:avLst/>
@@ -5902,13 +6680,13 @@
       </p:sp>
       <p:sp>
         <p:nvSpPr>
-          <p:cNvPr id="30" name="Text 28"/>
+          <p:cNvPr id="47" name="Text 45"/>
           <p:cNvSpPr txBox="1"/>
           <p:nvPr/>
         </p:nvSpPr>
         <p:spPr>
           <a:xfrm>
-            <a:off x="2968255" y="4071945"/>
+            <a:off x="2743444" y="3737054"/>
             <a:ext cx="411480" cy="292608"/>
           </a:xfrm>
           <a:prstGeom prst="rect">
@@ -5955,13 +6733,13 @@
       </p:sp>
       <p:sp>
         <p:nvSpPr>
-          <p:cNvPr id="31" name="Shape 29"/>
-          <p:cNvSpPr/>
-          <p:nvPr/>
-        </p:nvSpPr>
-        <p:spPr>
-          <a:xfrm>
-            <a:off x="2044966" y="4190961"/>
+          <p:cNvPr id="48" name="Shape 46"/>
+          <p:cNvSpPr/>
+          <p:nvPr/>
+        </p:nvSpPr>
+        <p:spPr>
+          <a:xfrm>
+            <a:off x="1849343" y="3799409"/>
             <a:ext cx="91440" cy="91440"/>
           </a:xfrm>
           <a:prstGeom prst="ellipse">
@@ -5980,13 +6758,13 @@
       </p:sp>
       <p:sp>
         <p:nvSpPr>
-          <p:cNvPr id="32" name="Text 30"/>
+          <p:cNvPr id="49" name="Text 47"/>
           <p:cNvSpPr txBox="1"/>
           <p:nvPr/>
         </p:nvSpPr>
         <p:spPr>
           <a:xfrm>
-            <a:off x="353326" y="5288241"/>
+            <a:off x="340583" y="4805249"/>
             <a:ext cx="1645920" cy="292608"/>
           </a:xfrm>
           <a:prstGeom prst="rect">
@@ -6047,14 +6825,14 @@
       </p:sp>
       <p:sp>
         <p:nvSpPr>
-          <p:cNvPr id="33" name="Shape 31"/>
-          <p:cNvSpPr/>
-          <p:nvPr/>
-        </p:nvSpPr>
-        <p:spPr>
-          <a:xfrm flipV="1">
-            <a:off x="3008748" y="2899092"/>
-            <a:ext cx="4786971" cy="92891"/>
+          <p:cNvPr id="50" name="Shape 48"/>
+          <p:cNvSpPr/>
+          <p:nvPr/>
+        </p:nvSpPr>
+        <p:spPr>
+          <a:xfrm>
+            <a:off x="4376139" y="2699258"/>
+            <a:ext cx="3167310" cy="685182"/>
           </a:xfrm>
           <a:prstGeom prst="line">
             <a:avLst/>
@@ -6070,14 +6848,14 @@
       </p:sp>
       <p:sp>
         <p:nvSpPr>
-          <p:cNvPr id="34" name="Shape 32"/>
-          <p:cNvSpPr/>
-          <p:nvPr/>
-        </p:nvSpPr>
-        <p:spPr>
-          <a:xfrm flipH="1" flipV="1">
-            <a:off x="5262471" y="1344170"/>
-            <a:ext cx="973251" cy="3466425"/>
+          <p:cNvPr id="51" name="Shape 49"/>
+          <p:cNvSpPr/>
+          <p:nvPr/>
+        </p:nvSpPr>
+        <p:spPr>
+          <a:xfrm flipV="1">
+            <a:off x="5910772" y="1604457"/>
+            <a:ext cx="208881" cy="3074118"/>
           </a:xfrm>
           <a:prstGeom prst="line">
             <a:avLst/>
@@ -6093,14 +6871,14 @@
       </p:sp>
       <p:sp>
         <p:nvSpPr>
-          <p:cNvPr id="35" name="Shape 33"/>
-          <p:cNvSpPr/>
-          <p:nvPr/>
-        </p:nvSpPr>
-        <p:spPr>
-          <a:xfrm flipH="1" flipV="1">
-            <a:off x="4766616" y="2957872"/>
-            <a:ext cx="191115" cy="680693"/>
+          <p:cNvPr id="52" name="Shape 50"/>
+          <p:cNvSpPr/>
+          <p:nvPr/>
+        </p:nvSpPr>
+        <p:spPr>
+          <a:xfrm flipV="1">
+            <a:off x="5410654" y="2930701"/>
+            <a:ext cx="35349" cy="605725"/>
           </a:xfrm>
           <a:prstGeom prst="line">
             <a:avLst/>
@@ -6116,14 +6894,14 @@
       </p:sp>
       <p:sp>
         <p:nvSpPr>
-          <p:cNvPr id="36" name="Shape 34"/>
-          <p:cNvSpPr/>
-          <p:nvPr/>
-        </p:nvSpPr>
-        <p:spPr>
-          <a:xfrm flipV="1">
-            <a:off x="4957731" y="3620251"/>
-            <a:ext cx="943785" cy="18314"/>
+          <p:cNvPr id="53" name="Shape 51"/>
+          <p:cNvSpPr/>
+          <p:nvPr/>
+        </p:nvSpPr>
+        <p:spPr>
+          <a:xfrm>
+            <a:off x="5410654" y="3536426"/>
+            <a:ext cx="568096" cy="141714"/>
           </a:xfrm>
           <a:prstGeom prst="line">
             <a:avLst/>
@@ -6139,13 +6917,13 @@
       </p:sp>
       <p:sp>
         <p:nvSpPr>
-          <p:cNvPr id="37" name="Shape 35"/>
-          <p:cNvSpPr/>
-          <p:nvPr/>
-        </p:nvSpPr>
-        <p:spPr>
-          <a:xfrm>
-            <a:off x="4725468" y="2916724"/>
+          <p:cNvPr id="54" name="Shape 52"/>
+          <p:cNvSpPr/>
+          <p:nvPr/>
+        </p:nvSpPr>
+        <p:spPr>
+          <a:xfrm>
+            <a:off x="5404855" y="2889553"/>
             <a:ext cx="82296" cy="82296"/>
           </a:xfrm>
           <a:prstGeom prst="ellipse">
@@ -6164,13 +6942,13 @@
       </p:sp>
       <p:sp>
         <p:nvSpPr>
-          <p:cNvPr id="38" name="Shape 36"/>
-          <p:cNvSpPr/>
-          <p:nvPr/>
-        </p:nvSpPr>
-        <p:spPr>
-          <a:xfrm>
-            <a:off x="5860367" y="3579103"/>
+          <p:cNvPr id="55" name="Shape 53"/>
+          <p:cNvSpPr/>
+          <p:nvPr/>
+        </p:nvSpPr>
+        <p:spPr>
+          <a:xfrm>
+            <a:off x="5937602" y="3636992"/>
             <a:ext cx="82296" cy="82296"/>
           </a:xfrm>
           <a:prstGeom prst="ellipse">
@@ -6189,14 +6967,14 @@
       </p:sp>
       <p:sp>
         <p:nvSpPr>
-          <p:cNvPr id="39" name="Shape 37"/>
-          <p:cNvSpPr/>
-          <p:nvPr/>
-        </p:nvSpPr>
-        <p:spPr>
-          <a:xfrm flipH="1">
-            <a:off x="4711528" y="2743352"/>
-            <a:ext cx="943785" cy="18314"/>
+          <p:cNvPr id="56" name="Shape 54"/>
+          <p:cNvSpPr/>
+          <p:nvPr/>
+        </p:nvSpPr>
+        <p:spPr>
+          <a:xfrm flipH="1" flipV="1">
+            <a:off x="5456990" y="2742418"/>
+            <a:ext cx="577257" cy="118949"/>
           </a:xfrm>
           <a:prstGeom prst="line">
             <a:avLst/>
@@ -6214,13 +6992,13 @@
       </p:sp>
       <p:sp>
         <p:nvSpPr>
-          <p:cNvPr id="40" name="Text 38"/>
+          <p:cNvPr id="57" name="Text 55"/>
           <p:cNvSpPr txBox="1"/>
           <p:nvPr/>
         </p:nvSpPr>
         <p:spPr>
           <a:xfrm>
-            <a:off x="4876873" y="2419143"/>
+            <a:off x="5502673" y="2458789"/>
             <a:ext cx="502920" cy="274320"/>
           </a:xfrm>
           <a:prstGeom prst="rect">
@@ -6295,14 +7073,14 @@
       </p:sp>
       <p:sp>
         <p:nvSpPr>
-          <p:cNvPr id="41" name="Shape 39"/>
-          <p:cNvSpPr/>
-          <p:nvPr/>
-        </p:nvSpPr>
-        <p:spPr>
-          <a:xfrm>
-            <a:off x="5498730" y="2943665"/>
-            <a:ext cx="191115" cy="680693"/>
+          <p:cNvPr id="58" name="Shape 56"/>
+          <p:cNvSpPr/>
+          <p:nvPr/>
+        </p:nvSpPr>
+        <p:spPr>
+          <a:xfrm flipH="1">
+            <a:off x="5688977" y="2991641"/>
+            <a:ext cx="38727" cy="614214"/>
           </a:xfrm>
           <a:prstGeom prst="line">
             <a:avLst/>
@@ -6320,13 +7098,13 @@
       </p:sp>
       <p:sp>
         <p:nvSpPr>
-          <p:cNvPr id="42" name="Text 40"/>
+          <p:cNvPr id="59" name="Text 57"/>
           <p:cNvSpPr txBox="1"/>
           <p:nvPr/>
         </p:nvSpPr>
         <p:spPr>
           <a:xfrm>
-            <a:off x="5074711" y="3152055"/>
+            <a:off x="4976329" y="3051221"/>
             <a:ext cx="502920" cy="274320"/>
           </a:xfrm>
           <a:prstGeom prst="rect">
@@ -6401,13 +7179,13 @@
       </p:sp>
       <p:sp>
         <p:nvSpPr>
-          <p:cNvPr id="43" name="Shape 41"/>
-          <p:cNvSpPr/>
-          <p:nvPr/>
-        </p:nvSpPr>
-        <p:spPr>
-          <a:xfrm>
-            <a:off x="4889151" y="3569985"/>
+          <p:cNvPr id="60" name="Shape 58"/>
+          <p:cNvSpPr/>
+          <p:nvPr/>
+        </p:nvSpPr>
+        <p:spPr>
+          <a:xfrm>
+            <a:off x="5342074" y="3467846"/>
             <a:ext cx="137160" cy="137160"/>
           </a:xfrm>
           <a:prstGeom prst="ellipse">
@@ -6426,14 +7204,14 @@
       </p:sp>
       <p:sp>
         <p:nvSpPr>
-          <p:cNvPr id="44" name="Text 42"/>
+          <p:cNvPr id="61" name="Text 59"/>
           <p:cNvSpPr txBox="1"/>
           <p:nvPr/>
         </p:nvSpPr>
         <p:spPr>
           <a:xfrm>
-            <a:off x="4134771" y="3757437"/>
-            <a:ext cx="822960" cy="310896"/>
+            <a:off x="4770574" y="3646154"/>
+            <a:ext cx="548640" cy="292608"/>
           </a:xfrm>
           <a:prstGeom prst="rect">
             <a:avLst/>
@@ -6501,82 +7279,44 @@
               </a:rPr>
               <a:t>k</a:t>
             </a:r>
-            <a:pPr algn="ctr" indent="0" marL="0">
-              <a:buNone/>
-            </a:pPr>
-            <a:r>
-              <a:rPr lang="en-US" sz="1600" baseline="30000" dirty="0">
-                <a:solidFill>
-                  <a:srgbClr val="000000"/>
-                </a:solidFill>
-                <a:latin typeface="Times New Roman" pitchFamily="34" charset="0"/>
-                <a:ea typeface="Times New Roman" pitchFamily="34" charset="-122"/>
-                <a:cs typeface="Times New Roman" pitchFamily="34" charset="-120"/>
-              </a:rPr>
-              <a:t>cam</a:t>
-            </a:r>
             <a:endParaRPr lang="en-US" sz="1600" dirty="0"/>
           </a:p>
         </p:txBody>
       </p:sp>
       <p:sp>
         <p:nvSpPr>
-          <p:cNvPr id="45" name="Shape 43"/>
-          <p:cNvSpPr/>
-          <p:nvPr/>
-        </p:nvSpPr>
-        <p:spPr>
-          <a:xfrm>
-            <a:off x="5710400" y="2939558"/>
-            <a:ext cx="1396120" cy="514152"/>
+          <p:cNvPr id="62" name="Shape 60"/>
+          <p:cNvSpPr/>
+          <p:nvPr/>
+        </p:nvSpPr>
+        <p:spPr>
+          <a:xfrm>
+            <a:off x="6021084" y="3055108"/>
+            <a:ext cx="1027488" cy="222276"/>
           </a:xfrm>
           <a:prstGeom prst="line">
             <a:avLst/>
           </a:prstGeom>
           <a:noFill/>
-          <a:ln w="25400">
-            <a:solidFill>
-              <a:srgbClr val="E06666"/>
-            </a:solidFill>
-            <a:prstDash val="dash"/>
+          <a:ln w="41275">
+            <a:solidFill>
+              <a:srgbClr val="EE0000"/>
+            </a:solidFill>
+            <a:prstDash val="solid"/>
             <a:tailEnd type="triangle"/>
           </a:ln>
         </p:spPr>
       </p:sp>
       <p:sp>
         <p:nvSpPr>
-          <p:cNvPr id="46" name="Shape 44"/>
-          <p:cNvSpPr/>
-          <p:nvPr/>
-        </p:nvSpPr>
-        <p:spPr>
-          <a:xfrm flipV="1">
-            <a:off x="7106521" y="2905709"/>
-            <a:ext cx="348224" cy="548001"/>
-          </a:xfrm>
-          <a:prstGeom prst="line">
-            <a:avLst/>
-          </a:prstGeom>
-          <a:noFill/>
-          <a:ln w="15875">
-            <a:solidFill>
-              <a:srgbClr val="404040"/>
-            </a:solidFill>
-            <a:prstDash val="sysDot"/>
-            <a:tailEnd type="triangle"/>
-          </a:ln>
-        </p:spPr>
-      </p:sp>
-      <p:sp>
-        <p:nvSpPr>
-          <p:cNvPr id="47" name="Text 45"/>
+          <p:cNvPr id="63" name="Text 61"/>
           <p:cNvSpPr txBox="1"/>
           <p:nvPr/>
         </p:nvSpPr>
         <p:spPr>
           <a:xfrm>
-            <a:off x="7156813" y="3261686"/>
-            <a:ext cx="411480" cy="292608"/>
+            <a:off x="6934272" y="3396256"/>
+            <a:ext cx="411480" cy="310896"/>
           </a:xfrm>
           <a:prstGeom prst="rect">
             <a:avLst/>
@@ -6592,44 +7332,68 @@
               <a:buNone/>
             </a:pPr>
             <a:r>
-              <a:rPr lang="en-US" sz="1600" b="1" i="1" dirty="0">
-                <a:solidFill>
-                  <a:srgbClr val="000000"/>
-                </a:solidFill>
-                <a:latin typeface="Times New Roman" pitchFamily="34" charset="0"/>
-                <a:ea typeface="Times New Roman" pitchFamily="34" charset="-122"/>
-                <a:cs typeface="Times New Roman" pitchFamily="34" charset="-120"/>
-              </a:rPr>
-              <a:t>e</a:t>
+              <a:rPr lang="en-US" sz="1900" b="1" i="1" dirty="0">
+                <a:solidFill>
+                  <a:srgbClr val="000000"/>
+                </a:solidFill>
+                <a:latin typeface="Times New Roman" pitchFamily="34" charset="0"/>
+                <a:ea typeface="Times New Roman" pitchFamily="34" charset="-122"/>
+                <a:cs typeface="Times New Roman" pitchFamily="34" charset="-120"/>
+              </a:rPr>
+              <a:t>r</a:t>
             </a:r>
             <a:pPr algn="ctr" indent="0" marL="0">
               <a:buNone/>
             </a:pPr>
             <a:r>
-              <a:rPr lang="en-US" sz="1600" i="1" baseline="-40000" dirty="0">
-                <a:solidFill>
-                  <a:srgbClr val="000000"/>
-                </a:solidFill>
-                <a:latin typeface="Times New Roman" pitchFamily="34" charset="0"/>
-                <a:ea typeface="Times New Roman" pitchFamily="34" charset="-122"/>
-                <a:cs typeface="Times New Roman" pitchFamily="34" charset="-120"/>
-              </a:rPr>
-              <a:t>x</a:t>
-            </a:r>
-            <a:endParaRPr lang="en-US" sz="1600" dirty="0"/>
+              <a:rPr lang="en-US" sz="1900" i="1" baseline="-40000" dirty="0">
+                <a:solidFill>
+                  <a:srgbClr val="000000"/>
+                </a:solidFill>
+                <a:latin typeface="Times New Roman" pitchFamily="34" charset="0"/>
+                <a:ea typeface="Times New Roman" pitchFamily="34" charset="-122"/>
+                <a:cs typeface="Times New Roman" pitchFamily="34" charset="-120"/>
+              </a:rPr>
+              <a:t>u</a:t>
+            </a:r>
+            <a:endParaRPr lang="en-US" sz="1900" dirty="0"/>
           </a:p>
         </p:txBody>
       </p:sp>
       <p:sp>
         <p:nvSpPr>
-          <p:cNvPr id="48" name="Text 46"/>
+          <p:cNvPr id="64" name="Shape 62"/>
+          <p:cNvSpPr/>
+          <p:nvPr/>
+        </p:nvSpPr>
+        <p:spPr>
+          <a:xfrm flipV="1">
+            <a:off x="6021084" y="2007335"/>
+            <a:ext cx="71194" cy="1047773"/>
+          </a:xfrm>
+          <a:prstGeom prst="line">
+            <a:avLst/>
+          </a:prstGeom>
+          <a:noFill/>
+          <a:ln w="41275">
+            <a:solidFill>
+              <a:srgbClr val="00B800"/>
+            </a:solidFill>
+            <a:prstDash val="solid"/>
+            <a:tailEnd type="triangle"/>
+          </a:ln>
+        </p:spPr>
+      </p:sp>
+      <p:sp>
+        <p:nvSpPr>
+          <p:cNvPr id="65" name="Text 63"/>
           <p:cNvSpPr txBox="1"/>
           <p:nvPr/>
         </p:nvSpPr>
         <p:spPr>
           <a:xfrm>
-            <a:off x="7372073" y="3088269"/>
-            <a:ext cx="1188720" cy="274320"/>
+            <a:off x="5612218" y="1851887"/>
+            <a:ext cx="411480" cy="310896"/>
           </a:xfrm>
           <a:prstGeom prst="rect">
             <a:avLst/>
@@ -6645,114 +7409,44 @@
               <a:buNone/>
             </a:pPr>
             <a:r>
-              <a:rPr lang="en-US" sz="1300" dirty="0">
-                <a:solidFill>
-                  <a:srgbClr val="000000"/>
-                </a:solidFill>
-                <a:latin typeface="Times New Roman" pitchFamily="34" charset="0"/>
-                <a:ea typeface="Times New Roman" pitchFamily="34" charset="-122"/>
-                <a:cs typeface="Times New Roman" pitchFamily="34" charset="-120"/>
-              </a:rPr>
-              <a:t>−(</a:t>
+              <a:rPr lang="en-US" sz="1900" b="1" i="1" dirty="0">
+                <a:solidFill>
+                  <a:srgbClr val="000000"/>
+                </a:solidFill>
+                <a:latin typeface="Times New Roman" pitchFamily="34" charset="0"/>
+                <a:ea typeface="Times New Roman" pitchFamily="34" charset="-122"/>
+                <a:cs typeface="Times New Roman" pitchFamily="34" charset="-120"/>
+              </a:rPr>
+              <a:t>r</a:t>
             </a:r>
             <a:pPr algn="ctr" indent="0" marL="0">
               <a:buNone/>
             </a:pPr>
             <a:r>
-              <a:rPr lang="en-US" sz="1300" b="1" i="1" dirty="0">
-                <a:solidFill>
-                  <a:srgbClr val="000000"/>
-                </a:solidFill>
-                <a:latin typeface="Times New Roman" pitchFamily="34" charset="0"/>
-                <a:ea typeface="Times New Roman" pitchFamily="34" charset="-122"/>
-                <a:cs typeface="Times New Roman" pitchFamily="34" charset="-120"/>
-              </a:rPr>
-              <a:t>e</a:t>
-            </a:r>
-            <a:pPr algn="ctr" indent="0" marL="0">
-              <a:buNone/>
-            </a:pPr>
-            <a:r>
-              <a:rPr lang="en-US" sz="1300" i="1" baseline="-40000" dirty="0">
-                <a:solidFill>
-                  <a:srgbClr val="000000"/>
-                </a:solidFill>
-                <a:latin typeface="Times New Roman" pitchFamily="34" charset="0"/>
-                <a:ea typeface="Times New Roman" pitchFamily="34" charset="-122"/>
-                <a:cs typeface="Times New Roman" pitchFamily="34" charset="-120"/>
-              </a:rPr>
-              <a:t>x</a:t>
-            </a:r>
-            <a:pPr algn="ctr" indent="0" marL="0">
-              <a:buNone/>
-            </a:pPr>
-            <a:r>
-              <a:rPr lang="en-US" sz="1300" baseline="30000" dirty="0">
-                <a:solidFill>
-                  <a:srgbClr val="000000"/>
-                </a:solidFill>
-                <a:latin typeface="Times New Roman" pitchFamily="34" charset="0"/>
-                <a:ea typeface="Times New Roman" pitchFamily="34" charset="-122"/>
-                <a:cs typeface="Times New Roman" pitchFamily="34" charset="-120"/>
-              </a:rPr>
-              <a:t>T</a:t>
-            </a:r>
-            <a:pPr algn="ctr" indent="0" marL="0">
-              <a:buNone/>
-            </a:pPr>
-            <a:r>
-              <a:rPr lang="en-US" sz="1300" b="1" i="1" dirty="0">
-                <a:solidFill>
-                  <a:srgbClr val="000000"/>
-                </a:solidFill>
-                <a:latin typeface="Times New Roman" pitchFamily="34" charset="0"/>
-                <a:ea typeface="Times New Roman" pitchFamily="34" charset="-122"/>
-                <a:cs typeface="Times New Roman" pitchFamily="34" charset="-120"/>
-              </a:rPr>
-              <a:t>g</a:t>
-            </a:r>
-            <a:pPr algn="ctr" indent="0" marL="0">
-              <a:buNone/>
-            </a:pPr>
-            <a:r>
-              <a:rPr lang="en-US" sz="1300" dirty="0">
-                <a:solidFill>
-                  <a:srgbClr val="000000"/>
-                </a:solidFill>
-                <a:latin typeface="Times New Roman" pitchFamily="34" charset="0"/>
-                <a:ea typeface="Times New Roman" pitchFamily="34" charset="-122"/>
-                <a:cs typeface="Times New Roman" pitchFamily="34" charset="-120"/>
-              </a:rPr>
-              <a:t>)</a:t>
-            </a:r>
-            <a:pPr algn="ctr" indent="0" marL="0">
-              <a:buNone/>
-            </a:pPr>
-            <a:r>
-              <a:rPr lang="en-US" sz="1300" b="1" i="1" dirty="0">
-                <a:solidFill>
-                  <a:srgbClr val="000000"/>
-                </a:solidFill>
-                <a:latin typeface="Times New Roman" pitchFamily="34" charset="0"/>
-                <a:ea typeface="Times New Roman" pitchFamily="34" charset="-122"/>
-                <a:cs typeface="Times New Roman" pitchFamily="34" charset="-120"/>
-              </a:rPr>
-              <a:t>g</a:t>
-            </a:r>
-            <a:endParaRPr lang="en-US" sz="1300" dirty="0"/>
+              <a:rPr lang="en-US" sz="1900" i="1" baseline="-40000" dirty="0">
+                <a:solidFill>
+                  <a:srgbClr val="000000"/>
+                </a:solidFill>
+                <a:latin typeface="Times New Roman" pitchFamily="34" charset="0"/>
+                <a:ea typeface="Times New Roman" pitchFamily="34" charset="-122"/>
+                <a:cs typeface="Times New Roman" pitchFamily="34" charset="-120"/>
+              </a:rPr>
+              <a:t>v</a:t>
+            </a:r>
+            <a:endParaRPr lang="en-US" sz="1900" dirty="0"/>
           </a:p>
         </p:txBody>
       </p:sp>
       <p:sp>
         <p:nvSpPr>
-          <p:cNvPr id="49" name="Shape 47"/>
+          <p:cNvPr id="66" name="Shape 64"/>
           <p:cNvSpPr/>
           <p:nvPr/>
         </p:nvSpPr>
         <p:spPr>
           <a:xfrm flipV="1">
-            <a:off x="5710400" y="2912175"/>
-            <a:ext cx="1411137" cy="27383"/>
+            <a:off x="6021084" y="2876343"/>
+            <a:ext cx="742229" cy="178765"/>
           </a:xfrm>
           <a:prstGeom prst="line">
             <a:avLst/>
@@ -6760,7 +7454,7 @@
           <a:noFill/>
           <a:ln w="41275">
             <a:solidFill>
-              <a:srgbClr val="EE0000"/>
+              <a:srgbClr val="0000EE"/>
             </a:solidFill>
             <a:prstDash val="solid"/>
             <a:tailEnd type="triangle"/>
@@ -6769,13 +7463,13 @@
       </p:sp>
       <p:sp>
         <p:nvSpPr>
-          <p:cNvPr id="50" name="Text 48"/>
+          <p:cNvPr id="67" name="Text 65"/>
           <p:cNvSpPr txBox="1"/>
           <p:nvPr/>
         </p:nvSpPr>
         <p:spPr>
           <a:xfrm>
-            <a:off x="7025526" y="2500695"/>
+            <a:off x="6786172" y="2629455"/>
             <a:ext cx="411480" cy="310896"/>
           </a:xfrm>
           <a:prstGeom prst="rect">
@@ -6800,21 +7494,7 @@
                 <a:ea typeface="Times New Roman" pitchFamily="34" charset="-122"/>
                 <a:cs typeface="Times New Roman" pitchFamily="34" charset="-120"/>
               </a:rPr>
-              <a:t>r</a:t>
-            </a:r>
-            <a:pPr algn="ctr" indent="0" marL="0">
-              <a:buNone/>
-            </a:pPr>
-            <a:r>
-              <a:rPr lang="en-US" sz="1900" i="1" baseline="-40000" dirty="0">
-                <a:solidFill>
-                  <a:srgbClr val="000000"/>
-                </a:solidFill>
-                <a:latin typeface="Times New Roman" pitchFamily="34" charset="0"/>
-                <a:ea typeface="Times New Roman" pitchFamily="34" charset="-122"/>
-                <a:cs typeface="Times New Roman" pitchFamily="34" charset="-120"/>
-              </a:rPr>
-              <a:t>u</a:t>
+              <a:t>g</a:t>
             </a:r>
             <a:endParaRPr lang="en-US" sz="1900" dirty="0"/>
           </a:p>
@@ -6822,154 +7502,14 @@
       </p:sp>
       <p:sp>
         <p:nvSpPr>
-          <p:cNvPr id="51" name="Shape 49"/>
-          <p:cNvSpPr/>
-          <p:nvPr/>
-        </p:nvSpPr>
-        <p:spPr>
-          <a:xfrm flipH="1" flipV="1">
-            <a:off x="5379874" y="1762322"/>
-            <a:ext cx="330526" cy="1177235"/>
-          </a:xfrm>
-          <a:prstGeom prst="line">
-            <a:avLst/>
-          </a:prstGeom>
-          <a:noFill/>
-          <a:ln w="41275">
-            <a:solidFill>
-              <a:srgbClr val="00B800"/>
-            </a:solidFill>
-            <a:prstDash val="solid"/>
-            <a:tailEnd type="triangle"/>
-          </a:ln>
-        </p:spPr>
-      </p:sp>
-      <p:sp>
-        <p:nvSpPr>
-          <p:cNvPr id="52" name="Text 50"/>
-          <p:cNvSpPr txBox="1"/>
-          <p:nvPr/>
-        </p:nvSpPr>
-        <p:spPr>
-          <a:xfrm>
-            <a:off x="4899814" y="1606874"/>
-            <a:ext cx="411480" cy="310896"/>
-          </a:xfrm>
-          <a:prstGeom prst="rect">
-            <a:avLst/>
-          </a:prstGeom>
-          <a:noFill/>
-          <a:ln/>
-        </p:spPr>
-        <p:txBody>
-          <a:bodyPr wrap="square" lIns="0" tIns="0" rIns="0" bIns="0" rtlCol="0" anchor="ctr"/>
-          <a:lstStyle/>
-          <a:p>
-            <a:pPr algn="ctr" indent="0" marL="0">
-              <a:buNone/>
-            </a:pPr>
-            <a:r>
-              <a:rPr lang="en-US" sz="1900" b="1" i="1" dirty="0">
-                <a:solidFill>
-                  <a:srgbClr val="000000"/>
-                </a:solidFill>
-                <a:latin typeface="Times New Roman" pitchFamily="34" charset="0"/>
-                <a:ea typeface="Times New Roman" pitchFamily="34" charset="-122"/>
-                <a:cs typeface="Times New Roman" pitchFamily="34" charset="-120"/>
-              </a:rPr>
-              <a:t>r</a:t>
-            </a:r>
-            <a:pPr algn="ctr" indent="0" marL="0">
-              <a:buNone/>
-            </a:pPr>
-            <a:r>
-              <a:rPr lang="en-US" sz="1900" i="1" baseline="-40000" dirty="0">
-                <a:solidFill>
-                  <a:srgbClr val="000000"/>
-                </a:solidFill>
-                <a:latin typeface="Times New Roman" pitchFamily="34" charset="0"/>
-                <a:ea typeface="Times New Roman" pitchFamily="34" charset="-122"/>
-                <a:cs typeface="Times New Roman" pitchFamily="34" charset="-120"/>
-              </a:rPr>
-              <a:t>v</a:t>
-            </a:r>
-            <a:endParaRPr lang="en-US" sz="1900" dirty="0"/>
-          </a:p>
-        </p:txBody>
-      </p:sp>
-      <p:sp>
-        <p:nvSpPr>
-          <p:cNvPr id="53" name="Shape 51"/>
-          <p:cNvSpPr/>
-          <p:nvPr/>
-        </p:nvSpPr>
-        <p:spPr>
-          <a:xfrm flipV="1">
-            <a:off x="5710400" y="2064104"/>
-            <a:ext cx="556302" cy="875454"/>
-          </a:xfrm>
-          <a:prstGeom prst="line">
-            <a:avLst/>
-          </a:prstGeom>
-          <a:noFill/>
-          <a:ln w="41275">
-            <a:solidFill>
-              <a:srgbClr val="0000EE"/>
-            </a:solidFill>
-            <a:prstDash val="solid"/>
-            <a:tailEnd type="triangle"/>
-          </a:ln>
-        </p:spPr>
-      </p:sp>
-      <p:sp>
-        <p:nvSpPr>
-          <p:cNvPr id="54" name="Text 52"/>
-          <p:cNvSpPr txBox="1"/>
-          <p:nvPr/>
-        </p:nvSpPr>
-        <p:spPr>
-          <a:xfrm>
-            <a:off x="6243842" y="1771496"/>
-            <a:ext cx="411480" cy="310896"/>
-          </a:xfrm>
-          <a:prstGeom prst="rect">
-            <a:avLst/>
-          </a:prstGeom>
-          <a:noFill/>
-          <a:ln/>
-        </p:spPr>
-        <p:txBody>
-          <a:bodyPr wrap="square" lIns="0" tIns="0" rIns="0" bIns="0" rtlCol="0" anchor="ctr"/>
-          <a:lstStyle/>
-          <a:p>
-            <a:pPr algn="ctr" indent="0" marL="0">
-              <a:buNone/>
-            </a:pPr>
-            <a:r>
-              <a:rPr lang="en-US" sz="1900" b="1" i="1" dirty="0">
-                <a:solidFill>
-                  <a:srgbClr val="000000"/>
-                </a:solidFill>
-                <a:latin typeface="Times New Roman" pitchFamily="34" charset="0"/>
-                <a:ea typeface="Times New Roman" pitchFamily="34" charset="-122"/>
-                <a:cs typeface="Times New Roman" pitchFamily="34" charset="-120"/>
-              </a:rPr>
-              <a:t>g</a:t>
-            </a:r>
-            <a:endParaRPr lang="en-US" sz="1900" dirty="0"/>
-          </a:p>
-        </p:txBody>
-      </p:sp>
-      <p:sp>
-        <p:nvSpPr>
-          <p:cNvPr id="55" name="Shape 53"/>
-          <p:cNvSpPr/>
-          <p:nvPr/>
-        </p:nvSpPr>
-        <p:spPr>
-          <a:xfrm>
-            <a:off x="5658985" y="2752599"/>
-            <a:ext cx="248974" cy="186959"/>
+          <p:cNvPr id="68" name="Shape 66"/>
+          <p:cNvSpPr/>
+          <p:nvPr/>
+        </p:nvSpPr>
+        <p:spPr>
+          <a:xfrm>
+            <a:off x="6021084" y="2874321"/>
+            <a:ext cx="165737" cy="213863"/>
           </a:xfrm>
           <a:custGeom>
             <a:avLst/>
@@ -6978,18 +7518,18 @@
             <a:cxnLst/>
             <a:rect l="l" t="t" r="r" b="b"/>
             <a:pathLst>
-              <a:path w="248974" h="186959">
+              <a:path w="165737" h="213863">
                 <a:moveTo>
-                  <a:pt x="51415" y="186959"/>
+                  <a:pt x="0" y="180787"/>
                 </a:moveTo>
                 <a:lnTo>
-                  <a:pt x="248974" y="183125"/>
+                  <a:pt x="152896" y="213863"/>
                 </a:lnTo>
                 <a:lnTo>
-                  <a:pt x="197559" y="0"/>
+                  <a:pt x="165737" y="31726"/>
                 </a:lnTo>
                 <a:lnTo>
-                  <a:pt x="0" y="3834"/>
+                  <a:pt x="12284" y="0"/>
                 </a:lnTo>
                 <a:close/>
               </a:path>
@@ -7005,13 +7545,13 @@
       </p:sp>
       <p:sp>
         <p:nvSpPr>
-          <p:cNvPr id="56" name="Shape 54"/>
-          <p:cNvSpPr/>
-          <p:nvPr/>
-        </p:nvSpPr>
-        <p:spPr>
-          <a:xfrm>
-            <a:off x="5646392" y="2875550"/>
+          <p:cNvPr id="69" name="Shape 67"/>
+          <p:cNvSpPr/>
+          <p:nvPr/>
+        </p:nvSpPr>
+        <p:spPr>
+          <a:xfrm>
+            <a:off x="5957076" y="2991100"/>
             <a:ext cx="128016" cy="128016"/>
           </a:xfrm>
           <a:prstGeom prst="ellipse">
@@ -7030,13 +7570,13 @@
       </p:sp>
       <p:sp>
         <p:nvSpPr>
-          <p:cNvPr id="57" name="Text 55"/>
+          <p:cNvPr id="70" name="Text 68"/>
           <p:cNvSpPr txBox="1"/>
           <p:nvPr/>
         </p:nvSpPr>
         <p:spPr>
           <a:xfrm>
-            <a:off x="5756120" y="3058430"/>
+            <a:off x="5902212" y="3265420"/>
             <a:ext cx="274320" cy="274320"/>
           </a:xfrm>
           <a:prstGeom prst="rect">
@@ -7069,14 +7609,14 @@
       </p:sp>
       <p:sp>
         <p:nvSpPr>
-          <p:cNvPr id="58" name="Shape 56"/>
-          <p:cNvSpPr/>
-          <p:nvPr/>
-        </p:nvSpPr>
-        <p:spPr>
-          <a:xfrm>
-            <a:off x="8503920" y="1920240"/>
-            <a:ext cx="3429000" cy="2286000"/>
+          <p:cNvPr id="71" name="Shape 69"/>
+          <p:cNvSpPr/>
+          <p:nvPr/>
+        </p:nvSpPr>
+        <p:spPr>
+          <a:xfrm>
+            <a:off x="8503920" y="1417320"/>
+            <a:ext cx="3429000" cy="3291840"/>
           </a:xfrm>
           <a:prstGeom prst="rect">
             <a:avLst/>
@@ -7094,13 +7634,13 @@
       </p:sp>
       <p:sp>
         <p:nvSpPr>
-          <p:cNvPr id="59" name="Text 57"/>
+          <p:cNvPr id="72" name="Text 70"/>
           <p:cNvSpPr txBox="1"/>
           <p:nvPr/>
         </p:nvSpPr>
         <p:spPr>
           <a:xfrm>
-            <a:off x="8686800" y="2029968"/>
+            <a:off x="8686800" y="1527048"/>
             <a:ext cx="3063240" cy="329184"/>
           </a:xfrm>
           <a:prstGeom prst="rect">
@@ -7181,7 +7721,7 @@
                 <a:ea typeface="Malgun Gothic" pitchFamily="34" charset="-122"/>
                 <a:cs typeface="Malgun Gothic" pitchFamily="34" charset="-120"/>
               </a:rPr>
-              <a:t>공통</a:t>
+              <a:t>평면</a:t>
             </a:r>
             <a:pPr algn="l" indent="0" marL="0">
               <a:buNone/>
@@ -7209,7 +7749,7 @@
                 <a:ea typeface="Malgun Gothic" pitchFamily="34" charset="-122"/>
                 <a:cs typeface="Malgun Gothic" pitchFamily="34" charset="-120"/>
               </a:rPr>
-              <a:t>평면</a:t>
+              <a:t>기준축</a:t>
             </a:r>
             <a:pPr algn="l" indent="0" marL="0">
               <a:buNone/>
@@ -7223,7 +7763,7 @@
                 <a:ea typeface="Times New Roman" pitchFamily="34" charset="-122"/>
                 <a:cs typeface="Times New Roman" pitchFamily="34" charset="-120"/>
               </a:rPr>
-              <a:t> </a:t>
+              <a:t> = </a:t>
             </a:r>
             <a:pPr algn="l" indent="0" marL="0">
               <a:buNone/>
@@ -7237,7 +7777,7 @@
                 <a:ea typeface="Malgun Gothic" pitchFamily="34" charset="-122"/>
                 <a:cs typeface="Malgun Gothic" pitchFamily="34" charset="-120"/>
               </a:rPr>
-              <a:t>기준축</a:t>
+              <a:t>카메라</a:t>
             </a:r>
             <a:pPr algn="l" indent="0" marL="0">
               <a:buNone/>
@@ -7251,35 +7791,7 @@
                 <a:ea typeface="Times New Roman" pitchFamily="34" charset="-122"/>
                 <a:cs typeface="Times New Roman" pitchFamily="34" charset="-120"/>
               </a:rPr>
-              <a:t> (</a:t>
-            </a:r>
-            <a:pPr algn="l" indent="0" marL="0">
-              <a:buNone/>
-            </a:pPr>
-            <a:r>
-              <a:rPr lang="en-US" sz="1400" b="1" i="1" dirty="0">
-                <a:solidFill>
-                  <a:srgbClr val="000000"/>
-                </a:solidFill>
-                <a:latin typeface="Times New Roman" pitchFamily="34" charset="0"/>
-                <a:ea typeface="Times New Roman" pitchFamily="34" charset="-122"/>
-                <a:cs typeface="Times New Roman" pitchFamily="34" charset="-120"/>
-              </a:rPr>
-              <a:t>r</a:t>
-            </a:r>
-            <a:pPr algn="l" indent="0" marL="0">
-              <a:buNone/>
-            </a:pPr>
-            <a:r>
-              <a:rPr lang="en-US" sz="1400" b="1" i="1" baseline="-40000" dirty="0">
-                <a:solidFill>
-                  <a:srgbClr val="000000"/>
-                </a:solidFill>
-                <a:latin typeface="Times New Roman" pitchFamily="34" charset="0"/>
-                <a:ea typeface="Times New Roman" pitchFamily="34" charset="-122"/>
-                <a:cs typeface="Times New Roman" pitchFamily="34" charset="-120"/>
-              </a:rPr>
-              <a:t>u</a:t>
+              <a:t> </a:t>
             </a:r>
             <a:pPr algn="l" indent="0" marL="0">
               <a:buNone/>
@@ -7289,81 +7801,11 @@
                 <a:solidFill>
                   <a:srgbClr val="000000"/>
                 </a:solidFill>
-                <a:latin typeface="Times New Roman" pitchFamily="34" charset="0"/>
-                <a:ea typeface="Times New Roman" pitchFamily="34" charset="-122"/>
-                <a:cs typeface="Times New Roman" pitchFamily="34" charset="-120"/>
-              </a:rPr>
-              <a:t>, </a:t>
-            </a:r>
-            <a:pPr algn="l" indent="0" marL="0">
-              <a:buNone/>
-            </a:pPr>
-            <a:r>
-              <a:rPr lang="en-US" sz="1400" b="1" i="1" dirty="0">
-                <a:solidFill>
-                  <a:srgbClr val="000000"/>
-                </a:solidFill>
-                <a:latin typeface="Times New Roman" pitchFamily="34" charset="0"/>
-                <a:ea typeface="Times New Roman" pitchFamily="34" charset="-122"/>
-                <a:cs typeface="Times New Roman" pitchFamily="34" charset="-120"/>
-              </a:rPr>
-              <a:t>r</a:t>
-            </a:r>
-            <a:pPr algn="l" indent="0" marL="0">
-              <a:buNone/>
-            </a:pPr>
-            <a:r>
-              <a:rPr lang="en-US" sz="1400" b="1" i="1" baseline="-40000" dirty="0">
-                <a:solidFill>
-                  <a:srgbClr val="000000"/>
-                </a:solidFill>
-                <a:latin typeface="Times New Roman" pitchFamily="34" charset="0"/>
-                <a:ea typeface="Times New Roman" pitchFamily="34" charset="-122"/>
-                <a:cs typeface="Times New Roman" pitchFamily="34" charset="-120"/>
-              </a:rPr>
-              <a:t>v</a:t>
-            </a:r>
-            <a:pPr algn="l" indent="0" marL="0">
-              <a:buNone/>
-            </a:pPr>
-            <a:r>
-              <a:rPr lang="en-US" sz="1400" b="1" dirty="0">
-                <a:solidFill>
-                  <a:srgbClr val="000000"/>
-                </a:solidFill>
-                <a:latin typeface="Times New Roman" pitchFamily="34" charset="0"/>
-                <a:ea typeface="Times New Roman" pitchFamily="34" charset="-122"/>
-                <a:cs typeface="Times New Roman" pitchFamily="34" charset="-120"/>
-              </a:rPr>
-              <a:t>, </a:t>
-            </a:r>
-            <a:pPr algn="l" indent="0" marL="0">
-              <a:buNone/>
-            </a:pPr>
-            <a:r>
-              <a:rPr lang="en-US" sz="1400" b="1" i="1" dirty="0">
-                <a:solidFill>
-                  <a:srgbClr val="000000"/>
-                </a:solidFill>
-                <a:latin typeface="Times New Roman" pitchFamily="34" charset="0"/>
-                <a:ea typeface="Times New Roman" pitchFamily="34" charset="-122"/>
-                <a:cs typeface="Times New Roman" pitchFamily="34" charset="-120"/>
-              </a:rPr>
-              <a:t>g</a:t>
-            </a:r>
-            <a:pPr algn="l" indent="0" marL="0">
-              <a:buNone/>
-            </a:pPr>
-            <a:r>
-              <a:rPr lang="en-US" sz="1400" b="1" dirty="0">
-                <a:solidFill>
-                  <a:srgbClr val="000000"/>
-                </a:solidFill>
-                <a:latin typeface="Times New Roman" pitchFamily="34" charset="0"/>
-                <a:ea typeface="Times New Roman" pitchFamily="34" charset="-122"/>
-                <a:cs typeface="Times New Roman" pitchFamily="34" charset="-120"/>
-              </a:rPr>
-              <a:t>)</a:t>
+                <a:latin typeface="Malgun Gothic" pitchFamily="34" charset="0"/>
+                <a:ea typeface="Malgun Gothic" pitchFamily="34" charset="-122"/>
+                <a:cs typeface="Malgun Gothic" pitchFamily="34" charset="-120"/>
+              </a:rPr>
+              <a:t>축</a:t>
             </a:r>
             <a:endParaRPr lang="en-US" sz="1400" dirty="0"/>
           </a:p>
@@ -7371,14 +7813,14 @@
       </p:sp>
       <p:sp>
         <p:nvSpPr>
-          <p:cNvPr id="60" name="Text 58"/>
+          <p:cNvPr id="73" name="Text 71"/>
           <p:cNvSpPr txBox="1"/>
           <p:nvPr/>
         </p:nvSpPr>
         <p:spPr>
           <a:xfrm>
-            <a:off x="8686800" y="2423160"/>
-            <a:ext cx="3063240" cy="1691640"/>
+            <a:off x="8686800" y="1920240"/>
+            <a:ext cx="3063240" cy="2697480"/>
           </a:xfrm>
           <a:prstGeom prst="rect">
             <a:avLst/>
@@ -7836,7 +8278,24 @@
                 <a:ea typeface="Times New Roman" pitchFamily="34" charset="-122"/>
                 <a:cs typeface="Times New Roman" pitchFamily="34" charset="-120"/>
               </a:rPr>
-              <a:t>c</a:t>
+              <a:t>R</a:t>
+            </a:r>
+            <a:pPr algn="l" indent="0" marL="0">
+              <a:spcAft>
+                <a:spcPts val="500"/>
+              </a:spcAft>
+              <a:buNone/>
+            </a:pPr>
+            <a:r>
+              <a:rPr lang="en-US" sz="1500" i="1" baseline="-40000" dirty="0">
+                <a:solidFill>
+                  <a:srgbClr val="000000"/>
+                </a:solidFill>
+                <a:latin typeface="Times New Roman" pitchFamily="34" charset="0"/>
+                <a:ea typeface="Times New Roman" pitchFamily="34" charset="-122"/>
+                <a:cs typeface="Times New Roman" pitchFamily="34" charset="-120"/>
+              </a:rPr>
+              <a:t>p</a:t>
             </a:r>
             <a:pPr algn="l" indent="0" marL="0">
               <a:spcAft>
@@ -7853,24 +8312,41 @@
                 <a:ea typeface="Times New Roman" pitchFamily="34" charset="-122"/>
                 <a:cs typeface="Times New Roman" pitchFamily="34" charset="-120"/>
               </a:rPr>
-              <a:t> = (1/</a:t>
-            </a:r>
-            <a:pPr algn="l" indent="0" marL="0">
-              <a:spcAft>
-                <a:spcPts val="500"/>
-              </a:spcAft>
-              <a:buNone/>
-            </a:pPr>
-            <a:r>
-              <a:rPr lang="en-US" sz="1500" i="1" dirty="0">
-                <a:solidFill>
-                  <a:srgbClr val="000000"/>
-                </a:solidFill>
-                <a:latin typeface="Times New Roman" pitchFamily="34" charset="0"/>
-                <a:ea typeface="Times New Roman" pitchFamily="34" charset="-122"/>
-                <a:cs typeface="Times New Roman" pitchFamily="34" charset="-120"/>
-              </a:rPr>
-              <a:t>N</a:t>
+              <a:t> = [ </a:t>
+            </a:r>
+            <a:pPr algn="l" indent="0" marL="0">
+              <a:spcAft>
+                <a:spcPts val="500"/>
+              </a:spcAft>
+              <a:buNone/>
+            </a:pPr>
+            <a:r>
+              <a:rPr lang="en-US" sz="1500" b="1" i="1" dirty="0">
+                <a:solidFill>
+                  <a:srgbClr val="000000"/>
+                </a:solidFill>
+                <a:latin typeface="Times New Roman" pitchFamily="34" charset="0"/>
+                <a:ea typeface="Times New Roman" pitchFamily="34" charset="-122"/>
+                <a:cs typeface="Times New Roman" pitchFamily="34" charset="-120"/>
+              </a:rPr>
+              <a:t>r</a:t>
+            </a:r>
+            <a:pPr algn="l" indent="0" marL="0">
+              <a:spcAft>
+                <a:spcPts val="500"/>
+              </a:spcAft>
+              <a:buNone/>
+            </a:pPr>
+            <a:r>
+              <a:rPr lang="en-US" sz="1500" i="1" baseline="-40000" dirty="0">
+                <a:solidFill>
+                  <a:srgbClr val="000000"/>
+                </a:solidFill>
+                <a:latin typeface="Times New Roman" pitchFamily="34" charset="0"/>
+                <a:ea typeface="Times New Roman" pitchFamily="34" charset="-122"/>
+                <a:cs typeface="Times New Roman" pitchFamily="34" charset="-120"/>
+              </a:rPr>
+              <a:t>u</a:t>
             </a:r>
             <a:pPr algn="l" indent="0" marL="0">
               <a:spcAft>
@@ -7887,7 +8363,24 @@
                 <a:ea typeface="Times New Roman" pitchFamily="34" charset="-122"/>
                 <a:cs typeface="Times New Roman" pitchFamily="34" charset="-120"/>
               </a:rPr>
-              <a:t>) Σ</a:t>
+              <a:t>  </a:t>
+            </a:r>
+            <a:pPr algn="l" indent="0" marL="0">
+              <a:spcAft>
+                <a:spcPts val="500"/>
+              </a:spcAft>
+              <a:buNone/>
+            </a:pPr>
+            <a:r>
+              <a:rPr lang="en-US" sz="1500" b="1" i="1" dirty="0">
+                <a:solidFill>
+                  <a:srgbClr val="000000"/>
+                </a:solidFill>
+                <a:latin typeface="Times New Roman" pitchFamily="34" charset="0"/>
+                <a:ea typeface="Times New Roman" pitchFamily="34" charset="-122"/>
+                <a:cs typeface="Times New Roman" pitchFamily="34" charset="-120"/>
+              </a:rPr>
+              <a:t>r</a:t>
             </a:r>
             <a:pPr algn="l" indent="0" marL="0">
               <a:spcAft>
@@ -7904,7 +8397,7 @@
                 <a:ea typeface="Times New Roman" pitchFamily="34" charset="-122"/>
                 <a:cs typeface="Times New Roman" pitchFamily="34" charset="-120"/>
               </a:rPr>
-              <a:t>i</a:t>
+              <a:t>v</a:t>
             </a:r>
             <a:pPr algn="l" indent="0" marL="0">
               <a:spcAft>
@@ -7921,24 +8414,24 @@
                 <a:ea typeface="Times New Roman" pitchFamily="34" charset="-122"/>
                 <a:cs typeface="Times New Roman" pitchFamily="34" charset="-120"/>
               </a:rPr>
-              <a:t> Σ</a:t>
-            </a:r>
-            <a:pPr algn="l" indent="0" marL="0">
-              <a:spcAft>
-                <a:spcPts val="500"/>
-              </a:spcAft>
-              <a:buNone/>
-            </a:pPr>
-            <a:r>
-              <a:rPr lang="en-US" sz="1500" i="1" baseline="-40000" dirty="0">
-                <a:solidFill>
-                  <a:srgbClr val="000000"/>
-                </a:solidFill>
-                <a:latin typeface="Times New Roman" pitchFamily="34" charset="0"/>
-                <a:ea typeface="Times New Roman" pitchFamily="34" charset="-122"/>
-                <a:cs typeface="Times New Roman" pitchFamily="34" charset="-120"/>
-              </a:rPr>
-              <a:t>k</a:t>
+              <a:t>  </a:t>
+            </a:r>
+            <a:pPr algn="l" indent="0" marL="0">
+              <a:spcAft>
+                <a:spcPts val="500"/>
+              </a:spcAft>
+              <a:buNone/>
+            </a:pPr>
+            <a:r>
+              <a:rPr lang="en-US" sz="1500" b="1" i="1" dirty="0">
+                <a:solidFill>
+                  <a:srgbClr val="000000"/>
+                </a:solidFill>
+                <a:latin typeface="Times New Roman" pitchFamily="34" charset="0"/>
+                <a:ea typeface="Times New Roman" pitchFamily="34" charset="-122"/>
+                <a:cs typeface="Times New Roman" pitchFamily="34" charset="-120"/>
+              </a:rPr>
+              <a:t>g</a:t>
             </a:r>
             <a:pPr algn="l" indent="0" marL="0">
               <a:spcAft>
@@ -7955,75 +8448,7 @@
                 <a:ea typeface="Times New Roman" pitchFamily="34" charset="-122"/>
                 <a:cs typeface="Times New Roman" pitchFamily="34" charset="-120"/>
               </a:rPr>
-              <a:t> </a:t>
-            </a:r>
-            <a:pPr algn="l" indent="0" marL="0">
-              <a:spcAft>
-                <a:spcPts val="500"/>
-              </a:spcAft>
-              <a:buNone/>
-            </a:pPr>
-            <a:r>
-              <a:rPr lang="en-US" sz="1500" b="1" i="1" dirty="0">
-                <a:solidFill>
-                  <a:srgbClr val="000000"/>
-                </a:solidFill>
-                <a:latin typeface="Times New Roman" pitchFamily="34" charset="0"/>
-                <a:ea typeface="Times New Roman" pitchFamily="34" charset="-122"/>
-                <a:cs typeface="Times New Roman" pitchFamily="34" charset="-120"/>
-              </a:rPr>
-              <a:t>p</a:t>
-            </a:r>
-            <a:pPr algn="l" indent="0" marL="0">
-              <a:spcAft>
-                <a:spcPts val="500"/>
-              </a:spcAft>
-              <a:buNone/>
-            </a:pPr>
-            <a:r>
-              <a:rPr lang="en-US" sz="1500" i="1" baseline="-40000" dirty="0">
-                <a:solidFill>
-                  <a:srgbClr val="000000"/>
-                </a:solidFill>
-                <a:latin typeface="Times New Roman" pitchFamily="34" charset="0"/>
-                <a:ea typeface="Times New Roman" pitchFamily="34" charset="-122"/>
-                <a:cs typeface="Times New Roman" pitchFamily="34" charset="-120"/>
-              </a:rPr>
-              <a:t>i</a:t>
-            </a:r>
-            <a:pPr algn="l" indent="0" marL="0">
-              <a:spcAft>
-                <a:spcPts val="500"/>
-              </a:spcAft>
-              <a:buNone/>
-            </a:pPr>
-            <a:r>
-              <a:rPr lang="en-US" sz="1500" baseline="-40000" dirty="0">
-                <a:solidFill>
-                  <a:srgbClr val="000000"/>
-                </a:solidFill>
-                <a:latin typeface="Times New Roman" pitchFamily="34" charset="0"/>
-                <a:ea typeface="Times New Roman" pitchFamily="34" charset="-122"/>
-                <a:cs typeface="Times New Roman" pitchFamily="34" charset="-120"/>
-              </a:rPr>
-              <a:t>,</a:t>
-            </a:r>
-            <a:pPr algn="l" indent="0" marL="0">
-              <a:spcAft>
-                <a:spcPts val="500"/>
-              </a:spcAft>
-              <a:buNone/>
-            </a:pPr>
-            <a:r>
-              <a:rPr lang="en-US" sz="1500" i="1" baseline="-40000" dirty="0">
-                <a:solidFill>
-                  <a:srgbClr val="000000"/>
-                </a:solidFill>
-                <a:latin typeface="Times New Roman" pitchFamily="34" charset="0"/>
-                <a:ea typeface="Times New Roman" pitchFamily="34" charset="-122"/>
-                <a:cs typeface="Times New Roman" pitchFamily="34" charset="-120"/>
-              </a:rPr>
-              <a:t>k</a:t>
+              <a:t> ]</a:t>
             </a:r>
             <a:pPr algn="l" indent="0" marL="0">
               <a:spcAft>
@@ -8040,7 +8465,7 @@
                 <a:ea typeface="Times New Roman" pitchFamily="34" charset="-122"/>
                 <a:cs typeface="Times New Roman" pitchFamily="34" charset="-120"/>
               </a:rPr>
-              <a:t>cam</a:t>
+              <a:t>T</a:t>
             </a:r>
             <a:endParaRPr lang="en-US" sz="1400" dirty="0"/>
           </a:p>
@@ -8052,6 +8477,193 @@
               <a:buNone/>
             </a:pPr>
             <a:r>
+              <a:rPr lang="en-US" sz="1500" b="1" i="1" dirty="0">
+                <a:solidFill>
+                  <a:srgbClr val="000000"/>
+                </a:solidFill>
+                <a:latin typeface="Times New Roman" pitchFamily="34" charset="0"/>
+                <a:ea typeface="Times New Roman" pitchFamily="34" charset="-122"/>
+                <a:cs typeface="Times New Roman" pitchFamily="34" charset="-120"/>
+              </a:rPr>
+              <a:t>R</a:t>
+            </a:r>
+            <a:pPr algn="l" indent="0" marL="0">
+              <a:spcAft>
+                <a:spcPts val="500"/>
+              </a:spcAft>
+              <a:buNone/>
+            </a:pPr>
+            <a:r>
+              <a:rPr lang="en-US" sz="1500" i="1" baseline="-40000" dirty="0">
+                <a:solidFill>
+                  <a:srgbClr val="000000"/>
+                </a:solidFill>
+                <a:latin typeface="Times New Roman" pitchFamily="34" charset="0"/>
+                <a:ea typeface="Times New Roman" pitchFamily="34" charset="-122"/>
+                <a:cs typeface="Times New Roman" pitchFamily="34" charset="-120"/>
+              </a:rPr>
+              <a:t>p</a:t>
+            </a:r>
+            <a:pPr algn="l" indent="0" marL="0">
+              <a:spcAft>
+                <a:spcPts val="500"/>
+              </a:spcAft>
+              <a:buNone/>
+            </a:pPr>
+            <a:r>
+              <a:rPr lang="en-US" sz="1500" dirty="0">
+                <a:solidFill>
+                  <a:srgbClr val="000000"/>
+                </a:solidFill>
+                <a:latin typeface="Times New Roman" pitchFamily="34" charset="0"/>
+                <a:ea typeface="Times New Roman" pitchFamily="34" charset="-122"/>
+                <a:cs typeface="Times New Roman" pitchFamily="34" charset="-120"/>
+              </a:rPr>
+              <a:t>(</a:t>
+            </a:r>
+            <a:pPr algn="l" indent="0" marL="0">
+              <a:spcAft>
+                <a:spcPts val="500"/>
+              </a:spcAft>
+              <a:buNone/>
+            </a:pPr>
+            <a:r>
+              <a:rPr lang="en-US" sz="1500" b="1" i="1" dirty="0">
+                <a:solidFill>
+                  <a:srgbClr val="000000"/>
+                </a:solidFill>
+                <a:latin typeface="Times New Roman" pitchFamily="34" charset="0"/>
+                <a:ea typeface="Times New Roman" pitchFamily="34" charset="-122"/>
+                <a:cs typeface="Times New Roman" pitchFamily="34" charset="-120"/>
+              </a:rPr>
+              <a:t>p</a:t>
+            </a:r>
+            <a:pPr algn="l" indent="0" marL="0">
+              <a:spcAft>
+                <a:spcPts val="500"/>
+              </a:spcAft>
+              <a:buNone/>
+            </a:pPr>
+            <a:r>
+              <a:rPr lang="en-US" sz="1500" i="1" baseline="-40000" dirty="0">
+                <a:solidFill>
+                  <a:srgbClr val="000000"/>
+                </a:solidFill>
+                <a:latin typeface="Times New Roman" pitchFamily="34" charset="0"/>
+                <a:ea typeface="Times New Roman" pitchFamily="34" charset="-122"/>
+                <a:cs typeface="Times New Roman" pitchFamily="34" charset="-120"/>
+              </a:rPr>
+              <a:t>i</a:t>
+            </a:r>
+            <a:pPr algn="l" indent="0" marL="0">
+              <a:spcAft>
+                <a:spcPts val="500"/>
+              </a:spcAft>
+              <a:buNone/>
+            </a:pPr>
+            <a:r>
+              <a:rPr lang="en-US" sz="1500" baseline="-40000" dirty="0">
+                <a:solidFill>
+                  <a:srgbClr val="000000"/>
+                </a:solidFill>
+                <a:latin typeface="Times New Roman" pitchFamily="34" charset="0"/>
+                <a:ea typeface="Times New Roman" pitchFamily="34" charset="-122"/>
+                <a:cs typeface="Times New Roman" pitchFamily="34" charset="-120"/>
+              </a:rPr>
+              <a:t>,</a:t>
+            </a:r>
+            <a:pPr algn="l" indent="0" marL="0">
+              <a:spcAft>
+                <a:spcPts val="500"/>
+              </a:spcAft>
+              <a:buNone/>
+            </a:pPr>
+            <a:r>
+              <a:rPr lang="en-US" sz="1500" i="1" baseline="-40000" dirty="0">
+                <a:solidFill>
+                  <a:srgbClr val="000000"/>
+                </a:solidFill>
+                <a:latin typeface="Times New Roman" pitchFamily="34" charset="0"/>
+                <a:ea typeface="Times New Roman" pitchFamily="34" charset="-122"/>
+                <a:cs typeface="Times New Roman" pitchFamily="34" charset="-120"/>
+              </a:rPr>
+              <a:t>k</a:t>
+            </a:r>
+            <a:pPr algn="l" indent="0" marL="0">
+              <a:spcAft>
+                <a:spcPts val="500"/>
+              </a:spcAft>
+              <a:buNone/>
+            </a:pPr>
+            <a:r>
+              <a:rPr lang="en-US" sz="1500" baseline="30000" dirty="0">
+                <a:solidFill>
+                  <a:srgbClr val="000000"/>
+                </a:solidFill>
+                <a:latin typeface="Times New Roman" pitchFamily="34" charset="0"/>
+                <a:ea typeface="Times New Roman" pitchFamily="34" charset="-122"/>
+                <a:cs typeface="Times New Roman" pitchFamily="34" charset="-120"/>
+              </a:rPr>
+              <a:t>cam</a:t>
+            </a:r>
+            <a:pPr algn="l" indent="0" marL="0">
+              <a:spcAft>
+                <a:spcPts val="500"/>
+              </a:spcAft>
+              <a:buNone/>
+            </a:pPr>
+            <a:r>
+              <a:rPr lang="en-US" sz="1500" dirty="0">
+                <a:solidFill>
+                  <a:srgbClr val="000000"/>
+                </a:solidFill>
+                <a:latin typeface="Times New Roman" pitchFamily="34" charset="0"/>
+                <a:ea typeface="Times New Roman" pitchFamily="34" charset="-122"/>
+                <a:cs typeface="Times New Roman" pitchFamily="34" charset="-120"/>
+              </a:rPr>
+              <a:t> − </a:t>
+            </a:r>
+            <a:pPr algn="l" indent="0" marL="0">
+              <a:spcAft>
+                <a:spcPts val="500"/>
+              </a:spcAft>
+              <a:buNone/>
+            </a:pPr>
+            <a:r>
+              <a:rPr lang="en-US" sz="1500" b="1" i="1" dirty="0">
+                <a:solidFill>
+                  <a:srgbClr val="000000"/>
+                </a:solidFill>
+                <a:latin typeface="Times New Roman" pitchFamily="34" charset="0"/>
+                <a:ea typeface="Times New Roman" pitchFamily="34" charset="-122"/>
+                <a:cs typeface="Times New Roman" pitchFamily="34" charset="-120"/>
+              </a:rPr>
+              <a:t>c</a:t>
+            </a:r>
+            <a:pPr algn="l" indent="0" marL="0">
+              <a:spcAft>
+                <a:spcPts val="500"/>
+              </a:spcAft>
+              <a:buNone/>
+            </a:pPr>
+            <a:r>
+              <a:rPr lang="en-US" sz="1500" dirty="0">
+                <a:solidFill>
+                  <a:srgbClr val="000000"/>
+                </a:solidFill>
+                <a:latin typeface="Times New Roman" pitchFamily="34" charset="0"/>
+                <a:ea typeface="Times New Roman" pitchFamily="34" charset="-122"/>
+                <a:cs typeface="Times New Roman" pitchFamily="34" charset="-120"/>
+              </a:rPr>
+              <a:t>) = (</a:t>
+            </a:r>
+            <a:pPr algn="l" indent="0" marL="0">
+              <a:spcAft>
+                <a:spcPts val="500"/>
+              </a:spcAft>
+              <a:buNone/>
+            </a:pPr>
+            <a:r>
               <a:rPr lang="en-US" sz="1500" i="1" dirty="0">
                 <a:solidFill>
                   <a:srgbClr val="000000"/>
@@ -8128,24 +8740,24 @@
                 <a:ea typeface="Times New Roman" pitchFamily="34" charset="-122"/>
                 <a:cs typeface="Times New Roman" pitchFamily="34" charset="-120"/>
               </a:rPr>
-              <a:t> = (</a:t>
-            </a:r>
-            <a:pPr algn="l" indent="0" marL="0">
-              <a:spcAft>
-                <a:spcPts val="500"/>
-              </a:spcAft>
-              <a:buNone/>
-            </a:pPr>
-            <a:r>
-              <a:rPr lang="en-US" sz="1500" b="1" i="1" dirty="0">
-                <a:solidFill>
-                  <a:srgbClr val="000000"/>
-                </a:solidFill>
-                <a:latin typeface="Times New Roman" pitchFamily="34" charset="0"/>
-                <a:ea typeface="Times New Roman" pitchFamily="34" charset="-122"/>
-                <a:cs typeface="Times New Roman" pitchFamily="34" charset="-120"/>
-              </a:rPr>
-              <a:t>p</a:t>
+              <a:t>, </a:t>
+            </a:r>
+            <a:pPr algn="l" indent="0" marL="0">
+              <a:spcAft>
+                <a:spcPts val="500"/>
+              </a:spcAft>
+              <a:buNone/>
+            </a:pPr>
+            <a:r>
+              <a:rPr lang="en-US" sz="1500" i="1" dirty="0">
+                <a:solidFill>
+                  <a:srgbClr val="000000"/>
+                </a:solidFill>
+                <a:latin typeface="Times New Roman" pitchFamily="34" charset="0"/>
+                <a:ea typeface="Times New Roman" pitchFamily="34" charset="-122"/>
+                <a:cs typeface="Times New Roman" pitchFamily="34" charset="-120"/>
+              </a:rPr>
+              <a:t>v</a:t>
             </a:r>
             <a:pPr algn="l" indent="0" marL="0">
               <a:spcAft>
@@ -8205,6 +8817,108 @@
               <a:buNone/>
             </a:pPr>
             <a:r>
+              <a:rPr lang="en-US" sz="1500" dirty="0">
+                <a:solidFill>
+                  <a:srgbClr val="000000"/>
+                </a:solidFill>
+                <a:latin typeface="Times New Roman" pitchFamily="34" charset="0"/>
+                <a:ea typeface="Times New Roman" pitchFamily="34" charset="-122"/>
+                <a:cs typeface="Times New Roman" pitchFamily="34" charset="-120"/>
+              </a:rPr>
+              <a:t>, </a:t>
+            </a:r>
+            <a:pPr algn="l" indent="0" marL="0">
+              <a:spcAft>
+                <a:spcPts val="500"/>
+              </a:spcAft>
+              <a:buNone/>
+            </a:pPr>
+            <a:r>
+              <a:rPr lang="en-US" sz="1500" i="1" dirty="0">
+                <a:solidFill>
+                  <a:srgbClr val="000000"/>
+                </a:solidFill>
+                <a:latin typeface="Times New Roman" pitchFamily="34" charset="0"/>
+                <a:ea typeface="Times New Roman" pitchFamily="34" charset="-122"/>
+                <a:cs typeface="Times New Roman" pitchFamily="34" charset="-120"/>
+              </a:rPr>
+              <a:t>w</a:t>
+            </a:r>
+            <a:pPr algn="l" indent="0" marL="0">
+              <a:spcAft>
+                <a:spcPts val="500"/>
+              </a:spcAft>
+              <a:buNone/>
+            </a:pPr>
+            <a:r>
+              <a:rPr lang="en-US" sz="1500" i="1" baseline="-40000" dirty="0">
+                <a:solidFill>
+                  <a:srgbClr val="000000"/>
+                </a:solidFill>
+                <a:latin typeface="Times New Roman" pitchFamily="34" charset="0"/>
+                <a:ea typeface="Times New Roman" pitchFamily="34" charset="-122"/>
+                <a:cs typeface="Times New Roman" pitchFamily="34" charset="-120"/>
+              </a:rPr>
+              <a:t>i</a:t>
+            </a:r>
+            <a:pPr algn="l" indent="0" marL="0">
+              <a:spcAft>
+                <a:spcPts val="500"/>
+              </a:spcAft>
+              <a:buNone/>
+            </a:pPr>
+            <a:r>
+              <a:rPr lang="en-US" sz="1500" baseline="-40000" dirty="0">
+                <a:solidFill>
+                  <a:srgbClr val="000000"/>
+                </a:solidFill>
+                <a:latin typeface="Times New Roman" pitchFamily="34" charset="0"/>
+                <a:ea typeface="Times New Roman" pitchFamily="34" charset="-122"/>
+                <a:cs typeface="Times New Roman" pitchFamily="34" charset="-120"/>
+              </a:rPr>
+              <a:t>,</a:t>
+            </a:r>
+            <a:pPr algn="l" indent="0" marL="0">
+              <a:spcAft>
+                <a:spcPts val="500"/>
+              </a:spcAft>
+              <a:buNone/>
+            </a:pPr>
+            <a:r>
+              <a:rPr lang="en-US" sz="1500" i="1" baseline="-40000" dirty="0">
+                <a:solidFill>
+                  <a:srgbClr val="000000"/>
+                </a:solidFill>
+                <a:latin typeface="Times New Roman" pitchFamily="34" charset="0"/>
+                <a:ea typeface="Times New Roman" pitchFamily="34" charset="-122"/>
+                <a:cs typeface="Times New Roman" pitchFamily="34" charset="-120"/>
+              </a:rPr>
+              <a:t>k</a:t>
+            </a:r>
+            <a:pPr algn="l" indent="0" marL="0">
+              <a:spcAft>
+                <a:spcPts val="500"/>
+              </a:spcAft>
+              <a:buNone/>
+            </a:pPr>
+            <a:r>
+              <a:rPr lang="en-US" sz="1500" dirty="0">
+                <a:solidFill>
+                  <a:srgbClr val="000000"/>
+                </a:solidFill>
+                <a:latin typeface="Times New Roman" pitchFamily="34" charset="0"/>
+                <a:ea typeface="Times New Roman" pitchFamily="34" charset="-122"/>
+                <a:cs typeface="Times New Roman" pitchFamily="34" charset="-120"/>
+              </a:rPr>
+              <a:t>)</a:t>
+            </a:r>
+            <a:pPr algn="l" indent="0" marL="0">
+              <a:spcAft>
+                <a:spcPts val="500"/>
+              </a:spcAft>
+              <a:buNone/>
+            </a:pPr>
+            <a:r>
               <a:rPr lang="en-US" sz="1500" baseline="30000" dirty="0">
                 <a:solidFill>
                   <a:srgbClr val="000000"/>
@@ -8213,126 +8927,7 @@
                 <a:ea typeface="Times New Roman" pitchFamily="34" charset="-122"/>
                 <a:cs typeface="Times New Roman" pitchFamily="34" charset="-120"/>
               </a:rPr>
-              <a:t>cam</a:t>
-            </a:r>
-            <a:pPr algn="l" indent="0" marL="0">
-              <a:spcAft>
-                <a:spcPts val="500"/>
-              </a:spcAft>
-              <a:buNone/>
-            </a:pPr>
-            <a:r>
-              <a:rPr lang="en-US" sz="1500" dirty="0">
-                <a:solidFill>
-                  <a:srgbClr val="000000"/>
-                </a:solidFill>
-                <a:latin typeface="Times New Roman" pitchFamily="34" charset="0"/>
-                <a:ea typeface="Times New Roman" pitchFamily="34" charset="-122"/>
-                <a:cs typeface="Times New Roman" pitchFamily="34" charset="-120"/>
-              </a:rPr>
-              <a:t> − </a:t>
-            </a:r>
-            <a:pPr algn="l" indent="0" marL="0">
-              <a:spcAft>
-                <a:spcPts val="500"/>
-              </a:spcAft>
-              <a:buNone/>
-            </a:pPr>
-            <a:r>
-              <a:rPr lang="en-US" sz="1500" b="1" i="1" dirty="0">
-                <a:solidFill>
-                  <a:srgbClr val="000000"/>
-                </a:solidFill>
-                <a:latin typeface="Times New Roman" pitchFamily="34" charset="0"/>
-                <a:ea typeface="Times New Roman" pitchFamily="34" charset="-122"/>
-                <a:cs typeface="Times New Roman" pitchFamily="34" charset="-120"/>
-              </a:rPr>
-              <a:t>c</a:t>
-            </a:r>
-            <a:pPr algn="l" indent="0" marL="0">
-              <a:spcAft>
-                <a:spcPts val="500"/>
-              </a:spcAft>
-              <a:buNone/>
-            </a:pPr>
-            <a:r>
-              <a:rPr lang="en-US" sz="1500" dirty="0">
-                <a:solidFill>
-                  <a:srgbClr val="000000"/>
-                </a:solidFill>
-                <a:latin typeface="Times New Roman" pitchFamily="34" charset="0"/>
-                <a:ea typeface="Times New Roman" pitchFamily="34" charset="-122"/>
-                <a:cs typeface="Times New Roman" pitchFamily="34" charset="-120"/>
-              </a:rPr>
-              <a:t>)</a:t>
-            </a:r>
-            <a:pPr algn="l" indent="0" marL="0">
-              <a:spcAft>
-                <a:spcPts val="500"/>
-              </a:spcAft>
-              <a:buNone/>
-            </a:pPr>
-            <a:r>
-              <a:rPr lang="en-US" sz="1500" baseline="30000" dirty="0">
-                <a:solidFill>
-                  <a:srgbClr val="000000"/>
-                </a:solidFill>
-                <a:latin typeface="Times New Roman" pitchFamily="34" charset="0"/>
-                <a:ea typeface="Times New Roman" pitchFamily="34" charset="-122"/>
-                <a:cs typeface="Times New Roman" pitchFamily="34" charset="-120"/>
-              </a:rPr>
               <a:t>T</a:t>
-            </a:r>
-            <a:pPr algn="l" indent="0" marL="0">
-              <a:spcAft>
-                <a:spcPts val="500"/>
-              </a:spcAft>
-              <a:buNone/>
-            </a:pPr>
-            <a:r>
-              <a:rPr lang="en-US" sz="1500" dirty="0">
-                <a:solidFill>
-                  <a:srgbClr val="000000"/>
-                </a:solidFill>
-                <a:latin typeface="Times New Roman" pitchFamily="34" charset="0"/>
-                <a:ea typeface="Times New Roman" pitchFamily="34" charset="-122"/>
-                <a:cs typeface="Times New Roman" pitchFamily="34" charset="-120"/>
-              </a:rPr>
-              <a:t> </a:t>
-            </a:r>
-            <a:pPr algn="l" indent="0" marL="0">
-              <a:spcAft>
-                <a:spcPts val="500"/>
-              </a:spcAft>
-              <a:buNone/>
-            </a:pPr>
-            <a:r>
-              <a:rPr lang="en-US" sz="1500" b="1" i="1" dirty="0">
-                <a:solidFill>
-                  <a:srgbClr val="000000"/>
-                </a:solidFill>
-                <a:latin typeface="Times New Roman" pitchFamily="34" charset="0"/>
-                <a:ea typeface="Times New Roman" pitchFamily="34" charset="-122"/>
-                <a:cs typeface="Times New Roman" pitchFamily="34" charset="-120"/>
-              </a:rPr>
-              <a:t>r</a:t>
-            </a:r>
-            <a:pPr algn="l" indent="0" marL="0">
-              <a:spcAft>
-                <a:spcPts val="500"/>
-              </a:spcAft>
-              <a:buNone/>
-            </a:pPr>
-            <a:r>
-              <a:rPr lang="en-US" sz="1500" i="1" baseline="-40000" dirty="0">
-                <a:solidFill>
-                  <a:srgbClr val="000000"/>
-                </a:solidFill>
-                <a:latin typeface="Times New Roman" pitchFamily="34" charset="0"/>
-                <a:ea typeface="Times New Roman" pitchFamily="34" charset="-122"/>
-                <a:cs typeface="Times New Roman" pitchFamily="34" charset="-120"/>
-              </a:rPr>
-              <a:t>u</a:t>
             </a:r>
             <a:endParaRPr lang="en-US" sz="1400" dirty="0"/>
           </a:p>
@@ -8352,6 +8947,298 @@
                 <a:ea typeface="Times New Roman" pitchFamily="34" charset="-122"/>
                 <a:cs typeface="Times New Roman" pitchFamily="34" charset="-120"/>
               </a:rPr>
+              <a:t>u</a:t>
+            </a:r>
+            <a:pPr algn="l" indent="0" marL="0">
+              <a:spcAft>
+                <a:spcPts val="500"/>
+              </a:spcAft>
+              <a:buNone/>
+            </a:pPr>
+            <a:r>
+              <a:rPr lang="en-US" sz="1500" i="1" baseline="-40000" dirty="0">
+                <a:solidFill>
+                  <a:srgbClr val="000000"/>
+                </a:solidFill>
+                <a:latin typeface="Times New Roman" pitchFamily="34" charset="0"/>
+                <a:ea typeface="Times New Roman" pitchFamily="34" charset="-122"/>
+                <a:cs typeface="Times New Roman" pitchFamily="34" charset="-120"/>
+              </a:rPr>
+              <a:t>i</a:t>
+            </a:r>
+            <a:pPr algn="l" indent="0" marL="0">
+              <a:spcAft>
+                <a:spcPts val="500"/>
+              </a:spcAft>
+              <a:buNone/>
+            </a:pPr>
+            <a:r>
+              <a:rPr lang="en-US" sz="1500" baseline="-40000" dirty="0">
+                <a:solidFill>
+                  <a:srgbClr val="000000"/>
+                </a:solidFill>
+                <a:latin typeface="Times New Roman" pitchFamily="34" charset="0"/>
+                <a:ea typeface="Times New Roman" pitchFamily="34" charset="-122"/>
+                <a:cs typeface="Times New Roman" pitchFamily="34" charset="-120"/>
+              </a:rPr>
+              <a:t>,</a:t>
+            </a:r>
+            <a:pPr algn="l" indent="0" marL="0">
+              <a:spcAft>
+                <a:spcPts val="500"/>
+              </a:spcAft>
+              <a:buNone/>
+            </a:pPr>
+            <a:r>
+              <a:rPr lang="en-US" sz="1500" i="1" baseline="-40000" dirty="0">
+                <a:solidFill>
+                  <a:srgbClr val="000000"/>
+                </a:solidFill>
+                <a:latin typeface="Times New Roman" pitchFamily="34" charset="0"/>
+                <a:ea typeface="Times New Roman" pitchFamily="34" charset="-122"/>
+                <a:cs typeface="Times New Roman" pitchFamily="34" charset="-120"/>
+              </a:rPr>
+              <a:t>k</a:t>
+            </a:r>
+            <a:pPr algn="l" indent="0" marL="0">
+              <a:spcAft>
+                <a:spcPts val="500"/>
+              </a:spcAft>
+              <a:buNone/>
+            </a:pPr>
+            <a:r>
+              <a:rPr lang="en-US" sz="1500" dirty="0">
+                <a:solidFill>
+                  <a:srgbClr val="000000"/>
+                </a:solidFill>
+                <a:latin typeface="Times New Roman" pitchFamily="34" charset="0"/>
+                <a:ea typeface="Times New Roman" pitchFamily="34" charset="-122"/>
+                <a:cs typeface="Times New Roman" pitchFamily="34" charset="-120"/>
+              </a:rPr>
+              <a:t> = (</a:t>
+            </a:r>
+            <a:pPr algn="l" indent="0" marL="0">
+              <a:spcAft>
+                <a:spcPts val="500"/>
+              </a:spcAft>
+              <a:buNone/>
+            </a:pPr>
+            <a:r>
+              <a:rPr lang="en-US" sz="1500" b="1" i="1" dirty="0">
+                <a:solidFill>
+                  <a:srgbClr val="000000"/>
+                </a:solidFill>
+                <a:latin typeface="Times New Roman" pitchFamily="34" charset="0"/>
+                <a:ea typeface="Times New Roman" pitchFamily="34" charset="-122"/>
+                <a:cs typeface="Times New Roman" pitchFamily="34" charset="-120"/>
+              </a:rPr>
+              <a:t>p</a:t>
+            </a:r>
+            <a:pPr algn="l" indent="0" marL="0">
+              <a:spcAft>
+                <a:spcPts val="500"/>
+              </a:spcAft>
+              <a:buNone/>
+            </a:pPr>
+            <a:r>
+              <a:rPr lang="en-US" sz="1500" i="1" baseline="-40000" dirty="0">
+                <a:solidFill>
+                  <a:srgbClr val="000000"/>
+                </a:solidFill>
+                <a:latin typeface="Times New Roman" pitchFamily="34" charset="0"/>
+                <a:ea typeface="Times New Roman" pitchFamily="34" charset="-122"/>
+                <a:cs typeface="Times New Roman" pitchFamily="34" charset="-120"/>
+              </a:rPr>
+              <a:t>i</a:t>
+            </a:r>
+            <a:pPr algn="l" indent="0" marL="0">
+              <a:spcAft>
+                <a:spcPts val="500"/>
+              </a:spcAft>
+              <a:buNone/>
+            </a:pPr>
+            <a:r>
+              <a:rPr lang="en-US" sz="1500" baseline="-40000" dirty="0">
+                <a:solidFill>
+                  <a:srgbClr val="000000"/>
+                </a:solidFill>
+                <a:latin typeface="Times New Roman" pitchFamily="34" charset="0"/>
+                <a:ea typeface="Times New Roman" pitchFamily="34" charset="-122"/>
+                <a:cs typeface="Times New Roman" pitchFamily="34" charset="-120"/>
+              </a:rPr>
+              <a:t>,</a:t>
+            </a:r>
+            <a:pPr algn="l" indent="0" marL="0">
+              <a:spcAft>
+                <a:spcPts val="500"/>
+              </a:spcAft>
+              <a:buNone/>
+            </a:pPr>
+            <a:r>
+              <a:rPr lang="en-US" sz="1500" i="1" baseline="-40000" dirty="0">
+                <a:solidFill>
+                  <a:srgbClr val="000000"/>
+                </a:solidFill>
+                <a:latin typeface="Times New Roman" pitchFamily="34" charset="0"/>
+                <a:ea typeface="Times New Roman" pitchFamily="34" charset="-122"/>
+                <a:cs typeface="Times New Roman" pitchFamily="34" charset="-120"/>
+              </a:rPr>
+              <a:t>k</a:t>
+            </a:r>
+            <a:pPr algn="l" indent="0" marL="0">
+              <a:spcAft>
+                <a:spcPts val="500"/>
+              </a:spcAft>
+              <a:buNone/>
+            </a:pPr>
+            <a:r>
+              <a:rPr lang="en-US" sz="1500" baseline="30000" dirty="0">
+                <a:solidFill>
+                  <a:srgbClr val="000000"/>
+                </a:solidFill>
+                <a:latin typeface="Times New Roman" pitchFamily="34" charset="0"/>
+                <a:ea typeface="Times New Roman" pitchFamily="34" charset="-122"/>
+                <a:cs typeface="Times New Roman" pitchFamily="34" charset="-120"/>
+              </a:rPr>
+              <a:t>cam</a:t>
+            </a:r>
+            <a:pPr algn="l" indent="0" marL="0">
+              <a:spcAft>
+                <a:spcPts val="500"/>
+              </a:spcAft>
+              <a:buNone/>
+            </a:pPr>
+            <a:r>
+              <a:rPr lang="en-US" sz="1500" dirty="0">
+                <a:solidFill>
+                  <a:srgbClr val="000000"/>
+                </a:solidFill>
+                <a:latin typeface="Times New Roman" pitchFamily="34" charset="0"/>
+                <a:ea typeface="Times New Roman" pitchFamily="34" charset="-122"/>
+                <a:cs typeface="Times New Roman" pitchFamily="34" charset="-120"/>
+              </a:rPr>
+              <a:t> − </a:t>
+            </a:r>
+            <a:pPr algn="l" indent="0" marL="0">
+              <a:spcAft>
+                <a:spcPts val="500"/>
+              </a:spcAft>
+              <a:buNone/>
+            </a:pPr>
+            <a:r>
+              <a:rPr lang="en-US" sz="1500" b="1" i="1" dirty="0">
+                <a:solidFill>
+                  <a:srgbClr val="000000"/>
+                </a:solidFill>
+                <a:latin typeface="Times New Roman" pitchFamily="34" charset="0"/>
+                <a:ea typeface="Times New Roman" pitchFamily="34" charset="-122"/>
+                <a:cs typeface="Times New Roman" pitchFamily="34" charset="-120"/>
+              </a:rPr>
+              <a:t>c</a:t>
+            </a:r>
+            <a:pPr algn="l" indent="0" marL="0">
+              <a:spcAft>
+                <a:spcPts val="500"/>
+              </a:spcAft>
+              <a:buNone/>
+            </a:pPr>
+            <a:r>
+              <a:rPr lang="en-US" sz="1500" dirty="0">
+                <a:solidFill>
+                  <a:srgbClr val="000000"/>
+                </a:solidFill>
+                <a:latin typeface="Times New Roman" pitchFamily="34" charset="0"/>
+                <a:ea typeface="Times New Roman" pitchFamily="34" charset="-122"/>
+                <a:cs typeface="Times New Roman" pitchFamily="34" charset="-120"/>
+              </a:rPr>
+              <a:t>)</a:t>
+            </a:r>
+            <a:pPr algn="l" indent="0" marL="0">
+              <a:spcAft>
+                <a:spcPts val="500"/>
+              </a:spcAft>
+              <a:buNone/>
+            </a:pPr>
+            <a:r>
+              <a:rPr lang="en-US" sz="1500" baseline="30000" dirty="0">
+                <a:solidFill>
+                  <a:srgbClr val="000000"/>
+                </a:solidFill>
+                <a:latin typeface="Times New Roman" pitchFamily="34" charset="0"/>
+                <a:ea typeface="Times New Roman" pitchFamily="34" charset="-122"/>
+                <a:cs typeface="Times New Roman" pitchFamily="34" charset="-120"/>
+              </a:rPr>
+              <a:t>T</a:t>
+            </a:r>
+            <a:pPr algn="l" indent="0" marL="0">
+              <a:spcAft>
+                <a:spcPts val="500"/>
+              </a:spcAft>
+              <a:buNone/>
+            </a:pPr>
+            <a:r>
+              <a:rPr lang="en-US" sz="1500" dirty="0">
+                <a:solidFill>
+                  <a:srgbClr val="000000"/>
+                </a:solidFill>
+                <a:latin typeface="Times New Roman" pitchFamily="34" charset="0"/>
+                <a:ea typeface="Times New Roman" pitchFamily="34" charset="-122"/>
+                <a:cs typeface="Times New Roman" pitchFamily="34" charset="-120"/>
+              </a:rPr>
+              <a:t> </a:t>
+            </a:r>
+            <a:pPr algn="l" indent="0" marL="0">
+              <a:spcAft>
+                <a:spcPts val="500"/>
+              </a:spcAft>
+              <a:buNone/>
+            </a:pPr>
+            <a:r>
+              <a:rPr lang="en-US" sz="1500" b="1" i="1" dirty="0">
+                <a:solidFill>
+                  <a:srgbClr val="000000"/>
+                </a:solidFill>
+                <a:latin typeface="Times New Roman" pitchFamily="34" charset="0"/>
+                <a:ea typeface="Times New Roman" pitchFamily="34" charset="-122"/>
+                <a:cs typeface="Times New Roman" pitchFamily="34" charset="-120"/>
+              </a:rPr>
+              <a:t>r</a:t>
+            </a:r>
+            <a:pPr algn="l" indent="0" marL="0">
+              <a:spcAft>
+                <a:spcPts val="500"/>
+              </a:spcAft>
+              <a:buNone/>
+            </a:pPr>
+            <a:r>
+              <a:rPr lang="en-US" sz="1500" i="1" baseline="-40000" dirty="0">
+                <a:solidFill>
+                  <a:srgbClr val="000000"/>
+                </a:solidFill>
+                <a:latin typeface="Times New Roman" pitchFamily="34" charset="0"/>
+                <a:ea typeface="Times New Roman" pitchFamily="34" charset="-122"/>
+                <a:cs typeface="Times New Roman" pitchFamily="34" charset="-120"/>
+              </a:rPr>
+              <a:t>u</a:t>
+            </a:r>
+            <a:endParaRPr lang="en-US" sz="1400" dirty="0"/>
+          </a:p>
+          <a:p>
+            <a:pPr algn="l" indent="0" marL="0">
+              <a:spcAft>
+                <a:spcPts val="500"/>
+              </a:spcAft>
+              <a:buNone/>
+            </a:pPr>
+            <a:r>
+              <a:rPr lang="en-US" sz="1500" i="1" dirty="0">
+                <a:solidFill>
+                  <a:srgbClr val="000000"/>
+                </a:solidFill>
+                <a:latin typeface="Times New Roman" pitchFamily="34" charset="0"/>
+                <a:ea typeface="Times New Roman" pitchFamily="34" charset="-122"/>
+                <a:cs typeface="Times New Roman" pitchFamily="34" charset="-120"/>
+              </a:rPr>
               <a:t>v</a:t>
             </a:r>
             <a:pPr algn="l" indent="0" marL="0">
@@ -8625,6 +9512,502 @@
                 <a:cs typeface="Times New Roman" pitchFamily="34" charset="-120"/>
               </a:rPr>
               <a:t>v</a:t>
+            </a:r>
+            <a:endParaRPr lang="en-US" sz="1400" dirty="0"/>
+          </a:p>
+          <a:p>
+            <a:pPr algn="l" indent="0" marL="0">
+              <a:spcAft>
+                <a:spcPts val="500"/>
+              </a:spcAft>
+              <a:buNone/>
+            </a:pPr>
+            <a:r>
+              <a:rPr lang="en-US" sz="1300" dirty="0">
+                <a:solidFill>
+                  <a:srgbClr val="000000"/>
+                </a:solidFill>
+                <a:latin typeface="Times New Roman" pitchFamily="34" charset="0"/>
+                <a:ea typeface="Times New Roman" pitchFamily="34" charset="-122"/>
+                <a:cs typeface="Times New Roman" pitchFamily="34" charset="-120"/>
+              </a:rPr>
+              <a:t>→ </a:t>
+            </a:r>
+            <a:pPr algn="l" indent="0" marL="0">
+              <a:spcAft>
+                <a:spcPts val="500"/>
+              </a:spcAft>
+              <a:buNone/>
+            </a:pPr>
+            <a:r>
+              <a:rPr lang="en-US" sz="1300" b="1" i="1" dirty="0">
+                <a:solidFill>
+                  <a:srgbClr val="000000"/>
+                </a:solidFill>
+                <a:latin typeface="Times New Roman" pitchFamily="34" charset="0"/>
+                <a:ea typeface="Times New Roman" pitchFamily="34" charset="-122"/>
+                <a:cs typeface="Times New Roman" pitchFamily="34" charset="-120"/>
+              </a:rPr>
+              <a:t>r</a:t>
+            </a:r>
+            <a:pPr algn="l" indent="0" marL="0">
+              <a:spcAft>
+                <a:spcPts val="500"/>
+              </a:spcAft>
+              <a:buNone/>
+            </a:pPr>
+            <a:r>
+              <a:rPr lang="en-US" sz="1300" i="1" baseline="-40000" dirty="0">
+                <a:solidFill>
+                  <a:srgbClr val="000000"/>
+                </a:solidFill>
+                <a:latin typeface="Times New Roman" pitchFamily="34" charset="0"/>
+                <a:ea typeface="Times New Roman" pitchFamily="34" charset="-122"/>
+                <a:cs typeface="Times New Roman" pitchFamily="34" charset="-120"/>
+              </a:rPr>
+              <a:t>u</a:t>
+            </a:r>
+            <a:pPr algn="l" indent="0" marL="0">
+              <a:spcAft>
+                <a:spcPts val="500"/>
+              </a:spcAft>
+              <a:buNone/>
+            </a:pPr>
+            <a:r>
+              <a:rPr lang="en-US" sz="1300" dirty="0">
+                <a:solidFill>
+                  <a:srgbClr val="000000"/>
+                </a:solidFill>
+                <a:latin typeface="Times New Roman" pitchFamily="34" charset="0"/>
+                <a:ea typeface="Times New Roman" pitchFamily="34" charset="-122"/>
+                <a:cs typeface="Times New Roman" pitchFamily="34" charset="-120"/>
+              </a:rPr>
+              <a:t>, </a:t>
+            </a:r>
+            <a:pPr algn="l" indent="0" marL="0">
+              <a:spcAft>
+                <a:spcPts val="500"/>
+              </a:spcAft>
+              <a:buNone/>
+            </a:pPr>
+            <a:r>
+              <a:rPr lang="en-US" sz="1300" b="1" i="1" dirty="0">
+                <a:solidFill>
+                  <a:srgbClr val="000000"/>
+                </a:solidFill>
+                <a:latin typeface="Times New Roman" pitchFamily="34" charset="0"/>
+                <a:ea typeface="Times New Roman" pitchFamily="34" charset="-122"/>
+                <a:cs typeface="Times New Roman" pitchFamily="34" charset="-120"/>
+              </a:rPr>
+              <a:t>r</a:t>
+            </a:r>
+            <a:pPr algn="l" indent="0" marL="0">
+              <a:spcAft>
+                <a:spcPts val="500"/>
+              </a:spcAft>
+              <a:buNone/>
+            </a:pPr>
+            <a:r>
+              <a:rPr lang="en-US" sz="1300" i="1" baseline="-40000" dirty="0">
+                <a:solidFill>
+                  <a:srgbClr val="000000"/>
+                </a:solidFill>
+                <a:latin typeface="Times New Roman" pitchFamily="34" charset="0"/>
+                <a:ea typeface="Times New Roman" pitchFamily="34" charset="-122"/>
+                <a:cs typeface="Times New Roman" pitchFamily="34" charset="-120"/>
+              </a:rPr>
+              <a:t>v</a:t>
+            </a:r>
+            <a:pPr algn="l" indent="0" marL="0">
+              <a:spcAft>
+                <a:spcPts val="500"/>
+              </a:spcAft>
+              <a:buNone/>
+            </a:pPr>
+            <a:r>
+              <a:rPr lang="en-US" sz="1300" dirty="0">
+                <a:solidFill>
+                  <a:srgbClr val="000000"/>
+                </a:solidFill>
+                <a:latin typeface="Times New Roman" pitchFamily="34" charset="0"/>
+                <a:ea typeface="Times New Roman" pitchFamily="34" charset="-122"/>
+                <a:cs typeface="Times New Roman" pitchFamily="34" charset="-120"/>
+              </a:rPr>
+              <a:t>, </a:t>
+            </a:r>
+            <a:pPr algn="l" indent="0" marL="0">
+              <a:spcAft>
+                <a:spcPts val="500"/>
+              </a:spcAft>
+              <a:buNone/>
+            </a:pPr>
+            <a:r>
+              <a:rPr lang="en-US" sz="1300" b="1" i="1" dirty="0">
+                <a:solidFill>
+                  <a:srgbClr val="000000"/>
+                </a:solidFill>
+                <a:latin typeface="Times New Roman" pitchFamily="34" charset="0"/>
+                <a:ea typeface="Times New Roman" pitchFamily="34" charset="-122"/>
+                <a:cs typeface="Times New Roman" pitchFamily="34" charset="-120"/>
+              </a:rPr>
+              <a:t>g</a:t>
+            </a:r>
+            <a:pPr algn="l" indent="0" marL="0">
+              <a:spcAft>
+                <a:spcPts val="500"/>
+              </a:spcAft>
+              <a:buNone/>
+            </a:pPr>
+            <a:r>
+              <a:rPr lang="en-US" sz="1300" dirty="0">
+                <a:solidFill>
+                  <a:srgbClr val="000000"/>
+                </a:solidFill>
+                <a:latin typeface="Times New Roman" pitchFamily="34" charset="0"/>
+                <a:ea typeface="Times New Roman" pitchFamily="34" charset="-122"/>
+                <a:cs typeface="Times New Roman" pitchFamily="34" charset="-120"/>
+              </a:rPr>
+              <a:t> </a:t>
+            </a:r>
+            <a:pPr algn="l" indent="0" marL="0">
+              <a:spcAft>
+                <a:spcPts val="500"/>
+              </a:spcAft>
+              <a:buNone/>
+            </a:pPr>
+            <a:r>
+              <a:rPr lang="en-US" sz="1300" dirty="0">
+                <a:solidFill>
+                  <a:srgbClr val="000000"/>
+                </a:solidFill>
+                <a:latin typeface="Malgun Gothic" pitchFamily="34" charset="0"/>
+                <a:ea typeface="Malgun Gothic" pitchFamily="34" charset="-122"/>
+                <a:cs typeface="Malgun Gothic" pitchFamily="34" charset="-120"/>
+              </a:rPr>
+              <a:t>가</a:t>
+            </a:r>
+            <a:pPr algn="l" indent="0" marL="0">
+              <a:spcAft>
+                <a:spcPts val="500"/>
+              </a:spcAft>
+              <a:buNone/>
+            </a:pPr>
+            <a:r>
+              <a:rPr lang="en-US" sz="1300" dirty="0">
+                <a:solidFill>
+                  <a:srgbClr val="000000"/>
+                </a:solidFill>
+                <a:latin typeface="Times New Roman" pitchFamily="34" charset="0"/>
+                <a:ea typeface="Times New Roman" pitchFamily="34" charset="-122"/>
+                <a:cs typeface="Times New Roman" pitchFamily="34" charset="-120"/>
+              </a:rPr>
+              <a:t> </a:t>
+            </a:r>
+            <a:pPr algn="l" indent="0" marL="0">
+              <a:spcAft>
+                <a:spcPts val="500"/>
+              </a:spcAft>
+              <a:buNone/>
+            </a:pPr>
+            <a:r>
+              <a:rPr lang="en-US" sz="1300" i="1" dirty="0">
+                <a:solidFill>
+                  <a:srgbClr val="000000"/>
+                </a:solidFill>
+                <a:latin typeface="Times New Roman" pitchFamily="34" charset="0"/>
+                <a:ea typeface="Times New Roman" pitchFamily="34" charset="-122"/>
+                <a:cs typeface="Times New Roman" pitchFamily="34" charset="-120"/>
+              </a:rPr>
+              <a:t>x</a:t>
+            </a:r>
+            <a:pPr algn="l" indent="0" marL="0">
+              <a:spcAft>
+                <a:spcPts val="500"/>
+              </a:spcAft>
+              <a:buNone/>
+            </a:pPr>
+            <a:r>
+              <a:rPr lang="en-US" sz="1300" baseline="-40000" dirty="0">
+                <a:solidFill>
+                  <a:srgbClr val="000000"/>
+                </a:solidFill>
+                <a:latin typeface="Times New Roman" pitchFamily="34" charset="0"/>
+                <a:ea typeface="Times New Roman" pitchFamily="34" charset="-122"/>
+                <a:cs typeface="Times New Roman" pitchFamily="34" charset="-120"/>
+              </a:rPr>
+              <a:t>c</a:t>
+            </a:r>
+            <a:pPr algn="l" indent="0" marL="0">
+              <a:spcAft>
+                <a:spcPts val="500"/>
+              </a:spcAft>
+              <a:buNone/>
+            </a:pPr>
+            <a:r>
+              <a:rPr lang="en-US" sz="1300" dirty="0">
+                <a:solidFill>
+                  <a:srgbClr val="000000"/>
+                </a:solidFill>
+                <a:latin typeface="Times New Roman" pitchFamily="34" charset="0"/>
+                <a:ea typeface="Times New Roman" pitchFamily="34" charset="-122"/>
+                <a:cs typeface="Times New Roman" pitchFamily="34" charset="-120"/>
+              </a:rPr>
+              <a:t>, </a:t>
+            </a:r>
+            <a:pPr algn="l" indent="0" marL="0">
+              <a:spcAft>
+                <a:spcPts val="500"/>
+              </a:spcAft>
+              <a:buNone/>
+            </a:pPr>
+            <a:r>
+              <a:rPr lang="en-US" sz="1300" i="1" dirty="0">
+                <a:solidFill>
+                  <a:srgbClr val="000000"/>
+                </a:solidFill>
+                <a:latin typeface="Times New Roman" pitchFamily="34" charset="0"/>
+                <a:ea typeface="Times New Roman" pitchFamily="34" charset="-122"/>
+                <a:cs typeface="Times New Roman" pitchFamily="34" charset="-120"/>
+              </a:rPr>
+              <a:t>y</a:t>
+            </a:r>
+            <a:pPr algn="l" indent="0" marL="0">
+              <a:spcAft>
+                <a:spcPts val="500"/>
+              </a:spcAft>
+              <a:buNone/>
+            </a:pPr>
+            <a:r>
+              <a:rPr lang="en-US" sz="1300" baseline="-40000" dirty="0">
+                <a:solidFill>
+                  <a:srgbClr val="000000"/>
+                </a:solidFill>
+                <a:latin typeface="Times New Roman" pitchFamily="34" charset="0"/>
+                <a:ea typeface="Times New Roman" pitchFamily="34" charset="-122"/>
+                <a:cs typeface="Times New Roman" pitchFamily="34" charset="-120"/>
+              </a:rPr>
+              <a:t>c</a:t>
+            </a:r>
+            <a:pPr algn="l" indent="0" marL="0">
+              <a:spcAft>
+                <a:spcPts val="500"/>
+              </a:spcAft>
+              <a:buNone/>
+            </a:pPr>
+            <a:r>
+              <a:rPr lang="en-US" sz="1300" dirty="0">
+                <a:solidFill>
+                  <a:srgbClr val="000000"/>
+                </a:solidFill>
+                <a:latin typeface="Times New Roman" pitchFamily="34" charset="0"/>
+                <a:ea typeface="Times New Roman" pitchFamily="34" charset="-122"/>
+                <a:cs typeface="Times New Roman" pitchFamily="34" charset="-120"/>
+              </a:rPr>
+              <a:t>, </a:t>
+            </a:r>
+            <a:pPr algn="l" indent="0" marL="0">
+              <a:spcAft>
+                <a:spcPts val="500"/>
+              </a:spcAft>
+              <a:buNone/>
+            </a:pPr>
+            <a:r>
+              <a:rPr lang="en-US" sz="1300" i="1" dirty="0">
+                <a:solidFill>
+                  <a:srgbClr val="000000"/>
+                </a:solidFill>
+                <a:latin typeface="Times New Roman" pitchFamily="34" charset="0"/>
+                <a:ea typeface="Times New Roman" pitchFamily="34" charset="-122"/>
+                <a:cs typeface="Times New Roman" pitchFamily="34" charset="-120"/>
+              </a:rPr>
+              <a:t>z</a:t>
+            </a:r>
+            <a:pPr algn="l" indent="0" marL="0">
+              <a:spcAft>
+                <a:spcPts val="500"/>
+              </a:spcAft>
+              <a:buNone/>
+            </a:pPr>
+            <a:r>
+              <a:rPr lang="en-US" sz="1300" baseline="-40000" dirty="0">
+                <a:solidFill>
+                  <a:srgbClr val="000000"/>
+                </a:solidFill>
+                <a:latin typeface="Times New Roman" pitchFamily="34" charset="0"/>
+                <a:ea typeface="Times New Roman" pitchFamily="34" charset="-122"/>
+                <a:cs typeface="Times New Roman" pitchFamily="34" charset="-120"/>
+              </a:rPr>
+              <a:t>c</a:t>
+            </a:r>
+            <a:pPr algn="l" indent="0" marL="0">
+              <a:spcAft>
+                <a:spcPts val="500"/>
+              </a:spcAft>
+              <a:buNone/>
+            </a:pPr>
+            <a:r>
+              <a:rPr lang="en-US" sz="1300" dirty="0">
+                <a:solidFill>
+                  <a:srgbClr val="000000"/>
+                </a:solidFill>
+                <a:latin typeface="Times New Roman" pitchFamily="34" charset="0"/>
+                <a:ea typeface="Times New Roman" pitchFamily="34" charset="-122"/>
+                <a:cs typeface="Times New Roman" pitchFamily="34" charset="-120"/>
+              </a:rPr>
+              <a:t> </a:t>
+            </a:r>
+            <a:pPr algn="l" indent="0" marL="0">
+              <a:spcAft>
+                <a:spcPts val="500"/>
+              </a:spcAft>
+              <a:buNone/>
+            </a:pPr>
+            <a:r>
+              <a:rPr lang="en-US" sz="1300" dirty="0">
+                <a:solidFill>
+                  <a:srgbClr val="000000"/>
+                </a:solidFill>
+                <a:latin typeface="Malgun Gothic" pitchFamily="34" charset="0"/>
+                <a:ea typeface="Malgun Gothic" pitchFamily="34" charset="-122"/>
+                <a:cs typeface="Malgun Gothic" pitchFamily="34" charset="-120"/>
+              </a:rPr>
+              <a:t>와</a:t>
+            </a:r>
+            <a:pPr algn="l" indent="0" marL="0">
+              <a:spcAft>
+                <a:spcPts val="500"/>
+              </a:spcAft>
+              <a:buNone/>
+            </a:pPr>
+            <a:r>
+              <a:rPr lang="en-US" sz="1300" dirty="0">
+                <a:solidFill>
+                  <a:srgbClr val="000000"/>
+                </a:solidFill>
+                <a:latin typeface="Times New Roman" pitchFamily="34" charset="0"/>
+                <a:ea typeface="Times New Roman" pitchFamily="34" charset="-122"/>
+                <a:cs typeface="Times New Roman" pitchFamily="34" charset="-120"/>
+              </a:rPr>
+              <a:t> </a:t>
+            </a:r>
+            <a:pPr algn="l" indent="0" marL="0">
+              <a:spcAft>
+                <a:spcPts val="500"/>
+              </a:spcAft>
+              <a:buNone/>
+            </a:pPr>
+            <a:r>
+              <a:rPr lang="en-US" sz="1300" dirty="0">
+                <a:solidFill>
+                  <a:srgbClr val="000000"/>
+                </a:solidFill>
+                <a:latin typeface="Malgun Gothic" pitchFamily="34" charset="0"/>
+                <a:ea typeface="Malgun Gothic" pitchFamily="34" charset="-122"/>
+                <a:cs typeface="Malgun Gothic" pitchFamily="34" charset="-120"/>
+              </a:rPr>
+              <a:t>일치</a:t>
+            </a:r>
+            <a:pPr algn="l" indent="0" marL="0">
+              <a:spcAft>
+                <a:spcPts val="500"/>
+              </a:spcAft>
+              <a:buNone/>
+            </a:pPr>
+            <a:r>
+              <a:rPr lang="en-US" sz="1300" dirty="0">
+                <a:solidFill>
+                  <a:srgbClr val="000000"/>
+                </a:solidFill>
+                <a:latin typeface="Times New Roman" pitchFamily="34" charset="0"/>
+                <a:ea typeface="Times New Roman" pitchFamily="34" charset="-122"/>
+                <a:cs typeface="Times New Roman" pitchFamily="34" charset="-120"/>
+              </a:rPr>
+              <a:t>,  </a:t>
+            </a:r>
+            <a:pPr algn="l" indent="0" marL="0">
+              <a:spcAft>
+                <a:spcPts val="500"/>
+              </a:spcAft>
+              <a:buNone/>
+            </a:pPr>
+            <a:r>
+              <a:rPr lang="en-US" sz="1300" i="1" dirty="0">
+                <a:solidFill>
+                  <a:srgbClr val="000000"/>
+                </a:solidFill>
+                <a:latin typeface="Times New Roman" pitchFamily="34" charset="0"/>
+                <a:ea typeface="Times New Roman" pitchFamily="34" charset="-122"/>
+                <a:cs typeface="Times New Roman" pitchFamily="34" charset="-120"/>
+              </a:rPr>
+              <a:t>w</a:t>
+            </a:r>
+            <a:pPr algn="l" indent="0" marL="0">
+              <a:spcAft>
+                <a:spcPts val="500"/>
+              </a:spcAft>
+              <a:buNone/>
+            </a:pPr>
+            <a:r>
+              <a:rPr lang="en-US" sz="1300" i="1" baseline="-40000" dirty="0">
+                <a:solidFill>
+                  <a:srgbClr val="000000"/>
+                </a:solidFill>
+                <a:latin typeface="Times New Roman" pitchFamily="34" charset="0"/>
+                <a:ea typeface="Times New Roman" pitchFamily="34" charset="-122"/>
+                <a:cs typeface="Times New Roman" pitchFamily="34" charset="-120"/>
+              </a:rPr>
+              <a:t>i</a:t>
+            </a:r>
+            <a:pPr algn="l" indent="0" marL="0">
+              <a:spcAft>
+                <a:spcPts val="500"/>
+              </a:spcAft>
+              <a:buNone/>
+            </a:pPr>
+            <a:r>
+              <a:rPr lang="en-US" sz="1300" baseline="-40000" dirty="0">
+                <a:solidFill>
+                  <a:srgbClr val="000000"/>
+                </a:solidFill>
+                <a:latin typeface="Times New Roman" pitchFamily="34" charset="0"/>
+                <a:ea typeface="Times New Roman" pitchFamily="34" charset="-122"/>
+                <a:cs typeface="Times New Roman" pitchFamily="34" charset="-120"/>
+              </a:rPr>
+              <a:t>,</a:t>
+            </a:r>
+            <a:pPr algn="l" indent="0" marL="0">
+              <a:spcAft>
+                <a:spcPts val="500"/>
+              </a:spcAft>
+              <a:buNone/>
+            </a:pPr>
+            <a:r>
+              <a:rPr lang="en-US" sz="1300" i="1" baseline="-40000" dirty="0">
+                <a:solidFill>
+                  <a:srgbClr val="000000"/>
+                </a:solidFill>
+                <a:latin typeface="Times New Roman" pitchFamily="34" charset="0"/>
+                <a:ea typeface="Times New Roman" pitchFamily="34" charset="-122"/>
+                <a:cs typeface="Times New Roman" pitchFamily="34" charset="-120"/>
+              </a:rPr>
+              <a:t>k</a:t>
+            </a:r>
+            <a:pPr algn="l" indent="0" marL="0">
+              <a:spcAft>
+                <a:spcPts val="500"/>
+              </a:spcAft>
+              <a:buNone/>
+            </a:pPr>
+            <a:r>
+              <a:rPr lang="en-US" sz="1300" dirty="0">
+                <a:solidFill>
+                  <a:srgbClr val="000000"/>
+                </a:solidFill>
+                <a:latin typeface="Times New Roman" pitchFamily="34" charset="0"/>
+                <a:ea typeface="Times New Roman" pitchFamily="34" charset="-122"/>
+                <a:cs typeface="Times New Roman" pitchFamily="34" charset="-120"/>
+              </a:rPr>
+              <a:t> ≈ 0</a:t>
             </a:r>
             <a:endParaRPr lang="en-US" sz="1400" dirty="0"/>
           </a:p>
@@ -8632,7 +10015,7 @@
       </p:sp>
       <p:sp>
         <p:nvSpPr>
-          <p:cNvPr id="61" name="Text 59"/>
+          <p:cNvPr id="74" name="Text 72"/>
           <p:cNvSpPr txBox="1"/>
           <p:nvPr/>
         </p:nvSpPr>
@@ -8705,7 +10088,7 @@
                 <a:ea typeface="Malgun Gothic" pitchFamily="34" charset="-122"/>
                 <a:cs typeface="Malgun Gothic" pitchFamily="34" charset="-120"/>
               </a:rPr>
-              <a:t>평면</a:t>
+              <a:t>평면을</a:t>
             </a:r>
             <a:pPr algn="ctr" indent="0" marL="0">
               <a:buNone/>
@@ -8733,7 +10116,63 @@
                 <a:ea typeface="Malgun Gothic" pitchFamily="34" charset="-122"/>
                 <a:cs typeface="Malgun Gothic" pitchFamily="34" charset="-120"/>
               </a:rPr>
-              <a:t>기준축으로</a:t>
+              <a:t>회전하여</a:t>
+            </a:r>
+            <a:pPr algn="ctr" indent="0" marL="0">
+              <a:buNone/>
+            </a:pPr>
+            <a:r>
+              <a:rPr lang="en-US" sz="1300" dirty="0">
+                <a:solidFill>
+                  <a:srgbClr val="404040"/>
+                </a:solidFill>
+                <a:latin typeface="Times New Roman" pitchFamily="34" charset="0"/>
+                <a:ea typeface="Times New Roman" pitchFamily="34" charset="-122"/>
+                <a:cs typeface="Times New Roman" pitchFamily="34" charset="-120"/>
+              </a:rPr>
+              <a:t> </a:t>
+            </a:r>
+            <a:pPr algn="ctr" indent="0" marL="0">
+              <a:buNone/>
+            </a:pPr>
+            <a:r>
+              <a:rPr lang="en-US" sz="1300" dirty="0">
+                <a:solidFill>
+                  <a:srgbClr val="404040"/>
+                </a:solidFill>
+                <a:latin typeface="Malgun Gothic" pitchFamily="34" charset="0"/>
+                <a:ea typeface="Malgun Gothic" pitchFamily="34" charset="-122"/>
+                <a:cs typeface="Malgun Gothic" pitchFamily="34" charset="-120"/>
+              </a:rPr>
+              <a:t>카메라</a:t>
+            </a:r>
+            <a:pPr algn="ctr" indent="0" marL="0">
+              <a:buNone/>
+            </a:pPr>
+            <a:r>
+              <a:rPr lang="en-US" sz="1300" dirty="0">
+                <a:solidFill>
+                  <a:srgbClr val="404040"/>
+                </a:solidFill>
+                <a:latin typeface="Times New Roman" pitchFamily="34" charset="0"/>
+                <a:ea typeface="Times New Roman" pitchFamily="34" charset="-122"/>
+                <a:cs typeface="Times New Roman" pitchFamily="34" charset="-120"/>
+              </a:rPr>
+              <a:t> </a:t>
+            </a:r>
+            <a:pPr algn="ctr" indent="0" marL="0">
+              <a:buNone/>
+            </a:pPr>
+            <a:r>
+              <a:rPr lang="en-US" sz="1300" dirty="0">
+                <a:solidFill>
+                  <a:srgbClr val="404040"/>
+                </a:solidFill>
+                <a:latin typeface="Malgun Gothic" pitchFamily="34" charset="0"/>
+                <a:ea typeface="Malgun Gothic" pitchFamily="34" charset="-122"/>
+                <a:cs typeface="Malgun Gothic" pitchFamily="34" charset="-120"/>
+              </a:rPr>
+              <a:t>좌표계와</a:t>
             </a:r>
             <a:pPr algn="ctr" indent="0" marL="0">
               <a:buNone/>
